--- a/decks/askewly-design-intro/export/askewly-design-intro.bespoke.pptx
+++ b/decks/askewly-design-intro/export/askewly-design-intro.bespoke.pptx
@@ -1657,117 +1657,7 @@
       </p:grpSpPr>
       <p:sp>
         <p:nvSpPr>
-          <p:cNvPr id="2" name="Shape 0"/>
-          <p:cNvSpPr/>
-          <p:nvPr/>
-        </p:nvSpPr>
-        <p:spPr>
-          <a:xfrm>
-            <a:off x="0" y="4389120"/>
-            <a:ext cx="12191695" cy="2478024"/>
-          </a:xfrm>
-          <a:prstGeom prst="rect">
-            <a:avLst/>
-          </a:prstGeom>
-          <a:solidFill>
-            <a:srgbClr val="15130F">
-              <a:alpha val="1000"/>
-            </a:srgbClr>
-          </a:solidFill>
-          <a:ln/>
-        </p:spPr>
-      </p:sp>
-      <p:sp>
-        <p:nvSpPr>
-          <p:cNvPr id="3" name="Shape 1"/>
-          <p:cNvSpPr/>
-          <p:nvPr/>
-        </p:nvSpPr>
-        <p:spPr>
-          <a:xfrm>
-            <a:off x="0" y="4882896"/>
-            <a:ext cx="12191695" cy="1984248"/>
-          </a:xfrm>
-          <a:prstGeom prst="rect">
-            <a:avLst/>
-          </a:prstGeom>
-          <a:solidFill>
-            <a:srgbClr val="15130F">
-              <a:alpha val="2000"/>
-            </a:srgbClr>
-          </a:solidFill>
-          <a:ln/>
-        </p:spPr>
-      </p:sp>
-      <p:sp>
-        <p:nvSpPr>
-          <p:cNvPr id="4" name="Shape 2"/>
-          <p:cNvSpPr/>
-          <p:nvPr/>
-        </p:nvSpPr>
-        <p:spPr>
-          <a:xfrm>
-            <a:off x="0" y="5376672"/>
-            <a:ext cx="12191695" cy="1490472"/>
-          </a:xfrm>
-          <a:prstGeom prst="rect">
-            <a:avLst/>
-          </a:prstGeom>
-          <a:solidFill>
-            <a:srgbClr val="15130F">
-              <a:alpha val="3000"/>
-            </a:srgbClr>
-          </a:solidFill>
-          <a:ln/>
-        </p:spPr>
-      </p:sp>
-      <p:sp>
-        <p:nvSpPr>
-          <p:cNvPr id="5" name="Shape 3"/>
-          <p:cNvSpPr/>
-          <p:nvPr/>
-        </p:nvSpPr>
-        <p:spPr>
-          <a:xfrm>
-            <a:off x="0" y="5870448"/>
-            <a:ext cx="12191695" cy="996696"/>
-          </a:xfrm>
-          <a:prstGeom prst="rect">
-            <a:avLst/>
-          </a:prstGeom>
-          <a:solidFill>
-            <a:srgbClr val="15130F">
-              <a:alpha val="4000"/>
-            </a:srgbClr>
-          </a:solidFill>
-          <a:ln/>
-        </p:spPr>
-      </p:sp>
-      <p:sp>
-        <p:nvSpPr>
-          <p:cNvPr id="6" name="Shape 4"/>
-          <p:cNvSpPr/>
-          <p:nvPr/>
-        </p:nvSpPr>
-        <p:spPr>
-          <a:xfrm>
-            <a:off x="0" y="6364224"/>
-            <a:ext cx="12191695" cy="502920"/>
-          </a:xfrm>
-          <a:prstGeom prst="rect">
-            <a:avLst/>
-          </a:prstGeom>
-          <a:solidFill>
-            <a:srgbClr val="15130F">
-              <a:alpha val="5000"/>
-            </a:srgbClr>
-          </a:solidFill>
-          <a:ln/>
-        </p:spPr>
-      </p:sp>
-      <p:sp>
-        <p:nvSpPr>
-          <p:cNvPr id="8" name="Text 5"/>
+          <p:cNvPr id="3" name="Text 0"/>
           <p:cNvSpPr/>
           <p:nvPr/>
         </p:nvSpPr>
@@ -1806,7 +1696,7 @@
       </p:sp>
       <p:sp>
         <p:nvSpPr>
-          <p:cNvPr id="9" name="Text 6"/>
+          <p:cNvPr id="4" name="Text 1"/>
           <p:cNvSpPr/>
           <p:nvPr/>
         </p:nvSpPr>
@@ -1845,7 +1735,7 @@
       </p:sp>
       <p:sp>
         <p:nvSpPr>
-          <p:cNvPr id="10" name="Text 7"/>
+          <p:cNvPr id="5" name="Text 2"/>
           <p:cNvSpPr/>
           <p:nvPr/>
         </p:nvSpPr>
@@ -1884,7 +1774,7 @@
       </p:sp>
       <p:sp>
         <p:nvSpPr>
-          <p:cNvPr id="11" name="Text 8"/>
+          <p:cNvPr id="6" name="Text 3"/>
           <p:cNvSpPr/>
           <p:nvPr/>
         </p:nvSpPr>
@@ -1923,7 +1813,7 @@
       </p:sp>
       <p:sp>
         <p:nvSpPr>
-          <p:cNvPr id="12" name="Shape 9"/>
+          <p:cNvPr id="7" name="Shape 4"/>
           <p:cNvSpPr/>
           <p:nvPr/>
         </p:nvSpPr>
@@ -1950,7 +1840,7 @@
       </p:sp>
       <p:sp>
         <p:nvSpPr>
-          <p:cNvPr id="13" name="Text 10"/>
+          <p:cNvPr id="8" name="Text 5"/>
           <p:cNvSpPr/>
           <p:nvPr/>
         </p:nvSpPr>
@@ -1989,7 +1879,7 @@
       </p:sp>
       <p:sp>
         <p:nvSpPr>
-          <p:cNvPr id="14" name="Shape 11"/>
+          <p:cNvPr id="9" name="Shape 6"/>
           <p:cNvSpPr/>
           <p:nvPr/>
         </p:nvSpPr>
@@ -2016,7 +1906,7 @@
       </p:sp>
       <p:sp>
         <p:nvSpPr>
-          <p:cNvPr id="15" name="Text 12"/>
+          <p:cNvPr id="10" name="Text 7"/>
           <p:cNvSpPr/>
           <p:nvPr/>
         </p:nvSpPr>
@@ -2087,117 +1977,7 @@
       </p:grpSpPr>
       <p:sp>
         <p:nvSpPr>
-          <p:cNvPr id="2" name="Shape 0"/>
-          <p:cNvSpPr/>
-          <p:nvPr/>
-        </p:nvSpPr>
-        <p:spPr>
-          <a:xfrm>
-            <a:off x="0" y="4389120"/>
-            <a:ext cx="12191695" cy="2478024"/>
-          </a:xfrm>
-          <a:prstGeom prst="rect">
-            <a:avLst/>
-          </a:prstGeom>
-          <a:solidFill>
-            <a:srgbClr val="15130F">
-              <a:alpha val="1000"/>
-            </a:srgbClr>
-          </a:solidFill>
-          <a:ln/>
-        </p:spPr>
-      </p:sp>
-      <p:sp>
-        <p:nvSpPr>
-          <p:cNvPr id="3" name="Shape 1"/>
-          <p:cNvSpPr/>
-          <p:nvPr/>
-        </p:nvSpPr>
-        <p:spPr>
-          <a:xfrm>
-            <a:off x="0" y="4882896"/>
-            <a:ext cx="12191695" cy="1984248"/>
-          </a:xfrm>
-          <a:prstGeom prst="rect">
-            <a:avLst/>
-          </a:prstGeom>
-          <a:solidFill>
-            <a:srgbClr val="15130F">
-              <a:alpha val="2000"/>
-            </a:srgbClr>
-          </a:solidFill>
-          <a:ln/>
-        </p:spPr>
-      </p:sp>
-      <p:sp>
-        <p:nvSpPr>
-          <p:cNvPr id="4" name="Shape 2"/>
-          <p:cNvSpPr/>
-          <p:nvPr/>
-        </p:nvSpPr>
-        <p:spPr>
-          <a:xfrm>
-            <a:off x="0" y="5376672"/>
-            <a:ext cx="12191695" cy="1490472"/>
-          </a:xfrm>
-          <a:prstGeom prst="rect">
-            <a:avLst/>
-          </a:prstGeom>
-          <a:solidFill>
-            <a:srgbClr val="15130F">
-              <a:alpha val="3000"/>
-            </a:srgbClr>
-          </a:solidFill>
-          <a:ln/>
-        </p:spPr>
-      </p:sp>
-      <p:sp>
-        <p:nvSpPr>
-          <p:cNvPr id="5" name="Shape 3"/>
-          <p:cNvSpPr/>
-          <p:nvPr/>
-        </p:nvSpPr>
-        <p:spPr>
-          <a:xfrm>
-            <a:off x="0" y="5870448"/>
-            <a:ext cx="12191695" cy="996696"/>
-          </a:xfrm>
-          <a:prstGeom prst="rect">
-            <a:avLst/>
-          </a:prstGeom>
-          <a:solidFill>
-            <a:srgbClr val="15130F">
-              <a:alpha val="4000"/>
-            </a:srgbClr>
-          </a:solidFill>
-          <a:ln/>
-        </p:spPr>
-      </p:sp>
-      <p:sp>
-        <p:nvSpPr>
-          <p:cNvPr id="6" name="Shape 4"/>
-          <p:cNvSpPr/>
-          <p:nvPr/>
-        </p:nvSpPr>
-        <p:spPr>
-          <a:xfrm>
-            <a:off x="0" y="6364224"/>
-            <a:ext cx="12191695" cy="502920"/>
-          </a:xfrm>
-          <a:prstGeom prst="rect">
-            <a:avLst/>
-          </a:prstGeom>
-          <a:solidFill>
-            <a:srgbClr val="15130F">
-              <a:alpha val="5000"/>
-            </a:srgbClr>
-          </a:solidFill>
-          <a:ln/>
-        </p:spPr>
-      </p:sp>
-      <p:sp>
-        <p:nvSpPr>
-          <p:cNvPr id="8" name="Text 5"/>
+          <p:cNvPr id="3" name="Text 0"/>
           <p:cNvSpPr/>
           <p:nvPr/>
         </p:nvSpPr>
@@ -2250,7 +2030,7 @@
       </p:sp>
       <p:sp>
         <p:nvSpPr>
-          <p:cNvPr id="9" name="Text 6"/>
+          <p:cNvPr id="4" name="Text 1"/>
           <p:cNvSpPr/>
           <p:nvPr/>
         </p:nvSpPr>
@@ -2289,7 +2069,7 @@
       </p:sp>
       <p:sp>
         <p:nvSpPr>
-          <p:cNvPr id="10" name="Text 7"/>
+          <p:cNvPr id="5" name="Text 2"/>
           <p:cNvSpPr/>
           <p:nvPr/>
         </p:nvSpPr>
@@ -2328,7 +2108,7 @@
       </p:sp>
       <p:sp>
         <p:nvSpPr>
-          <p:cNvPr id="11" name="Text 8"/>
+          <p:cNvPr id="6" name="Text 3"/>
           <p:cNvSpPr/>
           <p:nvPr/>
         </p:nvSpPr>
@@ -2367,7 +2147,7 @@
       </p:sp>
       <p:sp>
         <p:nvSpPr>
-          <p:cNvPr id="12" name="Text 9"/>
+          <p:cNvPr id="7" name="Text 4"/>
           <p:cNvSpPr/>
           <p:nvPr/>
         </p:nvSpPr>
@@ -2406,7 +2186,7 @@
       </p:sp>
       <p:sp>
         <p:nvSpPr>
-          <p:cNvPr id="13" name="Text 10"/>
+          <p:cNvPr id="8" name="Text 5"/>
           <p:cNvSpPr/>
           <p:nvPr/>
         </p:nvSpPr>
@@ -2445,64 +2225,53 @@
       </p:sp>
       <p:sp>
         <p:nvSpPr>
-          <p:cNvPr id="14" name="Shape 11"/>
-          <p:cNvSpPr/>
-          <p:nvPr/>
-        </p:nvSpPr>
-        <p:spPr>
-          <a:xfrm>
-            <a:off x="685800" y="2514600"/>
-            <a:ext cx="3460394" cy="1463040"/>
-          </a:xfrm>
-          <a:prstGeom prst="roundRect">
-            <a:avLst>
-              <a:gd name="adj" fmla="val 5000"/>
-            </a:avLst>
-          </a:prstGeom>
-          <a:solidFill>
-            <a:srgbClr val="FFFFFB"/>
-          </a:solidFill>
+          <p:cNvPr id="9" name="Shape 6"/>
+          <p:cNvSpPr/>
+          <p:nvPr/>
+        </p:nvSpPr>
+        <p:spPr>
+          <a:xfrm>
+            <a:off x="685800" y="2446020"/>
+            <a:ext cx="3271418" cy="0"/>
+          </a:xfrm>
+          <a:prstGeom prst="line">
+            <a:avLst/>
+          </a:prstGeom>
+          <a:noFill/>
           <a:ln w="12700">
             <a:solidFill>
               <a:srgbClr val="D8D0C1"/>
             </a:solidFill>
             <a:prstDash val="solid"/>
           </a:ln>
-          <a:effectLst>
-            <a:outerShdw sx="100000" sy="100000" kx="0" ky="0" algn="bl" rotWithShape="0" blurRad="152400" dist="25400" dir="5400000">
-              <a:srgbClr val="8A8272">
-                <a:alpha val="22000"/>
-              </a:srgbClr>
-            </a:outerShdw>
-          </a:effectLst>
-        </p:spPr>
-      </p:sp>
-      <p:sp>
-        <p:nvSpPr>
-          <p:cNvPr id="15" name="Text 12"/>
-          <p:cNvSpPr/>
-          <p:nvPr/>
-        </p:nvSpPr>
-        <p:spPr>
-          <a:xfrm>
-            <a:off x="941832" y="2679192"/>
-            <a:ext cx="2948330" cy="457200"/>
-          </a:xfrm>
-          <a:prstGeom prst="rect">
-            <a:avLst/>
-          </a:prstGeom>
-          <a:noFill/>
-          <a:ln/>
-        </p:spPr>
-        <p:txBody>
-          <a:bodyPr wrap="square" rtlCol="0" anchor="ctr"/>
-          <a:lstStyle/>
-          <a:p>
-            <a:pPr indent="0" marL="0">
-              <a:buNone/>
-            </a:pPr>
-            <a:r>
-              <a:rPr lang="en-US" sz="2700" b="1" dirty="0">
+        </p:spPr>
+      </p:sp>
+      <p:sp>
+        <p:nvSpPr>
+          <p:cNvPr id="10" name="Text 7"/>
+          <p:cNvSpPr/>
+          <p:nvPr/>
+        </p:nvSpPr>
+        <p:spPr>
+          <a:xfrm>
+            <a:off x="685800" y="2574036"/>
+            <a:ext cx="3271418" cy="512064"/>
+          </a:xfrm>
+          <a:prstGeom prst="rect">
+            <a:avLst/>
+          </a:prstGeom>
+          <a:noFill/>
+          <a:ln/>
+        </p:spPr>
+        <p:txBody>
+          <a:bodyPr wrap="square" rtlCol="0" anchor="ctr"/>
+          <a:lstStyle/>
+          <a:p>
+            <a:pPr indent="0" marL="0">
+              <a:buNone/>
+            </a:pPr>
+            <a:r>
+              <a:rPr lang="en-US" sz="3000" b="1" dirty="0">
                 <a:solidFill>
                   <a:srgbClr val="2F4B7C"/>
                 </a:solidFill>
@@ -2512,20 +2281,20 @@
               </a:rPr>
               <a:t>562</a:t>
             </a:r>
-            <a:endParaRPr lang="en-US" sz="2700" dirty="0"/>
-          </a:p>
-        </p:txBody>
-      </p:sp>
-      <p:sp>
-        <p:nvSpPr>
-          <p:cNvPr id="16" name="Text 13"/>
-          <p:cNvSpPr/>
-          <p:nvPr/>
-        </p:nvSpPr>
-        <p:spPr>
-          <a:xfrm>
-            <a:off x="941832" y="3172968"/>
-            <a:ext cx="2948330" cy="256032"/>
+            <a:endParaRPr lang="en-US" sz="3000" dirty="0"/>
+          </a:p>
+        </p:txBody>
+      </p:sp>
+      <p:sp>
+        <p:nvSpPr>
+          <p:cNvPr id="11" name="Text 8"/>
+          <p:cNvSpPr/>
+          <p:nvPr/>
+        </p:nvSpPr>
+        <p:spPr>
+          <a:xfrm>
+            <a:off x="685800" y="3122676"/>
+            <a:ext cx="3271418" cy="256032"/>
           </a:xfrm>
           <a:prstGeom prst="rect">
             <a:avLst/>
@@ -2557,14 +2326,14 @@
       </p:sp>
       <p:sp>
         <p:nvSpPr>
-          <p:cNvPr id="17" name="Text 14"/>
-          <p:cNvSpPr/>
-          <p:nvPr/>
-        </p:nvSpPr>
-        <p:spPr>
-          <a:xfrm>
-            <a:off x="941832" y="3429000"/>
-            <a:ext cx="2948330" cy="438912"/>
+          <p:cNvPr id="12" name="Text 9"/>
+          <p:cNvSpPr/>
+          <p:nvPr/>
+        </p:nvSpPr>
+        <p:spPr>
+          <a:xfrm>
+            <a:off x="685800" y="3378708"/>
+            <a:ext cx="3271418" cy="457200"/>
           </a:xfrm>
           <a:prstGeom prst="rect">
             <a:avLst/>
@@ -2596,64 +2365,53 @@
       </p:sp>
       <p:sp>
         <p:nvSpPr>
-          <p:cNvPr id="18" name="Shape 15"/>
-          <p:cNvSpPr/>
-          <p:nvPr/>
-        </p:nvSpPr>
-        <p:spPr>
-          <a:xfrm>
-            <a:off x="4365650" y="2514600"/>
-            <a:ext cx="3460394" cy="1463040"/>
-          </a:xfrm>
-          <a:prstGeom prst="roundRect">
-            <a:avLst>
-              <a:gd name="adj" fmla="val 5000"/>
-            </a:avLst>
-          </a:prstGeom>
-          <a:solidFill>
-            <a:srgbClr val="FFFFFB"/>
-          </a:solidFill>
+          <p:cNvPr id="13" name="Shape 10"/>
+          <p:cNvSpPr/>
+          <p:nvPr/>
+        </p:nvSpPr>
+        <p:spPr>
+          <a:xfrm>
+            <a:off x="4460138" y="2446020"/>
+            <a:ext cx="3271418" cy="0"/>
+          </a:xfrm>
+          <a:prstGeom prst="line">
+            <a:avLst/>
+          </a:prstGeom>
+          <a:noFill/>
           <a:ln w="12700">
             <a:solidFill>
               <a:srgbClr val="D8D0C1"/>
             </a:solidFill>
             <a:prstDash val="solid"/>
           </a:ln>
-          <a:effectLst>
-            <a:outerShdw sx="100000" sy="100000" kx="0" ky="0" algn="bl" rotWithShape="0" blurRad="152400" dist="25400" dir="5400000">
-              <a:srgbClr val="8A8272">
-                <a:alpha val="22000"/>
-              </a:srgbClr>
-            </a:outerShdw>
-          </a:effectLst>
-        </p:spPr>
-      </p:sp>
-      <p:sp>
-        <p:nvSpPr>
-          <p:cNvPr id="19" name="Text 16"/>
-          <p:cNvSpPr/>
-          <p:nvPr/>
-        </p:nvSpPr>
-        <p:spPr>
-          <a:xfrm>
-            <a:off x="4621682" y="2679192"/>
-            <a:ext cx="2948330" cy="457200"/>
-          </a:xfrm>
-          <a:prstGeom prst="rect">
-            <a:avLst/>
-          </a:prstGeom>
-          <a:noFill/>
-          <a:ln/>
-        </p:spPr>
-        <p:txBody>
-          <a:bodyPr wrap="square" rtlCol="0" anchor="ctr"/>
-          <a:lstStyle/>
-          <a:p>
-            <a:pPr indent="0" marL="0">
-              <a:buNone/>
-            </a:pPr>
-            <a:r>
-              <a:rPr lang="en-US" sz="2700" b="1" dirty="0">
+        </p:spPr>
+      </p:sp>
+      <p:sp>
+        <p:nvSpPr>
+          <p:cNvPr id="14" name="Text 11"/>
+          <p:cNvSpPr/>
+          <p:nvPr/>
+        </p:nvSpPr>
+        <p:spPr>
+          <a:xfrm>
+            <a:off x="4460138" y="2574036"/>
+            <a:ext cx="3271418" cy="512064"/>
+          </a:xfrm>
+          <a:prstGeom prst="rect">
+            <a:avLst/>
+          </a:prstGeom>
+          <a:noFill/>
+          <a:ln/>
+        </p:spPr>
+        <p:txBody>
+          <a:bodyPr wrap="square" rtlCol="0" anchor="ctr"/>
+          <a:lstStyle/>
+          <a:p>
+            <a:pPr indent="0" marL="0">
+              <a:buNone/>
+            </a:pPr>
+            <a:r>
+              <a:rPr lang="en-US" sz="3000" b="1" dirty="0">
                 <a:solidFill>
                   <a:srgbClr val="2F4B7C"/>
                 </a:solidFill>
@@ -2663,20 +2421,20 @@
               </a:rPr>
               <a:t>166</a:t>
             </a:r>
-            <a:endParaRPr lang="en-US" sz="2700" dirty="0"/>
-          </a:p>
-        </p:txBody>
-      </p:sp>
-      <p:sp>
-        <p:nvSpPr>
-          <p:cNvPr id="20" name="Text 17"/>
-          <p:cNvSpPr/>
-          <p:nvPr/>
-        </p:nvSpPr>
-        <p:spPr>
-          <a:xfrm>
-            <a:off x="4621682" y="3172968"/>
-            <a:ext cx="2948330" cy="256032"/>
+            <a:endParaRPr lang="en-US" sz="3000" dirty="0"/>
+          </a:p>
+        </p:txBody>
+      </p:sp>
+      <p:sp>
+        <p:nvSpPr>
+          <p:cNvPr id="15" name="Text 12"/>
+          <p:cNvSpPr/>
+          <p:nvPr/>
+        </p:nvSpPr>
+        <p:spPr>
+          <a:xfrm>
+            <a:off x="4460138" y="3122676"/>
+            <a:ext cx="3271418" cy="256032"/>
           </a:xfrm>
           <a:prstGeom prst="rect">
             <a:avLst/>
@@ -2708,14 +2466,14 @@
       </p:sp>
       <p:sp>
         <p:nvSpPr>
-          <p:cNvPr id="21" name="Text 18"/>
-          <p:cNvSpPr/>
-          <p:nvPr/>
-        </p:nvSpPr>
-        <p:spPr>
-          <a:xfrm>
-            <a:off x="4621682" y="3429000"/>
-            <a:ext cx="2948330" cy="438912"/>
+          <p:cNvPr id="16" name="Text 13"/>
+          <p:cNvSpPr/>
+          <p:nvPr/>
+        </p:nvSpPr>
+        <p:spPr>
+          <a:xfrm>
+            <a:off x="4460138" y="3378708"/>
+            <a:ext cx="3271418" cy="457200"/>
           </a:xfrm>
           <a:prstGeom prst="rect">
             <a:avLst/>
@@ -2747,64 +2505,53 @@
       </p:sp>
       <p:sp>
         <p:nvSpPr>
-          <p:cNvPr id="22" name="Shape 19"/>
-          <p:cNvSpPr/>
-          <p:nvPr/>
-        </p:nvSpPr>
-        <p:spPr>
-          <a:xfrm>
-            <a:off x="8045501" y="2514600"/>
-            <a:ext cx="3460394" cy="1463040"/>
-          </a:xfrm>
-          <a:prstGeom prst="roundRect">
-            <a:avLst>
-              <a:gd name="adj" fmla="val 5000"/>
-            </a:avLst>
-          </a:prstGeom>
-          <a:solidFill>
-            <a:srgbClr val="FFFFFB"/>
-          </a:solidFill>
+          <p:cNvPr id="17" name="Shape 14"/>
+          <p:cNvSpPr/>
+          <p:nvPr/>
+        </p:nvSpPr>
+        <p:spPr>
+          <a:xfrm>
+            <a:off x="8234477" y="2446020"/>
+            <a:ext cx="3271418" cy="0"/>
+          </a:xfrm>
+          <a:prstGeom prst="line">
+            <a:avLst/>
+          </a:prstGeom>
+          <a:noFill/>
           <a:ln w="12700">
             <a:solidFill>
               <a:srgbClr val="D8D0C1"/>
             </a:solidFill>
             <a:prstDash val="solid"/>
           </a:ln>
-          <a:effectLst>
-            <a:outerShdw sx="100000" sy="100000" kx="0" ky="0" algn="bl" rotWithShape="0" blurRad="152400" dist="25400" dir="5400000">
-              <a:srgbClr val="8A8272">
-                <a:alpha val="22000"/>
-              </a:srgbClr>
-            </a:outerShdw>
-          </a:effectLst>
-        </p:spPr>
-      </p:sp>
-      <p:sp>
-        <p:nvSpPr>
-          <p:cNvPr id="23" name="Text 20"/>
-          <p:cNvSpPr/>
-          <p:nvPr/>
-        </p:nvSpPr>
-        <p:spPr>
-          <a:xfrm>
-            <a:off x="8301533" y="2679192"/>
-            <a:ext cx="2948330" cy="457200"/>
-          </a:xfrm>
-          <a:prstGeom prst="rect">
-            <a:avLst/>
-          </a:prstGeom>
-          <a:noFill/>
-          <a:ln/>
-        </p:spPr>
-        <p:txBody>
-          <a:bodyPr wrap="square" rtlCol="0" anchor="ctr"/>
-          <a:lstStyle/>
-          <a:p>
-            <a:pPr indent="0" marL="0">
-              <a:buNone/>
-            </a:pPr>
-            <a:r>
-              <a:rPr lang="en-US" sz="2700" b="1" dirty="0">
+        </p:spPr>
+      </p:sp>
+      <p:sp>
+        <p:nvSpPr>
+          <p:cNvPr id="18" name="Text 15"/>
+          <p:cNvSpPr/>
+          <p:nvPr/>
+        </p:nvSpPr>
+        <p:spPr>
+          <a:xfrm>
+            <a:off x="8234477" y="2574036"/>
+            <a:ext cx="3271418" cy="512064"/>
+          </a:xfrm>
+          <a:prstGeom prst="rect">
+            <a:avLst/>
+          </a:prstGeom>
+          <a:noFill/>
+          <a:ln/>
+        </p:spPr>
+        <p:txBody>
+          <a:bodyPr wrap="square" rtlCol="0" anchor="ctr"/>
+          <a:lstStyle/>
+          <a:p>
+            <a:pPr indent="0" marL="0">
+              <a:buNone/>
+            </a:pPr>
+            <a:r>
+              <a:rPr lang="en-US" sz="3000" b="1" dirty="0">
                 <a:solidFill>
                   <a:srgbClr val="15130F"/>
                 </a:solidFill>
@@ -2814,20 +2561,20 @@
               </a:rPr>
               <a:t>무손실</a:t>
             </a:r>
-            <a:endParaRPr lang="en-US" sz="2700" dirty="0"/>
-          </a:p>
-        </p:txBody>
-      </p:sp>
-      <p:sp>
-        <p:nvSpPr>
-          <p:cNvPr id="24" name="Text 21"/>
-          <p:cNvSpPr/>
-          <p:nvPr/>
-        </p:nvSpPr>
-        <p:spPr>
-          <a:xfrm>
-            <a:off x="8301533" y="3172968"/>
-            <a:ext cx="2948330" cy="256032"/>
+            <a:endParaRPr lang="en-US" sz="3000" dirty="0"/>
+          </a:p>
+        </p:txBody>
+      </p:sp>
+      <p:sp>
+        <p:nvSpPr>
+          <p:cNvPr id="19" name="Text 16"/>
+          <p:cNvSpPr/>
+          <p:nvPr/>
+        </p:nvSpPr>
+        <p:spPr>
+          <a:xfrm>
+            <a:off x="8234477" y="3122676"/>
+            <a:ext cx="3271418" cy="256032"/>
           </a:xfrm>
           <a:prstGeom prst="rect">
             <a:avLst/>
@@ -2859,14 +2606,14 @@
       </p:sp>
       <p:sp>
         <p:nvSpPr>
-          <p:cNvPr id="25" name="Text 22"/>
-          <p:cNvSpPr/>
-          <p:nvPr/>
-        </p:nvSpPr>
-        <p:spPr>
-          <a:xfrm>
-            <a:off x="8301533" y="3429000"/>
-            <a:ext cx="2948330" cy="438912"/>
+          <p:cNvPr id="20" name="Text 17"/>
+          <p:cNvSpPr/>
+          <p:nvPr/>
+        </p:nvSpPr>
+        <p:spPr>
+          <a:xfrm>
+            <a:off x="8234477" y="3378708"/>
+            <a:ext cx="3271418" cy="457200"/>
           </a:xfrm>
           <a:prstGeom prst="rect">
             <a:avLst/>
@@ -2898,52 +2645,41 @@
       </p:sp>
       <p:sp>
         <p:nvSpPr>
-          <p:cNvPr id="26" name="Shape 23"/>
-          <p:cNvSpPr/>
-          <p:nvPr/>
-        </p:nvSpPr>
-        <p:spPr>
-          <a:xfrm>
-            <a:off x="685800" y="4251960"/>
-            <a:ext cx="3423818" cy="1463040"/>
-          </a:xfrm>
-          <a:prstGeom prst="roundRect">
-            <a:avLst>
-              <a:gd name="adj" fmla="val 5000"/>
-            </a:avLst>
-          </a:prstGeom>
-          <a:solidFill>
-            <a:srgbClr val="FFFFFB"/>
-          </a:solidFill>
+          <p:cNvPr id="21" name="Shape 18"/>
+          <p:cNvSpPr/>
+          <p:nvPr/>
+        </p:nvSpPr>
+        <p:spPr>
+          <a:xfrm>
+            <a:off x="685800" y="4274820"/>
+            <a:ext cx="10820095" cy="0"/>
+          </a:xfrm>
+          <a:prstGeom prst="line">
+            <a:avLst/>
+          </a:prstGeom>
+          <a:noFill/>
           <a:ln w="12700">
             <a:solidFill>
               <a:srgbClr val="D8D0C1"/>
             </a:solidFill>
             <a:prstDash val="solid"/>
           </a:ln>
-          <a:effectLst>
-            <a:outerShdw sx="100000" sy="100000" kx="0" ky="0" algn="bl" rotWithShape="0" blurRad="152400" dist="25400" dir="5400000">
-              <a:srgbClr val="8A8272">
-                <a:alpha val="22000"/>
-              </a:srgbClr>
-            </a:outerShdw>
-          </a:effectLst>
-        </p:spPr>
-      </p:sp>
-      <p:sp>
-        <p:nvSpPr>
-          <p:cNvPr id="27" name="Shape 24"/>
-          <p:cNvSpPr/>
-          <p:nvPr/>
-        </p:nvSpPr>
-        <p:spPr>
-          <a:xfrm>
-            <a:off x="905256" y="4782312"/>
-            <a:ext cx="402336" cy="402336"/>
+        </p:spPr>
+      </p:sp>
+      <p:sp>
+        <p:nvSpPr>
+          <p:cNvPr id="22" name="Shape 19"/>
+          <p:cNvSpPr/>
+          <p:nvPr/>
+        </p:nvSpPr>
+        <p:spPr>
+          <a:xfrm>
+            <a:off x="685800" y="4604004"/>
+            <a:ext cx="384048" cy="384048"/>
           </a:xfrm>
           <a:prstGeom prst="roundRect">
             <a:avLst>
-              <a:gd name="adj" fmla="val 22727"/>
+              <a:gd name="adj" fmla="val 23810"/>
             </a:avLst>
           </a:prstGeom>
           <a:solidFill>
@@ -2959,14 +2695,14 @@
       </p:sp>
       <p:sp>
         <p:nvSpPr>
-          <p:cNvPr id="28" name="Text 25"/>
-          <p:cNvSpPr/>
-          <p:nvPr/>
-        </p:nvSpPr>
-        <p:spPr>
-          <a:xfrm>
-            <a:off x="905256" y="4782312"/>
-            <a:ext cx="402336" cy="402336"/>
+          <p:cNvPr id="23" name="Text 20"/>
+          <p:cNvSpPr/>
+          <p:nvPr/>
+        </p:nvSpPr>
+        <p:spPr>
+          <a:xfrm>
+            <a:off x="685800" y="4604004"/>
+            <a:ext cx="384048" cy="384048"/>
           </a:xfrm>
           <a:prstGeom prst="rect">
             <a:avLst/>
@@ -2982,7 +2718,7 @@
               <a:buNone/>
             </a:pPr>
             <a:r>
-              <a:rPr lang="en-US" sz="1300" b="1" dirty="0">
+              <a:rPr lang="en-US" sz="1250" b="1" dirty="0">
                 <a:solidFill>
                   <a:srgbClr val="2F4B7C"/>
                 </a:solidFill>
@@ -2992,20 +2728,20 @@
               </a:rPr>
               <a:t>✦</a:t>
             </a:r>
-            <a:endParaRPr lang="en-US" sz="1300" dirty="0"/>
-          </a:p>
-        </p:txBody>
-      </p:sp>
-      <p:sp>
-        <p:nvSpPr>
-          <p:cNvPr id="29" name="Text 26"/>
-          <p:cNvSpPr/>
-          <p:nvPr/>
-        </p:nvSpPr>
-        <p:spPr>
-          <a:xfrm>
-            <a:off x="1490472" y="4379976"/>
-            <a:ext cx="2399690" cy="201168"/>
+            <a:endParaRPr lang="en-US" sz="1250" dirty="0"/>
+          </a:p>
+        </p:txBody>
+      </p:sp>
+      <p:sp>
+        <p:nvSpPr>
+          <p:cNvPr id="24" name="Text 21"/>
+          <p:cNvSpPr/>
+          <p:nvPr/>
+        </p:nvSpPr>
+        <p:spPr>
+          <a:xfrm>
+            <a:off x="1271016" y="4549140"/>
+            <a:ext cx="2686202" cy="201168"/>
           </a:xfrm>
           <a:prstGeom prst="rect">
             <a:avLst/>
@@ -3037,30 +2773,30 @@
       </p:sp>
       <p:sp>
         <p:nvSpPr>
-          <p:cNvPr id="30" name="Text 27"/>
-          <p:cNvSpPr/>
-          <p:nvPr/>
-        </p:nvSpPr>
-        <p:spPr>
-          <a:xfrm>
-            <a:off x="1490472" y="4581144"/>
-            <a:ext cx="2399690" cy="256032"/>
-          </a:xfrm>
-          <a:prstGeom prst="rect">
-            <a:avLst/>
-          </a:prstGeom>
-          <a:noFill/>
-          <a:ln/>
-        </p:spPr>
-        <p:txBody>
-          <a:bodyPr wrap="square" rtlCol="0" anchor="ctr"/>
-          <a:lstStyle/>
-          <a:p>
-            <a:pPr indent="0" marL="0">
-              <a:buNone/>
-            </a:pPr>
-            <a:r>
-              <a:rPr lang="en-US" sz="1300" b="1" dirty="0">
+          <p:cNvPr id="25" name="Text 22"/>
+          <p:cNvSpPr/>
+          <p:nvPr/>
+        </p:nvSpPr>
+        <p:spPr>
+          <a:xfrm>
+            <a:off x="1271016" y="4750308"/>
+            <a:ext cx="2686202" cy="256032"/>
+          </a:xfrm>
+          <a:prstGeom prst="rect">
+            <a:avLst/>
+          </a:prstGeom>
+          <a:noFill/>
+          <a:ln/>
+        </p:spPr>
+        <p:txBody>
+          <a:bodyPr wrap="square" rtlCol="0" anchor="ctr"/>
+          <a:lstStyle/>
+          <a:p>
+            <a:pPr indent="0" marL="0">
+              <a:buNone/>
+            </a:pPr>
+            <a:r>
+              <a:rPr lang="en-US" sz="1350" b="1" dirty="0">
                 <a:solidFill>
                   <a:srgbClr val="15130F"/>
                 </a:solidFill>
@@ -3070,20 +2806,20 @@
               </a:rPr>
               <a:t>공개 웹사이트</a:t>
             </a:r>
-            <a:endParaRPr lang="en-US" sz="1300" dirty="0"/>
-          </a:p>
-        </p:txBody>
-      </p:sp>
-      <p:sp>
-        <p:nvSpPr>
-          <p:cNvPr id="31" name="Text 28"/>
-          <p:cNvSpPr/>
-          <p:nvPr/>
-        </p:nvSpPr>
-        <p:spPr>
-          <a:xfrm>
-            <a:off x="1490472" y="4837176"/>
-            <a:ext cx="2399690" cy="768096"/>
+            <a:endParaRPr lang="en-US" sz="1350" dirty="0"/>
+          </a:p>
+        </p:txBody>
+      </p:sp>
+      <p:sp>
+        <p:nvSpPr>
+          <p:cNvPr id="26" name="Text 23"/>
+          <p:cNvSpPr/>
+          <p:nvPr/>
+        </p:nvSpPr>
+        <p:spPr>
+          <a:xfrm>
+            <a:off x="1271016" y="5024628"/>
+            <a:ext cx="2686202" cy="758952"/>
           </a:xfrm>
           <a:prstGeom prst="rect">
             <a:avLst/>
@@ -3115,52 +2851,18 @@
       </p:sp>
       <p:sp>
         <p:nvSpPr>
-          <p:cNvPr id="32" name="Shape 29"/>
-          <p:cNvSpPr/>
-          <p:nvPr/>
-        </p:nvSpPr>
-        <p:spPr>
-          <a:xfrm>
-            <a:off x="4383938" y="4251960"/>
-            <a:ext cx="3423818" cy="1463040"/>
+          <p:cNvPr id="27" name="Shape 24"/>
+          <p:cNvSpPr/>
+          <p:nvPr/>
+        </p:nvSpPr>
+        <p:spPr>
+          <a:xfrm>
+            <a:off x="4460138" y="4604004"/>
+            <a:ext cx="384048" cy="384048"/>
           </a:xfrm>
           <a:prstGeom prst="roundRect">
             <a:avLst>
-              <a:gd name="adj" fmla="val 5000"/>
-            </a:avLst>
-          </a:prstGeom>
-          <a:solidFill>
-            <a:srgbClr val="FFFFFB"/>
-          </a:solidFill>
-          <a:ln w="12700">
-            <a:solidFill>
-              <a:srgbClr val="D8D0C1"/>
-            </a:solidFill>
-            <a:prstDash val="solid"/>
-          </a:ln>
-          <a:effectLst>
-            <a:outerShdw sx="100000" sy="100000" kx="0" ky="0" algn="bl" rotWithShape="0" blurRad="152400" dist="25400" dir="5400000">
-              <a:srgbClr val="8A8272">
-                <a:alpha val="22000"/>
-              </a:srgbClr>
-            </a:outerShdw>
-          </a:effectLst>
-        </p:spPr>
-      </p:sp>
-      <p:sp>
-        <p:nvSpPr>
-          <p:cNvPr id="33" name="Shape 30"/>
-          <p:cNvSpPr/>
-          <p:nvPr/>
-        </p:nvSpPr>
-        <p:spPr>
-          <a:xfrm>
-            <a:off x="4603394" y="4782312"/>
-            <a:ext cx="402336" cy="402336"/>
-          </a:xfrm>
-          <a:prstGeom prst="roundRect">
-            <a:avLst>
-              <a:gd name="adj" fmla="val 22727"/>
+              <a:gd name="adj" fmla="val 23810"/>
             </a:avLst>
           </a:prstGeom>
           <a:solidFill>
@@ -3176,14 +2878,14 @@
       </p:sp>
       <p:sp>
         <p:nvSpPr>
-          <p:cNvPr id="34" name="Text 31"/>
-          <p:cNvSpPr/>
-          <p:nvPr/>
-        </p:nvSpPr>
-        <p:spPr>
-          <a:xfrm>
-            <a:off x="4603394" y="4782312"/>
-            <a:ext cx="402336" cy="402336"/>
+          <p:cNvPr id="28" name="Text 25"/>
+          <p:cNvSpPr/>
+          <p:nvPr/>
+        </p:nvSpPr>
+        <p:spPr>
+          <a:xfrm>
+            <a:off x="4460138" y="4604004"/>
+            <a:ext cx="384048" cy="384048"/>
           </a:xfrm>
           <a:prstGeom prst="rect">
             <a:avLst/>
@@ -3199,7 +2901,7 @@
               <a:buNone/>
             </a:pPr>
             <a:r>
-              <a:rPr lang="en-US" sz="1300" b="1" dirty="0">
+              <a:rPr lang="en-US" sz="1250" b="1" dirty="0">
                 <a:solidFill>
                   <a:srgbClr val="2F4B7C"/>
                 </a:solidFill>
@@ -3209,20 +2911,20 @@
               </a:rPr>
               <a:t>⧉</a:t>
             </a:r>
-            <a:endParaRPr lang="en-US" sz="1300" dirty="0"/>
-          </a:p>
-        </p:txBody>
-      </p:sp>
-      <p:sp>
-        <p:nvSpPr>
-          <p:cNvPr id="35" name="Text 32"/>
-          <p:cNvSpPr/>
-          <p:nvPr/>
-        </p:nvSpPr>
-        <p:spPr>
-          <a:xfrm>
-            <a:off x="5188610" y="4379976"/>
-            <a:ext cx="2399690" cy="201168"/>
+            <a:endParaRPr lang="en-US" sz="1250" dirty="0"/>
+          </a:p>
+        </p:txBody>
+      </p:sp>
+      <p:sp>
+        <p:nvSpPr>
+          <p:cNvPr id="29" name="Text 26"/>
+          <p:cNvSpPr/>
+          <p:nvPr/>
+        </p:nvSpPr>
+        <p:spPr>
+          <a:xfrm>
+            <a:off x="5045354" y="4549140"/>
+            <a:ext cx="2686202" cy="201168"/>
           </a:xfrm>
           <a:prstGeom prst="rect">
             <a:avLst/>
@@ -3254,30 +2956,30 @@
       </p:sp>
       <p:sp>
         <p:nvSpPr>
-          <p:cNvPr id="36" name="Text 33"/>
-          <p:cNvSpPr/>
-          <p:nvPr/>
-        </p:nvSpPr>
-        <p:spPr>
-          <a:xfrm>
-            <a:off x="5188610" y="4581144"/>
-            <a:ext cx="2399690" cy="256032"/>
-          </a:xfrm>
-          <a:prstGeom prst="rect">
-            <a:avLst/>
-          </a:prstGeom>
-          <a:noFill/>
-          <a:ln/>
-        </p:spPr>
-        <p:txBody>
-          <a:bodyPr wrap="square" rtlCol="0" anchor="ctr"/>
-          <a:lstStyle/>
-          <a:p>
-            <a:pPr indent="0" marL="0">
-              <a:buNone/>
-            </a:pPr>
-            <a:r>
-              <a:rPr lang="en-US" sz="1300" b="1" dirty="0">
+          <p:cNvPr id="30" name="Text 27"/>
+          <p:cNvSpPr/>
+          <p:nvPr/>
+        </p:nvSpPr>
+        <p:spPr>
+          <a:xfrm>
+            <a:off x="5045354" y="4750308"/>
+            <a:ext cx="2686202" cy="256032"/>
+          </a:xfrm>
+          <a:prstGeom prst="rect">
+            <a:avLst/>
+          </a:prstGeom>
+          <a:noFill/>
+          <a:ln/>
+        </p:spPr>
+        <p:txBody>
+          <a:bodyPr wrap="square" rtlCol="0" anchor="ctr"/>
+          <a:lstStyle/>
+          <a:p>
+            <a:pPr indent="0" marL="0">
+              <a:buNone/>
+            </a:pPr>
+            <a:r>
+              <a:rPr lang="en-US" sz="1350" b="1" dirty="0">
                 <a:solidFill>
                   <a:srgbClr val="15130F"/>
                 </a:solidFill>
@@ -3287,20 +2989,20 @@
               </a:rPr>
               <a:t>에이전트 시스템</a:t>
             </a:r>
-            <a:endParaRPr lang="en-US" sz="1300" dirty="0"/>
-          </a:p>
-        </p:txBody>
-      </p:sp>
-      <p:sp>
-        <p:nvSpPr>
-          <p:cNvPr id="37" name="Text 34"/>
-          <p:cNvSpPr/>
-          <p:nvPr/>
-        </p:nvSpPr>
-        <p:spPr>
-          <a:xfrm>
-            <a:off x="5188610" y="4837176"/>
-            <a:ext cx="2399690" cy="768096"/>
+            <a:endParaRPr lang="en-US" sz="1350" dirty="0"/>
+          </a:p>
+        </p:txBody>
+      </p:sp>
+      <p:sp>
+        <p:nvSpPr>
+          <p:cNvPr id="31" name="Text 28"/>
+          <p:cNvSpPr/>
+          <p:nvPr/>
+        </p:nvSpPr>
+        <p:spPr>
+          <a:xfrm>
+            <a:off x="5045354" y="5024628"/>
+            <a:ext cx="2686202" cy="758952"/>
           </a:xfrm>
           <a:prstGeom prst="rect">
             <a:avLst/>
@@ -3332,52 +3034,18 @@
       </p:sp>
       <p:sp>
         <p:nvSpPr>
-          <p:cNvPr id="38" name="Shape 35"/>
-          <p:cNvSpPr/>
-          <p:nvPr/>
-        </p:nvSpPr>
-        <p:spPr>
-          <a:xfrm>
-            <a:off x="8082077" y="4251960"/>
-            <a:ext cx="3423818" cy="1463040"/>
+          <p:cNvPr id="32" name="Shape 29"/>
+          <p:cNvSpPr/>
+          <p:nvPr/>
+        </p:nvSpPr>
+        <p:spPr>
+          <a:xfrm>
+            <a:off x="8234477" y="4604004"/>
+            <a:ext cx="384048" cy="384048"/>
           </a:xfrm>
           <a:prstGeom prst="roundRect">
             <a:avLst>
-              <a:gd name="adj" fmla="val 5000"/>
-            </a:avLst>
-          </a:prstGeom>
-          <a:solidFill>
-            <a:srgbClr val="FFFFFB"/>
-          </a:solidFill>
-          <a:ln w="12700">
-            <a:solidFill>
-              <a:srgbClr val="D8D0C1"/>
-            </a:solidFill>
-            <a:prstDash val="solid"/>
-          </a:ln>
-          <a:effectLst>
-            <a:outerShdw sx="100000" sy="100000" kx="0" ky="0" algn="bl" rotWithShape="0" blurRad="152400" dist="25400" dir="5400000">
-              <a:srgbClr val="8A8272">
-                <a:alpha val="22000"/>
-              </a:srgbClr>
-            </a:outerShdw>
-          </a:effectLst>
-        </p:spPr>
-      </p:sp>
-      <p:sp>
-        <p:nvSpPr>
-          <p:cNvPr id="39" name="Shape 36"/>
-          <p:cNvSpPr/>
-          <p:nvPr/>
-        </p:nvSpPr>
-        <p:spPr>
-          <a:xfrm>
-            <a:off x="8301533" y="4782312"/>
-            <a:ext cx="402336" cy="402336"/>
-          </a:xfrm>
-          <a:prstGeom prst="roundRect">
-            <a:avLst>
-              <a:gd name="adj" fmla="val 22727"/>
+              <a:gd name="adj" fmla="val 23810"/>
             </a:avLst>
           </a:prstGeom>
           <a:solidFill>
@@ -3393,14 +3061,14 @@
       </p:sp>
       <p:sp>
         <p:nvSpPr>
-          <p:cNvPr id="40" name="Text 37"/>
-          <p:cNvSpPr/>
-          <p:nvPr/>
-        </p:nvSpPr>
-        <p:spPr>
-          <a:xfrm>
-            <a:off x="8301533" y="4782312"/>
-            <a:ext cx="402336" cy="402336"/>
+          <p:cNvPr id="33" name="Text 30"/>
+          <p:cNvSpPr/>
+          <p:nvPr/>
+        </p:nvSpPr>
+        <p:spPr>
+          <a:xfrm>
+            <a:off x="8234477" y="4604004"/>
+            <a:ext cx="384048" cy="384048"/>
           </a:xfrm>
           <a:prstGeom prst="rect">
             <a:avLst/>
@@ -3416,7 +3084,7 @@
               <a:buNone/>
             </a:pPr>
             <a:r>
-              <a:rPr lang="en-US" sz="1300" b="1" dirty="0">
+              <a:rPr lang="en-US" sz="1250" b="1" dirty="0">
                 <a:solidFill>
                   <a:srgbClr val="2F4B7C"/>
                 </a:solidFill>
@@ -3426,20 +3094,20 @@
               </a:rPr>
               <a:t>⇄</a:t>
             </a:r>
-            <a:endParaRPr lang="en-US" sz="1300" dirty="0"/>
-          </a:p>
-        </p:txBody>
-      </p:sp>
-      <p:sp>
-        <p:nvSpPr>
-          <p:cNvPr id="41" name="Text 38"/>
-          <p:cNvSpPr/>
-          <p:nvPr/>
-        </p:nvSpPr>
-        <p:spPr>
-          <a:xfrm>
-            <a:off x="8886749" y="4379976"/>
-            <a:ext cx="2399690" cy="201168"/>
+            <a:endParaRPr lang="en-US" sz="1250" dirty="0"/>
+          </a:p>
+        </p:txBody>
+      </p:sp>
+      <p:sp>
+        <p:nvSpPr>
+          <p:cNvPr id="34" name="Text 31"/>
+          <p:cNvSpPr/>
+          <p:nvPr/>
+        </p:nvSpPr>
+        <p:spPr>
+          <a:xfrm>
+            <a:off x="8819693" y="4549140"/>
+            <a:ext cx="2686202" cy="201168"/>
           </a:xfrm>
           <a:prstGeom prst="rect">
             <a:avLst/>
@@ -3471,30 +3139,30 @@
       </p:sp>
       <p:sp>
         <p:nvSpPr>
-          <p:cNvPr id="42" name="Text 39"/>
-          <p:cNvSpPr/>
-          <p:nvPr/>
-        </p:nvSpPr>
-        <p:spPr>
-          <a:xfrm>
-            <a:off x="8886749" y="4581144"/>
-            <a:ext cx="2399690" cy="256032"/>
-          </a:xfrm>
-          <a:prstGeom prst="rect">
-            <a:avLst/>
-          </a:prstGeom>
-          <a:noFill/>
-          <a:ln/>
-        </p:spPr>
-        <p:txBody>
-          <a:bodyPr wrap="square" rtlCol="0" anchor="ctr"/>
-          <a:lstStyle/>
-          <a:p>
-            <a:pPr indent="0" marL="0">
-              <a:buNone/>
-            </a:pPr>
-            <a:r>
-              <a:rPr lang="en-US" sz="1300" b="1" dirty="0">
+          <p:cNvPr id="35" name="Text 32"/>
+          <p:cNvSpPr/>
+          <p:nvPr/>
+        </p:nvSpPr>
+        <p:spPr>
+          <a:xfrm>
+            <a:off x="8819693" y="4750308"/>
+            <a:ext cx="2686202" cy="256032"/>
+          </a:xfrm>
+          <a:prstGeom prst="rect">
+            <a:avLst/>
+          </a:prstGeom>
+          <a:noFill/>
+          <a:ln/>
+        </p:spPr>
+        <p:txBody>
+          <a:bodyPr wrap="square" rtlCol="0" anchor="ctr"/>
+          <a:lstStyle/>
+          <a:p>
+            <a:pPr indent="0" marL="0">
+              <a:buNone/>
+            </a:pPr>
+            <a:r>
+              <a:rPr lang="en-US" sz="1350" b="1" dirty="0">
                 <a:solidFill>
                   <a:srgbClr val="15130F"/>
                 </a:solidFill>
@@ -3504,20 +3172,20 @@
               </a:rPr>
               <a:t>제작 왕복</a:t>
             </a:r>
-            <a:endParaRPr lang="en-US" sz="1300" dirty="0"/>
-          </a:p>
-        </p:txBody>
-      </p:sp>
-      <p:sp>
-        <p:nvSpPr>
-          <p:cNvPr id="43" name="Text 40"/>
-          <p:cNvSpPr/>
-          <p:nvPr/>
-        </p:nvSpPr>
-        <p:spPr>
-          <a:xfrm>
-            <a:off x="8886749" y="4837176"/>
-            <a:ext cx="2399690" cy="768096"/>
+            <a:endParaRPr lang="en-US" sz="1350" dirty="0"/>
+          </a:p>
+        </p:txBody>
+      </p:sp>
+      <p:sp>
+        <p:nvSpPr>
+          <p:cNvPr id="36" name="Text 33"/>
+          <p:cNvSpPr/>
+          <p:nvPr/>
+        </p:nvSpPr>
+        <p:spPr>
+          <a:xfrm>
+            <a:off x="8819693" y="5024628"/>
+            <a:ext cx="2686202" cy="758952"/>
           </a:xfrm>
           <a:prstGeom prst="rect">
             <a:avLst/>
@@ -3581,117 +3249,7 @@
       </p:grpSpPr>
       <p:sp>
         <p:nvSpPr>
-          <p:cNvPr id="2" name="Shape 0"/>
-          <p:cNvSpPr/>
-          <p:nvPr/>
-        </p:nvSpPr>
-        <p:spPr>
-          <a:xfrm>
-            <a:off x="0" y="4389120"/>
-            <a:ext cx="12191695" cy="2478024"/>
-          </a:xfrm>
-          <a:prstGeom prst="rect">
-            <a:avLst/>
-          </a:prstGeom>
-          <a:solidFill>
-            <a:srgbClr val="15130F">
-              <a:alpha val="1000"/>
-            </a:srgbClr>
-          </a:solidFill>
-          <a:ln/>
-        </p:spPr>
-      </p:sp>
-      <p:sp>
-        <p:nvSpPr>
-          <p:cNvPr id="3" name="Shape 1"/>
-          <p:cNvSpPr/>
-          <p:nvPr/>
-        </p:nvSpPr>
-        <p:spPr>
-          <a:xfrm>
-            <a:off x="0" y="4882896"/>
-            <a:ext cx="12191695" cy="1984248"/>
-          </a:xfrm>
-          <a:prstGeom prst="rect">
-            <a:avLst/>
-          </a:prstGeom>
-          <a:solidFill>
-            <a:srgbClr val="15130F">
-              <a:alpha val="2000"/>
-            </a:srgbClr>
-          </a:solidFill>
-          <a:ln/>
-        </p:spPr>
-      </p:sp>
-      <p:sp>
-        <p:nvSpPr>
-          <p:cNvPr id="4" name="Shape 2"/>
-          <p:cNvSpPr/>
-          <p:nvPr/>
-        </p:nvSpPr>
-        <p:spPr>
-          <a:xfrm>
-            <a:off x="0" y="5376672"/>
-            <a:ext cx="12191695" cy="1490472"/>
-          </a:xfrm>
-          <a:prstGeom prst="rect">
-            <a:avLst/>
-          </a:prstGeom>
-          <a:solidFill>
-            <a:srgbClr val="15130F">
-              <a:alpha val="3000"/>
-            </a:srgbClr>
-          </a:solidFill>
-          <a:ln/>
-        </p:spPr>
-      </p:sp>
-      <p:sp>
-        <p:nvSpPr>
-          <p:cNvPr id="5" name="Shape 3"/>
-          <p:cNvSpPr/>
-          <p:nvPr/>
-        </p:nvSpPr>
-        <p:spPr>
-          <a:xfrm>
-            <a:off x="0" y="5870448"/>
-            <a:ext cx="12191695" cy="996696"/>
-          </a:xfrm>
-          <a:prstGeom prst="rect">
-            <a:avLst/>
-          </a:prstGeom>
-          <a:solidFill>
-            <a:srgbClr val="15130F">
-              <a:alpha val="4000"/>
-            </a:srgbClr>
-          </a:solidFill>
-          <a:ln/>
-        </p:spPr>
-      </p:sp>
-      <p:sp>
-        <p:nvSpPr>
-          <p:cNvPr id="6" name="Shape 4"/>
-          <p:cNvSpPr/>
-          <p:nvPr/>
-        </p:nvSpPr>
-        <p:spPr>
-          <a:xfrm>
-            <a:off x="0" y="6364224"/>
-            <a:ext cx="12191695" cy="502920"/>
-          </a:xfrm>
-          <a:prstGeom prst="rect">
-            <a:avLst/>
-          </a:prstGeom>
-          <a:solidFill>
-            <a:srgbClr val="15130F">
-              <a:alpha val="5000"/>
-            </a:srgbClr>
-          </a:solidFill>
-          <a:ln/>
-        </p:spPr>
-      </p:sp>
-      <p:sp>
-        <p:nvSpPr>
-          <p:cNvPr id="8" name="Text 5"/>
+          <p:cNvPr id="3" name="Text 0"/>
           <p:cNvSpPr/>
           <p:nvPr/>
         </p:nvSpPr>
@@ -3744,7 +3302,7 @@
       </p:sp>
       <p:sp>
         <p:nvSpPr>
-          <p:cNvPr id="9" name="Text 6"/>
+          <p:cNvPr id="4" name="Text 1"/>
           <p:cNvSpPr/>
           <p:nvPr/>
         </p:nvSpPr>
@@ -3783,7 +3341,7 @@
       </p:sp>
       <p:sp>
         <p:nvSpPr>
-          <p:cNvPr id="10" name="Text 7"/>
+          <p:cNvPr id="5" name="Text 2"/>
           <p:cNvSpPr/>
           <p:nvPr/>
         </p:nvSpPr>
@@ -3822,7 +3380,7 @@
       </p:sp>
       <p:sp>
         <p:nvSpPr>
-          <p:cNvPr id="11" name="Text 8"/>
+          <p:cNvPr id="6" name="Text 3"/>
           <p:cNvSpPr/>
           <p:nvPr/>
         </p:nvSpPr>
@@ -3861,7 +3419,7 @@
       </p:sp>
       <p:sp>
         <p:nvSpPr>
-          <p:cNvPr id="12" name="Text 9"/>
+          <p:cNvPr id="7" name="Text 4"/>
           <p:cNvSpPr/>
           <p:nvPr/>
         </p:nvSpPr>
@@ -3900,64 +3458,53 @@
       </p:sp>
       <p:sp>
         <p:nvSpPr>
-          <p:cNvPr id="13" name="Shape 10"/>
-          <p:cNvSpPr/>
-          <p:nvPr/>
-        </p:nvSpPr>
-        <p:spPr>
-          <a:xfrm>
-            <a:off x="685800" y="2514600"/>
-            <a:ext cx="5300320" cy="1463040"/>
-          </a:xfrm>
-          <a:prstGeom prst="roundRect">
-            <a:avLst>
-              <a:gd name="adj" fmla="val 5000"/>
-            </a:avLst>
-          </a:prstGeom>
-          <a:solidFill>
-            <a:srgbClr val="FFFFFB"/>
-          </a:solidFill>
+          <p:cNvPr id="8" name="Shape 5"/>
+          <p:cNvSpPr/>
+          <p:nvPr/>
+        </p:nvSpPr>
+        <p:spPr>
+          <a:xfrm>
+            <a:off x="685800" y="2446020"/>
+            <a:ext cx="5158588" cy="0"/>
+          </a:xfrm>
+          <a:prstGeom prst="line">
+            <a:avLst/>
+          </a:prstGeom>
+          <a:noFill/>
           <a:ln w="12700">
             <a:solidFill>
               <a:srgbClr val="D8D0C1"/>
             </a:solidFill>
             <a:prstDash val="solid"/>
           </a:ln>
-          <a:effectLst>
-            <a:outerShdw sx="100000" sy="100000" kx="0" ky="0" algn="bl" rotWithShape="0" blurRad="152400" dist="25400" dir="5400000">
-              <a:srgbClr val="8A8272">
-                <a:alpha val="22000"/>
-              </a:srgbClr>
-            </a:outerShdw>
-          </a:effectLst>
-        </p:spPr>
-      </p:sp>
-      <p:sp>
-        <p:nvSpPr>
-          <p:cNvPr id="14" name="Text 11"/>
-          <p:cNvSpPr/>
-          <p:nvPr/>
-        </p:nvSpPr>
-        <p:spPr>
-          <a:xfrm>
-            <a:off x="941832" y="2679192"/>
-            <a:ext cx="4788256" cy="457200"/>
-          </a:xfrm>
-          <a:prstGeom prst="rect">
-            <a:avLst/>
-          </a:prstGeom>
-          <a:noFill/>
-          <a:ln/>
-        </p:spPr>
-        <p:txBody>
-          <a:bodyPr wrap="square" rtlCol="0" anchor="ctr"/>
-          <a:lstStyle/>
-          <a:p>
-            <a:pPr indent="0" marL="0">
-              <a:buNone/>
-            </a:pPr>
-            <a:r>
-              <a:rPr lang="en-US" sz="2700" b="1" dirty="0">
+        </p:spPr>
+      </p:sp>
+      <p:sp>
+        <p:nvSpPr>
+          <p:cNvPr id="9" name="Text 6"/>
+          <p:cNvSpPr/>
+          <p:nvPr/>
+        </p:nvSpPr>
+        <p:spPr>
+          <a:xfrm>
+            <a:off x="685800" y="2574036"/>
+            <a:ext cx="5158588" cy="512064"/>
+          </a:xfrm>
+          <a:prstGeom prst="rect">
+            <a:avLst/>
+          </a:prstGeom>
+          <a:noFill/>
+          <a:ln/>
+        </p:spPr>
+        <p:txBody>
+          <a:bodyPr wrap="square" rtlCol="0" anchor="ctr"/>
+          <a:lstStyle/>
+          <a:p>
+            <a:pPr indent="0" marL="0">
+              <a:buNone/>
+            </a:pPr>
+            <a:r>
+              <a:rPr lang="en-US" sz="3000" b="1" dirty="0">
                 <a:solidFill>
                   <a:srgbClr val="15130F"/>
                 </a:solidFill>
@@ -3967,20 +3514,20 @@
               </a:rPr>
               <a:t>상태</a:t>
             </a:r>
-            <a:endParaRPr lang="en-US" sz="2700" dirty="0"/>
-          </a:p>
-        </p:txBody>
-      </p:sp>
-      <p:sp>
-        <p:nvSpPr>
-          <p:cNvPr id="15" name="Text 12"/>
-          <p:cNvSpPr/>
-          <p:nvPr/>
-        </p:nvSpPr>
-        <p:spPr>
-          <a:xfrm>
-            <a:off x="941832" y="3172968"/>
-            <a:ext cx="4788256" cy="256032"/>
+            <a:endParaRPr lang="en-US" sz="3000" dirty="0"/>
+          </a:p>
+        </p:txBody>
+      </p:sp>
+      <p:sp>
+        <p:nvSpPr>
+          <p:cNvPr id="10" name="Text 7"/>
+          <p:cNvSpPr/>
+          <p:nvPr/>
+        </p:nvSpPr>
+        <p:spPr>
+          <a:xfrm>
+            <a:off x="685800" y="3122676"/>
+            <a:ext cx="5158588" cy="256032"/>
           </a:xfrm>
           <a:prstGeom prst="rect">
             <a:avLst/>
@@ -4012,14 +3559,14 @@
       </p:sp>
       <p:sp>
         <p:nvSpPr>
-          <p:cNvPr id="16" name="Text 13"/>
-          <p:cNvSpPr/>
-          <p:nvPr/>
-        </p:nvSpPr>
-        <p:spPr>
-          <a:xfrm>
-            <a:off x="941832" y="3429000"/>
-            <a:ext cx="4788256" cy="438912"/>
+          <p:cNvPr id="11" name="Text 8"/>
+          <p:cNvSpPr/>
+          <p:nvPr/>
+        </p:nvSpPr>
+        <p:spPr>
+          <a:xfrm>
+            <a:off x="685800" y="3378708"/>
+            <a:ext cx="5158588" cy="457200"/>
           </a:xfrm>
           <a:prstGeom prst="rect">
             <a:avLst/>
@@ -4051,64 +3598,53 @@
       </p:sp>
       <p:sp>
         <p:nvSpPr>
-          <p:cNvPr id="17" name="Shape 14"/>
-          <p:cNvSpPr/>
-          <p:nvPr/>
-        </p:nvSpPr>
-        <p:spPr>
-          <a:xfrm>
-            <a:off x="6205576" y="2514600"/>
-            <a:ext cx="5300320" cy="1463040"/>
-          </a:xfrm>
-          <a:prstGeom prst="roundRect">
-            <a:avLst>
-              <a:gd name="adj" fmla="val 5000"/>
-            </a:avLst>
-          </a:prstGeom>
-          <a:solidFill>
-            <a:srgbClr val="FFFFFB"/>
-          </a:solidFill>
+          <p:cNvPr id="12" name="Shape 9"/>
+          <p:cNvSpPr/>
+          <p:nvPr/>
+        </p:nvSpPr>
+        <p:spPr>
+          <a:xfrm>
+            <a:off x="6347308" y="2446020"/>
+            <a:ext cx="5158588" cy="0"/>
+          </a:xfrm>
+          <a:prstGeom prst="line">
+            <a:avLst/>
+          </a:prstGeom>
+          <a:noFill/>
           <a:ln w="12700">
             <a:solidFill>
               <a:srgbClr val="D8D0C1"/>
             </a:solidFill>
             <a:prstDash val="solid"/>
           </a:ln>
-          <a:effectLst>
-            <a:outerShdw sx="100000" sy="100000" kx="0" ky="0" algn="bl" rotWithShape="0" blurRad="152400" dist="25400" dir="5400000">
-              <a:srgbClr val="8A8272">
-                <a:alpha val="22000"/>
-              </a:srgbClr>
-            </a:outerShdw>
-          </a:effectLst>
-        </p:spPr>
-      </p:sp>
-      <p:sp>
-        <p:nvSpPr>
-          <p:cNvPr id="18" name="Text 15"/>
-          <p:cNvSpPr/>
-          <p:nvPr/>
-        </p:nvSpPr>
-        <p:spPr>
-          <a:xfrm>
-            <a:off x="6461608" y="2679192"/>
-            <a:ext cx="4788256" cy="457200"/>
-          </a:xfrm>
-          <a:prstGeom prst="rect">
-            <a:avLst/>
-          </a:prstGeom>
-          <a:noFill/>
-          <a:ln/>
-        </p:spPr>
-        <p:txBody>
-          <a:bodyPr wrap="square" rtlCol="0" anchor="ctr"/>
-          <a:lstStyle/>
-          <a:p>
-            <a:pPr indent="0" marL="0">
-              <a:buNone/>
-            </a:pPr>
-            <a:r>
-              <a:rPr lang="en-US" sz="2200" b="1" dirty="0">
+        </p:spPr>
+      </p:sp>
+      <p:sp>
+        <p:nvSpPr>
+          <p:cNvPr id="13" name="Text 10"/>
+          <p:cNvSpPr/>
+          <p:nvPr/>
+        </p:nvSpPr>
+        <p:spPr>
+          <a:xfrm>
+            <a:off x="6347308" y="2574036"/>
+            <a:ext cx="5158588" cy="512064"/>
+          </a:xfrm>
+          <a:prstGeom prst="rect">
+            <a:avLst/>
+          </a:prstGeom>
+          <a:noFill/>
+          <a:ln/>
+        </p:spPr>
+        <p:txBody>
+          <a:bodyPr wrap="square" rtlCol="0" anchor="ctr"/>
+          <a:lstStyle/>
+          <a:p>
+            <a:pPr indent="0" marL="0">
+              <a:buNone/>
+            </a:pPr>
+            <a:r>
+              <a:rPr lang="en-US" sz="2400" b="1" dirty="0">
                 <a:solidFill>
                   <a:srgbClr val="15130F"/>
                 </a:solidFill>
@@ -4118,20 +3654,20 @@
               </a:rPr>
               <a:t>최종 형식</a:t>
             </a:r>
-            <a:endParaRPr lang="en-US" sz="2200" dirty="0"/>
-          </a:p>
-        </p:txBody>
-      </p:sp>
-      <p:sp>
-        <p:nvSpPr>
-          <p:cNvPr id="19" name="Text 16"/>
-          <p:cNvSpPr/>
-          <p:nvPr/>
-        </p:nvSpPr>
-        <p:spPr>
-          <a:xfrm>
-            <a:off x="6461608" y="3172968"/>
-            <a:ext cx="4788256" cy="256032"/>
+            <a:endParaRPr lang="en-US" sz="2400" dirty="0"/>
+          </a:p>
+        </p:txBody>
+      </p:sp>
+      <p:sp>
+        <p:nvSpPr>
+          <p:cNvPr id="14" name="Text 11"/>
+          <p:cNvSpPr/>
+          <p:nvPr/>
+        </p:nvSpPr>
+        <p:spPr>
+          <a:xfrm>
+            <a:off x="6347308" y="3122676"/>
+            <a:ext cx="5158588" cy="256032"/>
           </a:xfrm>
           <a:prstGeom prst="rect">
             <a:avLst/>
@@ -4163,14 +3699,14 @@
       </p:sp>
       <p:sp>
         <p:nvSpPr>
-          <p:cNvPr id="20" name="Text 17"/>
-          <p:cNvSpPr/>
-          <p:nvPr/>
-        </p:nvSpPr>
-        <p:spPr>
-          <a:xfrm>
-            <a:off x="6461608" y="3429000"/>
-            <a:ext cx="4788256" cy="438912"/>
+          <p:cNvPr id="15" name="Text 12"/>
+          <p:cNvSpPr/>
+          <p:nvPr/>
+        </p:nvSpPr>
+        <p:spPr>
+          <a:xfrm>
+            <a:off x="6347308" y="3378708"/>
+            <a:ext cx="5158588" cy="457200"/>
           </a:xfrm>
           <a:prstGeom prst="rect">
             <a:avLst/>
@@ -4202,52 +3738,41 @@
       </p:sp>
       <p:sp>
         <p:nvSpPr>
-          <p:cNvPr id="21" name="Shape 18"/>
-          <p:cNvSpPr/>
-          <p:nvPr/>
-        </p:nvSpPr>
-        <p:spPr>
-          <a:xfrm>
-            <a:off x="685800" y="4251960"/>
-            <a:ext cx="5272888" cy="1463040"/>
-          </a:xfrm>
-          <a:prstGeom prst="roundRect">
-            <a:avLst>
-              <a:gd name="adj" fmla="val 5000"/>
-            </a:avLst>
-          </a:prstGeom>
-          <a:solidFill>
-            <a:srgbClr val="FFFFFB"/>
-          </a:solidFill>
+          <p:cNvPr id="16" name="Shape 13"/>
+          <p:cNvSpPr/>
+          <p:nvPr/>
+        </p:nvSpPr>
+        <p:spPr>
+          <a:xfrm>
+            <a:off x="685800" y="4274820"/>
+            <a:ext cx="10820095" cy="0"/>
+          </a:xfrm>
+          <a:prstGeom prst="line">
+            <a:avLst/>
+          </a:prstGeom>
+          <a:noFill/>
           <a:ln w="12700">
             <a:solidFill>
               <a:srgbClr val="D8D0C1"/>
             </a:solidFill>
             <a:prstDash val="solid"/>
           </a:ln>
-          <a:effectLst>
-            <a:outerShdw sx="100000" sy="100000" kx="0" ky="0" algn="bl" rotWithShape="0" blurRad="152400" dist="25400" dir="5400000">
-              <a:srgbClr val="8A8272">
-                <a:alpha val="22000"/>
-              </a:srgbClr>
-            </a:outerShdw>
-          </a:effectLst>
-        </p:spPr>
-      </p:sp>
-      <p:sp>
-        <p:nvSpPr>
-          <p:cNvPr id="22" name="Shape 19"/>
-          <p:cNvSpPr/>
-          <p:nvPr/>
-        </p:nvSpPr>
-        <p:spPr>
-          <a:xfrm>
-            <a:off x="905256" y="4782312"/>
-            <a:ext cx="402336" cy="402336"/>
+        </p:spPr>
+      </p:sp>
+      <p:sp>
+        <p:nvSpPr>
+          <p:cNvPr id="17" name="Shape 14"/>
+          <p:cNvSpPr/>
+          <p:nvPr/>
+        </p:nvSpPr>
+        <p:spPr>
+          <a:xfrm>
+            <a:off x="685800" y="4604004"/>
+            <a:ext cx="384048" cy="384048"/>
           </a:xfrm>
           <a:prstGeom prst="roundRect">
             <a:avLst>
-              <a:gd name="adj" fmla="val 22727"/>
+              <a:gd name="adj" fmla="val 23810"/>
             </a:avLst>
           </a:prstGeom>
           <a:solidFill>
@@ -4263,14 +3788,14 @@
       </p:sp>
       <p:sp>
         <p:nvSpPr>
-          <p:cNvPr id="23" name="Text 20"/>
-          <p:cNvSpPr/>
-          <p:nvPr/>
-        </p:nvSpPr>
-        <p:spPr>
-          <a:xfrm>
-            <a:off x="905256" y="4782312"/>
-            <a:ext cx="402336" cy="402336"/>
+          <p:cNvPr id="18" name="Text 15"/>
+          <p:cNvSpPr/>
+          <p:nvPr/>
+        </p:nvSpPr>
+        <p:spPr>
+          <a:xfrm>
+            <a:off x="685800" y="4604004"/>
+            <a:ext cx="384048" cy="384048"/>
           </a:xfrm>
           <a:prstGeom prst="rect">
             <a:avLst/>
@@ -4286,7 +3811,7 @@
               <a:buNone/>
             </a:pPr>
             <a:r>
-              <a:rPr lang="en-US" sz="1300" b="1" dirty="0">
+              <a:rPr lang="en-US" sz="1250" b="1" dirty="0">
                 <a:solidFill>
                   <a:srgbClr val="2F4B7C"/>
                 </a:solidFill>
@@ -4296,20 +3821,20 @@
               </a:rPr>
               <a:t>▣</a:t>
             </a:r>
-            <a:endParaRPr lang="en-US" sz="1300" dirty="0"/>
-          </a:p>
-        </p:txBody>
-      </p:sp>
-      <p:sp>
-        <p:nvSpPr>
-          <p:cNvPr id="24" name="Text 21"/>
-          <p:cNvSpPr/>
-          <p:nvPr/>
-        </p:nvSpPr>
-        <p:spPr>
-          <a:xfrm>
-            <a:off x="1490472" y="4379976"/>
-            <a:ext cx="4248760" cy="201168"/>
+            <a:endParaRPr lang="en-US" sz="1250" dirty="0"/>
+          </a:p>
+        </p:txBody>
+      </p:sp>
+      <p:sp>
+        <p:nvSpPr>
+          <p:cNvPr id="19" name="Text 16"/>
+          <p:cNvSpPr/>
+          <p:nvPr/>
+        </p:nvSpPr>
+        <p:spPr>
+          <a:xfrm>
+            <a:off x="1271016" y="4549140"/>
+            <a:ext cx="4573372" cy="201168"/>
           </a:xfrm>
           <a:prstGeom prst="rect">
             <a:avLst/>
@@ -4341,30 +3866,30 @@
       </p:sp>
       <p:sp>
         <p:nvSpPr>
-          <p:cNvPr id="25" name="Text 22"/>
-          <p:cNvSpPr/>
-          <p:nvPr/>
-        </p:nvSpPr>
-        <p:spPr>
-          <a:xfrm>
-            <a:off x="1490472" y="4581144"/>
-            <a:ext cx="4248760" cy="256032"/>
-          </a:xfrm>
-          <a:prstGeom prst="rect">
-            <a:avLst/>
-          </a:prstGeom>
-          <a:noFill/>
-          <a:ln/>
-        </p:spPr>
-        <p:txBody>
-          <a:bodyPr wrap="square" rtlCol="0" anchor="ctr"/>
-          <a:lstStyle/>
-          <a:p>
-            <a:pPr indent="0" marL="0">
-              <a:buNone/>
-            </a:pPr>
-            <a:r>
-              <a:rPr lang="en-US" sz="1300" b="1" dirty="0">
+          <p:cNvPr id="20" name="Text 17"/>
+          <p:cNvSpPr/>
+          <p:nvPr/>
+        </p:nvSpPr>
+        <p:spPr>
+          <a:xfrm>
+            <a:off x="1271016" y="4750308"/>
+            <a:ext cx="4573372" cy="256032"/>
+          </a:xfrm>
+          <a:prstGeom prst="rect">
+            <a:avLst/>
+          </a:prstGeom>
+          <a:noFill/>
+          <a:ln/>
+        </p:spPr>
+        <p:txBody>
+          <a:bodyPr wrap="square" rtlCol="0" anchor="ctr"/>
+          <a:lstStyle/>
+          <a:p>
+            <a:pPr indent="0" marL="0">
+              <a:buNone/>
+            </a:pPr>
+            <a:r>
+              <a:rPr lang="en-US" sz="1350" b="1" dirty="0">
                 <a:solidFill>
                   <a:srgbClr val="15130F"/>
                 </a:solidFill>
@@ -4374,20 +3899,20 @@
               </a:rPr>
               <a:t>화면의 검사</a:t>
             </a:r>
-            <a:endParaRPr lang="en-US" sz="1300" dirty="0"/>
-          </a:p>
-        </p:txBody>
-      </p:sp>
-      <p:sp>
-        <p:nvSpPr>
-          <p:cNvPr id="26" name="Text 23"/>
-          <p:cNvSpPr/>
-          <p:nvPr/>
-        </p:nvSpPr>
-        <p:spPr>
-          <a:xfrm>
-            <a:off x="1490472" y="4837176"/>
-            <a:ext cx="4248760" cy="768096"/>
+            <a:endParaRPr lang="en-US" sz="1350" dirty="0"/>
+          </a:p>
+        </p:txBody>
+      </p:sp>
+      <p:sp>
+        <p:nvSpPr>
+          <p:cNvPr id="21" name="Text 18"/>
+          <p:cNvSpPr/>
+          <p:nvPr/>
+        </p:nvSpPr>
+        <p:spPr>
+          <a:xfrm>
+            <a:off x="1271016" y="5024628"/>
+            <a:ext cx="4573372" cy="758952"/>
           </a:xfrm>
           <a:prstGeom prst="rect">
             <a:avLst/>
@@ -4419,52 +3944,18 @@
       </p:sp>
       <p:sp>
         <p:nvSpPr>
-          <p:cNvPr id="27" name="Shape 24"/>
-          <p:cNvSpPr/>
-          <p:nvPr/>
-        </p:nvSpPr>
-        <p:spPr>
-          <a:xfrm>
-            <a:off x="6233008" y="4251960"/>
-            <a:ext cx="5272888" cy="1463040"/>
+          <p:cNvPr id="22" name="Shape 19"/>
+          <p:cNvSpPr/>
+          <p:nvPr/>
+        </p:nvSpPr>
+        <p:spPr>
+          <a:xfrm>
+            <a:off x="6347308" y="4604004"/>
+            <a:ext cx="384048" cy="384048"/>
           </a:xfrm>
           <a:prstGeom prst="roundRect">
             <a:avLst>
-              <a:gd name="adj" fmla="val 5000"/>
-            </a:avLst>
-          </a:prstGeom>
-          <a:solidFill>
-            <a:srgbClr val="FFFFFB"/>
-          </a:solidFill>
-          <a:ln w="12700">
-            <a:solidFill>
-              <a:srgbClr val="D8D0C1"/>
-            </a:solidFill>
-            <a:prstDash val="solid"/>
-          </a:ln>
-          <a:effectLst>
-            <a:outerShdw sx="100000" sy="100000" kx="0" ky="0" algn="bl" rotWithShape="0" blurRad="152400" dist="25400" dir="5400000">
-              <a:srgbClr val="8A8272">
-                <a:alpha val="22000"/>
-              </a:srgbClr>
-            </a:outerShdw>
-          </a:effectLst>
-        </p:spPr>
-      </p:sp>
-      <p:sp>
-        <p:nvSpPr>
-          <p:cNvPr id="28" name="Shape 25"/>
-          <p:cNvSpPr/>
-          <p:nvPr/>
-        </p:nvSpPr>
-        <p:spPr>
-          <a:xfrm>
-            <a:off x="6452464" y="4782312"/>
-            <a:ext cx="402336" cy="402336"/>
-          </a:xfrm>
-          <a:prstGeom prst="roundRect">
-            <a:avLst>
-              <a:gd name="adj" fmla="val 22727"/>
+              <a:gd name="adj" fmla="val 23810"/>
             </a:avLst>
           </a:prstGeom>
           <a:solidFill>
@@ -4480,14 +3971,14 @@
       </p:sp>
       <p:sp>
         <p:nvSpPr>
-          <p:cNvPr id="29" name="Text 26"/>
-          <p:cNvSpPr/>
-          <p:nvPr/>
-        </p:nvSpPr>
-        <p:spPr>
-          <a:xfrm>
-            <a:off x="6452464" y="4782312"/>
-            <a:ext cx="402336" cy="402336"/>
+          <p:cNvPr id="23" name="Text 20"/>
+          <p:cNvSpPr/>
+          <p:nvPr/>
+        </p:nvSpPr>
+        <p:spPr>
+          <a:xfrm>
+            <a:off x="6347308" y="4604004"/>
+            <a:ext cx="384048" cy="384048"/>
           </a:xfrm>
           <a:prstGeom prst="rect">
             <a:avLst/>
@@ -4503,7 +3994,7 @@
               <a:buNone/>
             </a:pPr>
             <a:r>
-              <a:rPr lang="en-US" sz="1300" b="1" dirty="0">
+              <a:rPr lang="en-US" sz="1250" b="1" dirty="0">
                 <a:solidFill>
                   <a:srgbClr val="2F4B7C"/>
                 </a:solidFill>
@@ -4513,20 +4004,20 @@
               </a:rPr>
               <a:t>◎</a:t>
             </a:r>
-            <a:endParaRPr lang="en-US" sz="1300" dirty="0"/>
-          </a:p>
-        </p:txBody>
-      </p:sp>
-      <p:sp>
-        <p:nvSpPr>
-          <p:cNvPr id="30" name="Text 27"/>
-          <p:cNvSpPr/>
-          <p:nvPr/>
-        </p:nvSpPr>
-        <p:spPr>
-          <a:xfrm>
-            <a:off x="7037680" y="4379976"/>
-            <a:ext cx="4248760" cy="201168"/>
+            <a:endParaRPr lang="en-US" sz="1250" dirty="0"/>
+          </a:p>
+        </p:txBody>
+      </p:sp>
+      <p:sp>
+        <p:nvSpPr>
+          <p:cNvPr id="24" name="Text 21"/>
+          <p:cNvSpPr/>
+          <p:nvPr/>
+        </p:nvSpPr>
+        <p:spPr>
+          <a:xfrm>
+            <a:off x="6932524" y="4549140"/>
+            <a:ext cx="4573372" cy="201168"/>
           </a:xfrm>
           <a:prstGeom prst="rect">
             <a:avLst/>
@@ -4558,30 +4049,30 @@
       </p:sp>
       <p:sp>
         <p:nvSpPr>
-          <p:cNvPr id="31" name="Text 28"/>
-          <p:cNvSpPr/>
-          <p:nvPr/>
-        </p:nvSpPr>
-        <p:spPr>
-          <a:xfrm>
-            <a:off x="7037680" y="4581144"/>
-            <a:ext cx="4248760" cy="256032"/>
-          </a:xfrm>
-          <a:prstGeom prst="rect">
-            <a:avLst/>
-          </a:prstGeom>
-          <a:noFill/>
-          <a:ln/>
-        </p:spPr>
-        <p:txBody>
-          <a:bodyPr wrap="square" rtlCol="0" anchor="ctr"/>
-          <a:lstStyle/>
-          <a:p>
-            <a:pPr indent="0" marL="0">
-              <a:buNone/>
-            </a:pPr>
-            <a:r>
-              <a:rPr lang="en-US" sz="1300" b="1" dirty="0">
+          <p:cNvPr id="25" name="Text 22"/>
+          <p:cNvSpPr/>
+          <p:nvPr/>
+        </p:nvSpPr>
+        <p:spPr>
+          <a:xfrm>
+            <a:off x="6932524" y="4750308"/>
+            <a:ext cx="4573372" cy="256032"/>
+          </a:xfrm>
+          <a:prstGeom prst="rect">
+            <a:avLst/>
+          </a:prstGeom>
+          <a:noFill/>
+          <a:ln/>
+        </p:spPr>
+        <p:txBody>
+          <a:bodyPr wrap="square" rtlCol="0" anchor="ctr"/>
+          <a:lstStyle/>
+          <a:p>
+            <a:pPr indent="0" marL="0">
+              <a:buNone/>
+            </a:pPr>
+            <a:r>
+              <a:rPr lang="en-US" sz="1350" b="1" dirty="0">
                 <a:solidFill>
                   <a:srgbClr val="15130F"/>
                 </a:solidFill>
@@ -4591,20 +4082,20 @@
               </a:rPr>
               <a:t>발표의 검사</a:t>
             </a:r>
-            <a:endParaRPr lang="en-US" sz="1300" dirty="0"/>
-          </a:p>
-        </p:txBody>
-      </p:sp>
-      <p:sp>
-        <p:nvSpPr>
-          <p:cNvPr id="32" name="Text 29"/>
-          <p:cNvSpPr/>
-          <p:nvPr/>
-        </p:nvSpPr>
-        <p:spPr>
-          <a:xfrm>
-            <a:off x="7037680" y="4837176"/>
-            <a:ext cx="4248760" cy="768096"/>
+            <a:endParaRPr lang="en-US" sz="1350" dirty="0"/>
+          </a:p>
+        </p:txBody>
+      </p:sp>
+      <p:sp>
+        <p:nvSpPr>
+          <p:cNvPr id="26" name="Text 23"/>
+          <p:cNvSpPr/>
+          <p:nvPr/>
+        </p:nvSpPr>
+        <p:spPr>
+          <a:xfrm>
+            <a:off x="6932524" y="5024628"/>
+            <a:ext cx="4573372" cy="758952"/>
           </a:xfrm>
           <a:prstGeom prst="rect">
             <a:avLst/>
@@ -4668,117 +4159,7 @@
       </p:grpSpPr>
       <p:sp>
         <p:nvSpPr>
-          <p:cNvPr id="2" name="Shape 0"/>
-          <p:cNvSpPr/>
-          <p:nvPr/>
-        </p:nvSpPr>
-        <p:spPr>
-          <a:xfrm>
-            <a:off x="0" y="4389120"/>
-            <a:ext cx="12191695" cy="2478024"/>
-          </a:xfrm>
-          <a:prstGeom prst="rect">
-            <a:avLst/>
-          </a:prstGeom>
-          <a:solidFill>
-            <a:srgbClr val="15130F">
-              <a:alpha val="1000"/>
-            </a:srgbClr>
-          </a:solidFill>
-          <a:ln/>
-        </p:spPr>
-      </p:sp>
-      <p:sp>
-        <p:nvSpPr>
-          <p:cNvPr id="3" name="Shape 1"/>
-          <p:cNvSpPr/>
-          <p:nvPr/>
-        </p:nvSpPr>
-        <p:spPr>
-          <a:xfrm>
-            <a:off x="0" y="4882896"/>
-            <a:ext cx="12191695" cy="1984248"/>
-          </a:xfrm>
-          <a:prstGeom prst="rect">
-            <a:avLst/>
-          </a:prstGeom>
-          <a:solidFill>
-            <a:srgbClr val="15130F">
-              <a:alpha val="2000"/>
-            </a:srgbClr>
-          </a:solidFill>
-          <a:ln/>
-        </p:spPr>
-      </p:sp>
-      <p:sp>
-        <p:nvSpPr>
-          <p:cNvPr id="4" name="Shape 2"/>
-          <p:cNvSpPr/>
-          <p:nvPr/>
-        </p:nvSpPr>
-        <p:spPr>
-          <a:xfrm>
-            <a:off x="0" y="5376672"/>
-            <a:ext cx="12191695" cy="1490472"/>
-          </a:xfrm>
-          <a:prstGeom prst="rect">
-            <a:avLst/>
-          </a:prstGeom>
-          <a:solidFill>
-            <a:srgbClr val="15130F">
-              <a:alpha val="3000"/>
-            </a:srgbClr>
-          </a:solidFill>
-          <a:ln/>
-        </p:spPr>
-      </p:sp>
-      <p:sp>
-        <p:nvSpPr>
-          <p:cNvPr id="5" name="Shape 3"/>
-          <p:cNvSpPr/>
-          <p:nvPr/>
-        </p:nvSpPr>
-        <p:spPr>
-          <a:xfrm>
-            <a:off x="0" y="5870448"/>
-            <a:ext cx="12191695" cy="996696"/>
-          </a:xfrm>
-          <a:prstGeom prst="rect">
-            <a:avLst/>
-          </a:prstGeom>
-          <a:solidFill>
-            <a:srgbClr val="15130F">
-              <a:alpha val="4000"/>
-            </a:srgbClr>
-          </a:solidFill>
-          <a:ln/>
-        </p:spPr>
-      </p:sp>
-      <p:sp>
-        <p:nvSpPr>
-          <p:cNvPr id="6" name="Shape 4"/>
-          <p:cNvSpPr/>
-          <p:nvPr/>
-        </p:nvSpPr>
-        <p:spPr>
-          <a:xfrm>
-            <a:off x="0" y="6364224"/>
-            <a:ext cx="12191695" cy="502920"/>
-          </a:xfrm>
-          <a:prstGeom prst="rect">
-            <a:avLst/>
-          </a:prstGeom>
-          <a:solidFill>
-            <a:srgbClr val="15130F">
-              <a:alpha val="5000"/>
-            </a:srgbClr>
-          </a:solidFill>
-          <a:ln/>
-        </p:spPr>
-      </p:sp>
-      <p:sp>
-        <p:nvSpPr>
-          <p:cNvPr id="8" name="Text 5"/>
+          <p:cNvPr id="3" name="Text 0"/>
           <p:cNvSpPr/>
           <p:nvPr/>
         </p:nvSpPr>
@@ -4831,7 +4212,7 @@
       </p:sp>
       <p:sp>
         <p:nvSpPr>
-          <p:cNvPr id="9" name="Text 6"/>
+          <p:cNvPr id="4" name="Text 1"/>
           <p:cNvSpPr/>
           <p:nvPr/>
         </p:nvSpPr>
@@ -4870,7 +4251,7 @@
       </p:sp>
       <p:sp>
         <p:nvSpPr>
-          <p:cNvPr id="10" name="Text 7"/>
+          <p:cNvPr id="5" name="Text 2"/>
           <p:cNvSpPr/>
           <p:nvPr/>
         </p:nvSpPr>
@@ -4909,7 +4290,7 @@
       </p:sp>
       <p:sp>
         <p:nvSpPr>
-          <p:cNvPr id="11" name="Text 8"/>
+          <p:cNvPr id="6" name="Text 3"/>
           <p:cNvSpPr/>
           <p:nvPr/>
         </p:nvSpPr>
@@ -4948,7 +4329,7 @@
       </p:sp>
       <p:sp>
         <p:nvSpPr>
-          <p:cNvPr id="12" name="Text 9"/>
+          <p:cNvPr id="7" name="Text 4"/>
           <p:cNvSpPr/>
           <p:nvPr/>
         </p:nvSpPr>
@@ -4987,7 +4368,7 @@
       </p:sp>
       <p:sp>
         <p:nvSpPr>
-          <p:cNvPr id="13" name="Text 10"/>
+          <p:cNvPr id="8" name="Text 5"/>
           <p:cNvSpPr/>
           <p:nvPr/>
         </p:nvSpPr>
@@ -5026,7 +4407,7 @@
       </p:sp>
       <p:sp>
         <p:nvSpPr>
-          <p:cNvPr id="14" name="Shape 11"/>
+          <p:cNvPr id="9" name="Shape 6"/>
           <p:cNvSpPr/>
           <p:nvPr/>
         </p:nvSpPr>
@@ -5060,7 +4441,7 @@
       </p:sp>
       <p:sp>
         <p:nvSpPr>
-          <p:cNvPr id="15" name="Text 12"/>
+          <p:cNvPr id="10" name="Text 7"/>
           <p:cNvSpPr/>
           <p:nvPr/>
         </p:nvSpPr>
@@ -5099,7 +4480,7 @@
       </p:sp>
       <p:sp>
         <p:nvSpPr>
-          <p:cNvPr id="16" name="Text 13"/>
+          <p:cNvPr id="11" name="Text 8"/>
           <p:cNvSpPr/>
           <p:nvPr/>
         </p:nvSpPr>
@@ -5138,7 +4519,7 @@
       </p:sp>
       <p:graphicFrame>
         <p:nvGraphicFramePr>
-          <p:cNvPr id="17" name="Chart 0" descr=""/>
+          <p:cNvPr id="12" name="Chart 0" descr=""/>
           <p:cNvGraphicFramePr/>
           <p:nvPr/>
         </p:nvGraphicFramePr>
@@ -5154,7 +4535,7 @@
       </p:graphicFrame>
       <p:sp>
         <p:nvSpPr>
-          <p:cNvPr id="18" name="Text 14"/>
+          <p:cNvPr id="13" name="Text 9"/>
           <p:cNvSpPr/>
           <p:nvPr/>
         </p:nvSpPr>
@@ -5193,7 +4574,7 @@
       </p:sp>
       <p:sp>
         <p:nvSpPr>
-          <p:cNvPr id="19" name="Shape 15"/>
+          <p:cNvPr id="14" name="Shape 10"/>
           <p:cNvSpPr/>
           <p:nvPr/>
         </p:nvSpPr>
@@ -5227,7 +4608,7 @@
       </p:sp>
       <p:sp>
         <p:nvSpPr>
-          <p:cNvPr id="20" name="Text 16"/>
+          <p:cNvPr id="15" name="Text 11"/>
           <p:cNvSpPr/>
           <p:nvPr/>
         </p:nvSpPr>
@@ -5266,7 +4647,7 @@
       </p:sp>
       <p:sp>
         <p:nvSpPr>
-          <p:cNvPr id="21" name="Text 17"/>
+          <p:cNvPr id="16" name="Text 12"/>
           <p:cNvSpPr/>
           <p:nvPr/>
         </p:nvSpPr>
@@ -5305,7 +4686,7 @@
       </p:sp>
       <p:sp>
         <p:nvSpPr>
-          <p:cNvPr id="22" name="Text 18"/>
+          <p:cNvPr id="17" name="Text 13"/>
           <p:cNvSpPr/>
           <p:nvPr/>
         </p:nvSpPr>
@@ -5344,7 +4725,7 @@
       </p:sp>
       <p:sp>
         <p:nvSpPr>
-          <p:cNvPr id="23" name="Shape 19"/>
+          <p:cNvPr id="18" name="Shape 14"/>
           <p:cNvSpPr/>
           <p:nvPr/>
         </p:nvSpPr>
@@ -5378,7 +4759,7 @@
       </p:sp>
       <p:sp>
         <p:nvSpPr>
-          <p:cNvPr id="24" name="Text 20"/>
+          <p:cNvPr id="19" name="Text 15"/>
           <p:cNvSpPr/>
           <p:nvPr/>
         </p:nvSpPr>
@@ -5417,7 +4798,7 @@
       </p:sp>
       <p:sp>
         <p:nvSpPr>
-          <p:cNvPr id="25" name="Text 21"/>
+          <p:cNvPr id="20" name="Text 16"/>
           <p:cNvSpPr/>
           <p:nvPr/>
         </p:nvSpPr>
@@ -5456,7 +4837,7 @@
       </p:sp>
       <p:sp>
         <p:nvSpPr>
-          <p:cNvPr id="26" name="Text 22"/>
+          <p:cNvPr id="21" name="Text 17"/>
           <p:cNvSpPr/>
           <p:nvPr/>
         </p:nvSpPr>
@@ -5495,7 +4876,7 @@
       </p:sp>
       <p:sp>
         <p:nvSpPr>
-          <p:cNvPr id="27" name="Shape 23"/>
+          <p:cNvPr id="22" name="Shape 18"/>
           <p:cNvSpPr/>
           <p:nvPr/>
         </p:nvSpPr>
@@ -5529,7 +4910,7 @@
       </p:sp>
       <p:sp>
         <p:nvSpPr>
-          <p:cNvPr id="28" name="Text 24"/>
+          <p:cNvPr id="23" name="Text 19"/>
           <p:cNvSpPr/>
           <p:nvPr/>
         </p:nvSpPr>
@@ -5568,7 +4949,7 @@
       </p:sp>
       <p:sp>
         <p:nvSpPr>
-          <p:cNvPr id="29" name="Text 25"/>
+          <p:cNvPr id="24" name="Text 20"/>
           <p:cNvSpPr/>
           <p:nvPr/>
         </p:nvSpPr>
@@ -5607,7 +4988,7 @@
       </p:sp>
       <p:sp>
         <p:nvSpPr>
-          <p:cNvPr id="30" name="Text 26"/>
+          <p:cNvPr id="25" name="Text 21"/>
           <p:cNvSpPr/>
           <p:nvPr/>
         </p:nvSpPr>
@@ -5678,117 +5059,7 @@
       </p:grpSpPr>
       <p:sp>
         <p:nvSpPr>
-          <p:cNvPr id="2" name="Shape 0"/>
-          <p:cNvSpPr/>
-          <p:nvPr/>
-        </p:nvSpPr>
-        <p:spPr>
-          <a:xfrm>
-            <a:off x="0" y="4389120"/>
-            <a:ext cx="12191695" cy="2478024"/>
-          </a:xfrm>
-          <a:prstGeom prst="rect">
-            <a:avLst/>
-          </a:prstGeom>
-          <a:solidFill>
-            <a:srgbClr val="15130F">
-              <a:alpha val="1000"/>
-            </a:srgbClr>
-          </a:solidFill>
-          <a:ln/>
-        </p:spPr>
-      </p:sp>
-      <p:sp>
-        <p:nvSpPr>
-          <p:cNvPr id="3" name="Shape 1"/>
-          <p:cNvSpPr/>
-          <p:nvPr/>
-        </p:nvSpPr>
-        <p:spPr>
-          <a:xfrm>
-            <a:off x="0" y="4882896"/>
-            <a:ext cx="12191695" cy="1984248"/>
-          </a:xfrm>
-          <a:prstGeom prst="rect">
-            <a:avLst/>
-          </a:prstGeom>
-          <a:solidFill>
-            <a:srgbClr val="15130F">
-              <a:alpha val="2000"/>
-            </a:srgbClr>
-          </a:solidFill>
-          <a:ln/>
-        </p:spPr>
-      </p:sp>
-      <p:sp>
-        <p:nvSpPr>
-          <p:cNvPr id="4" name="Shape 2"/>
-          <p:cNvSpPr/>
-          <p:nvPr/>
-        </p:nvSpPr>
-        <p:spPr>
-          <a:xfrm>
-            <a:off x="0" y="5376672"/>
-            <a:ext cx="12191695" cy="1490472"/>
-          </a:xfrm>
-          <a:prstGeom prst="rect">
-            <a:avLst/>
-          </a:prstGeom>
-          <a:solidFill>
-            <a:srgbClr val="15130F">
-              <a:alpha val="3000"/>
-            </a:srgbClr>
-          </a:solidFill>
-          <a:ln/>
-        </p:spPr>
-      </p:sp>
-      <p:sp>
-        <p:nvSpPr>
-          <p:cNvPr id="5" name="Shape 3"/>
-          <p:cNvSpPr/>
-          <p:nvPr/>
-        </p:nvSpPr>
-        <p:spPr>
-          <a:xfrm>
-            <a:off x="0" y="5870448"/>
-            <a:ext cx="12191695" cy="996696"/>
-          </a:xfrm>
-          <a:prstGeom prst="rect">
-            <a:avLst/>
-          </a:prstGeom>
-          <a:solidFill>
-            <a:srgbClr val="15130F">
-              <a:alpha val="4000"/>
-            </a:srgbClr>
-          </a:solidFill>
-          <a:ln/>
-        </p:spPr>
-      </p:sp>
-      <p:sp>
-        <p:nvSpPr>
-          <p:cNvPr id="6" name="Shape 4"/>
-          <p:cNvSpPr/>
-          <p:nvPr/>
-        </p:nvSpPr>
-        <p:spPr>
-          <a:xfrm>
-            <a:off x="0" y="6364224"/>
-            <a:ext cx="12191695" cy="502920"/>
-          </a:xfrm>
-          <a:prstGeom prst="rect">
-            <a:avLst/>
-          </a:prstGeom>
-          <a:solidFill>
-            <a:srgbClr val="15130F">
-              <a:alpha val="5000"/>
-            </a:srgbClr>
-          </a:solidFill>
-          <a:ln/>
-        </p:spPr>
-      </p:sp>
-      <p:sp>
-        <p:nvSpPr>
-          <p:cNvPr id="8" name="Text 5"/>
+          <p:cNvPr id="3" name="Text 0"/>
           <p:cNvSpPr/>
           <p:nvPr/>
         </p:nvSpPr>
@@ -5841,7 +5112,7 @@
       </p:sp>
       <p:sp>
         <p:nvSpPr>
-          <p:cNvPr id="9" name="Text 6"/>
+          <p:cNvPr id="4" name="Text 1"/>
           <p:cNvSpPr/>
           <p:nvPr/>
         </p:nvSpPr>
@@ -5880,7 +5151,7 @@
       </p:sp>
       <p:sp>
         <p:nvSpPr>
-          <p:cNvPr id="10" name="Text 7"/>
+          <p:cNvPr id="5" name="Text 2"/>
           <p:cNvSpPr/>
           <p:nvPr/>
         </p:nvSpPr>
@@ -5919,7 +5190,7 @@
       </p:sp>
       <p:sp>
         <p:nvSpPr>
-          <p:cNvPr id="11" name="Text 8"/>
+          <p:cNvPr id="6" name="Text 3"/>
           <p:cNvSpPr/>
           <p:nvPr/>
         </p:nvSpPr>
@@ -5958,7 +5229,7 @@
       </p:sp>
       <p:sp>
         <p:nvSpPr>
-          <p:cNvPr id="12" name="Text 9"/>
+          <p:cNvPr id="7" name="Text 4"/>
           <p:cNvSpPr/>
           <p:nvPr/>
         </p:nvSpPr>
@@ -5997,807 +5268,774 @@
       </p:sp>
       <p:sp>
         <p:nvSpPr>
-          <p:cNvPr id="13" name="Shape 10"/>
-          <p:cNvSpPr/>
-          <p:nvPr/>
-        </p:nvSpPr>
-        <p:spPr>
-          <a:xfrm>
-            <a:off x="685800" y="2583180"/>
-            <a:ext cx="2017715" cy="1463040"/>
-          </a:xfrm>
-          <a:prstGeom prst="roundRect">
-            <a:avLst>
-              <a:gd name="adj" fmla="val 5000"/>
-            </a:avLst>
+          <p:cNvPr id="8" name="Shape 5"/>
+          <p:cNvSpPr/>
+          <p:nvPr/>
+        </p:nvSpPr>
+        <p:spPr>
+          <a:xfrm>
+            <a:off x="1694658" y="2670048"/>
+            <a:ext cx="8802380" cy="0"/>
+          </a:xfrm>
+          <a:prstGeom prst="line">
+            <a:avLst/>
+          </a:prstGeom>
+          <a:noFill/>
+          <a:ln w="15875">
+            <a:solidFill>
+              <a:srgbClr val="D8D0C1"/>
+            </a:solidFill>
+            <a:prstDash val="solid"/>
+          </a:ln>
+        </p:spPr>
+      </p:sp>
+      <p:sp>
+        <p:nvSpPr>
+          <p:cNvPr id="9" name="Shape 6"/>
+          <p:cNvSpPr/>
+          <p:nvPr/>
+        </p:nvSpPr>
+        <p:spPr>
+          <a:xfrm>
+            <a:off x="1466058" y="2441448"/>
+            <a:ext cx="457200" cy="457200"/>
+          </a:xfrm>
+          <a:prstGeom prst="ellipse">
+            <a:avLst/>
           </a:prstGeom>
           <a:solidFill>
             <a:srgbClr val="FFFFFB"/>
           </a:solidFill>
+          <a:ln w="19050">
+            <a:solidFill>
+              <a:srgbClr val="2F4B7C"/>
+            </a:solidFill>
+            <a:prstDash val="solid"/>
+          </a:ln>
+        </p:spPr>
+      </p:sp>
+      <p:sp>
+        <p:nvSpPr>
+          <p:cNvPr id="10" name="Text 7"/>
+          <p:cNvSpPr/>
+          <p:nvPr/>
+        </p:nvSpPr>
+        <p:spPr>
+          <a:xfrm>
+            <a:off x="1328898" y="2441448"/>
+            <a:ext cx="731520" cy="457200"/>
+          </a:xfrm>
+          <a:prstGeom prst="rect">
+            <a:avLst/>
+          </a:prstGeom>
+          <a:noFill/>
+          <a:ln/>
+        </p:spPr>
+        <p:txBody>
+          <a:bodyPr wrap="square" lIns="0" tIns="0" rIns="0" bIns="0" rtlCol="0" anchor="ctr"/>
+          <a:lstStyle/>
+          <a:p>
+            <a:pPr algn="ctr" indent="0" marL="0">
+              <a:buNone/>
+            </a:pPr>
+            <a:r>
+              <a:rPr lang="en-US" sz="1200" b="1" dirty="0">
+                <a:solidFill>
+                  <a:srgbClr val="2F4B7C"/>
+                </a:solidFill>
+                <a:latin typeface="Pretendard" pitchFamily="34" charset="0"/>
+                <a:ea typeface="Pretendard" pitchFamily="34" charset="-122"/>
+                <a:cs typeface="Pretendard" pitchFamily="34" charset="-120"/>
+              </a:rPr>
+              <a:t>01</a:t>
+            </a:r>
+            <a:endParaRPr lang="en-US" sz="1200" dirty="0"/>
+          </a:p>
+        </p:txBody>
+      </p:sp>
+      <p:sp>
+        <p:nvSpPr>
+          <p:cNvPr id="11" name="Text 8"/>
+          <p:cNvSpPr/>
+          <p:nvPr/>
+        </p:nvSpPr>
+        <p:spPr>
+          <a:xfrm>
+            <a:off x="685800" y="3099816"/>
+            <a:ext cx="2017715" cy="292608"/>
+          </a:xfrm>
+          <a:prstGeom prst="rect">
+            <a:avLst/>
+          </a:prstGeom>
+          <a:noFill/>
+          <a:ln/>
+        </p:spPr>
+        <p:txBody>
+          <a:bodyPr wrap="square" rtlCol="0" anchor="ctr"/>
+          <a:lstStyle/>
+          <a:p>
+            <a:pPr algn="ctr" indent="0" marL="0">
+              <a:buNone/>
+            </a:pPr>
+            <a:r>
+              <a:rPr lang="en-US" sz="1550" b="1" dirty="0">
+                <a:solidFill>
+                  <a:srgbClr val="15130F"/>
+                </a:solidFill>
+                <a:latin typeface="Pretendard" pitchFamily="34" charset="0"/>
+                <a:ea typeface="Pretendard" pitchFamily="34" charset="-122"/>
+                <a:cs typeface="Pretendard" pitchFamily="34" charset="-120"/>
+              </a:rPr>
+              <a:t>자료</a:t>
+            </a:r>
+            <a:endParaRPr lang="en-US" sz="1550" dirty="0"/>
+          </a:p>
+        </p:txBody>
+      </p:sp>
+      <p:sp>
+        <p:nvSpPr>
+          <p:cNvPr id="12" name="Text 9"/>
+          <p:cNvSpPr/>
+          <p:nvPr/>
+        </p:nvSpPr>
+        <p:spPr>
+          <a:xfrm>
+            <a:off x="685800" y="3410712"/>
+            <a:ext cx="2017715" cy="274320"/>
+          </a:xfrm>
+          <a:prstGeom prst="rect">
+            <a:avLst/>
+          </a:prstGeom>
+          <a:noFill/>
+          <a:ln/>
+        </p:spPr>
+        <p:txBody>
+          <a:bodyPr wrap="square" rtlCol="0" anchor="ctr"/>
+          <a:lstStyle/>
+          <a:p>
+            <a:pPr algn="ctr" indent="0" marL="0">
+              <a:buNone/>
+            </a:pPr>
+            <a:r>
+              <a:rPr lang="en-US" sz="1000" dirty="0">
+                <a:solidFill>
+                  <a:srgbClr val="4A463D"/>
+                </a:solidFill>
+                <a:latin typeface="Pretendard" pitchFamily="34" charset="0"/>
+                <a:ea typeface="Pretendard" pitchFamily="34" charset="-122"/>
+                <a:cs typeface="Pretendard" pitchFamily="34" charset="-120"/>
+              </a:rPr>
+              <a:t>출처 있는 주장만</a:t>
+            </a:r>
+            <a:endParaRPr lang="en-US" sz="1000" dirty="0"/>
+          </a:p>
+        </p:txBody>
+      </p:sp>
+      <p:sp>
+        <p:nvSpPr>
+          <p:cNvPr id="13" name="Shape 10"/>
+          <p:cNvSpPr/>
+          <p:nvPr/>
+        </p:nvSpPr>
+        <p:spPr>
+          <a:xfrm>
+            <a:off x="3666653" y="2441448"/>
+            <a:ext cx="457200" cy="457200"/>
+          </a:xfrm>
+          <a:prstGeom prst="ellipse">
+            <a:avLst/>
+          </a:prstGeom>
+          <a:solidFill>
+            <a:srgbClr val="FFFFFB"/>
+          </a:solidFill>
+          <a:ln w="19050">
+            <a:solidFill>
+              <a:srgbClr val="2F4B7C"/>
+            </a:solidFill>
+            <a:prstDash val="solid"/>
+          </a:ln>
+        </p:spPr>
+      </p:sp>
+      <p:sp>
+        <p:nvSpPr>
+          <p:cNvPr id="14" name="Text 11"/>
+          <p:cNvSpPr/>
+          <p:nvPr/>
+        </p:nvSpPr>
+        <p:spPr>
+          <a:xfrm>
+            <a:off x="3529493" y="2441448"/>
+            <a:ext cx="731520" cy="457200"/>
+          </a:xfrm>
+          <a:prstGeom prst="rect">
+            <a:avLst/>
+          </a:prstGeom>
+          <a:noFill/>
+          <a:ln/>
+        </p:spPr>
+        <p:txBody>
+          <a:bodyPr wrap="square" lIns="0" tIns="0" rIns="0" bIns="0" rtlCol="0" anchor="ctr"/>
+          <a:lstStyle/>
+          <a:p>
+            <a:pPr algn="ctr" indent="0" marL="0">
+              <a:buNone/>
+            </a:pPr>
+            <a:r>
+              <a:rPr lang="en-US" sz="1200" b="1" dirty="0">
+                <a:solidFill>
+                  <a:srgbClr val="2F4B7C"/>
+                </a:solidFill>
+                <a:latin typeface="Pretendard" pitchFamily="34" charset="0"/>
+                <a:ea typeface="Pretendard" pitchFamily="34" charset="-122"/>
+                <a:cs typeface="Pretendard" pitchFamily="34" charset="-120"/>
+              </a:rPr>
+              <a:t>02</a:t>
+            </a:r>
+            <a:endParaRPr lang="en-US" sz="1200" dirty="0"/>
+          </a:p>
+        </p:txBody>
+      </p:sp>
+      <p:sp>
+        <p:nvSpPr>
+          <p:cNvPr id="15" name="Text 12"/>
+          <p:cNvSpPr/>
+          <p:nvPr/>
+        </p:nvSpPr>
+        <p:spPr>
+          <a:xfrm>
+            <a:off x="2886395" y="3099816"/>
+            <a:ext cx="2017715" cy="292608"/>
+          </a:xfrm>
+          <a:prstGeom prst="rect">
+            <a:avLst/>
+          </a:prstGeom>
+          <a:noFill/>
+          <a:ln/>
+        </p:spPr>
+        <p:txBody>
+          <a:bodyPr wrap="square" rtlCol="0" anchor="ctr"/>
+          <a:lstStyle/>
+          <a:p>
+            <a:pPr algn="ctr" indent="0" marL="0">
+              <a:buNone/>
+            </a:pPr>
+            <a:r>
+              <a:rPr lang="en-US" sz="1550" b="1" dirty="0">
+                <a:solidFill>
+                  <a:srgbClr val="15130F"/>
+                </a:solidFill>
+                <a:latin typeface="Pretendard" pitchFamily="34" charset="0"/>
+                <a:ea typeface="Pretendard" pitchFamily="34" charset="-122"/>
+                <a:cs typeface="Pretendard" pitchFamily="34" charset="-120"/>
+              </a:rPr>
+              <a:t>구성안</a:t>
+            </a:r>
+            <a:endParaRPr lang="en-US" sz="1550" dirty="0"/>
+          </a:p>
+        </p:txBody>
+      </p:sp>
+      <p:sp>
+        <p:nvSpPr>
+          <p:cNvPr id="16" name="Text 13"/>
+          <p:cNvSpPr/>
+          <p:nvPr/>
+        </p:nvSpPr>
+        <p:spPr>
+          <a:xfrm>
+            <a:off x="2886395" y="3410712"/>
+            <a:ext cx="2017715" cy="274320"/>
+          </a:xfrm>
+          <a:prstGeom prst="rect">
+            <a:avLst/>
+          </a:prstGeom>
+          <a:noFill/>
+          <a:ln/>
+        </p:spPr>
+        <p:txBody>
+          <a:bodyPr wrap="square" rtlCol="0" anchor="ctr"/>
+          <a:lstStyle/>
+          <a:p>
+            <a:pPr algn="ctr" indent="0" marL="0">
+              <a:buNone/>
+            </a:pPr>
+            <a:r>
+              <a:rPr lang="en-US" sz="1000" dirty="0">
+                <a:solidFill>
+                  <a:srgbClr val="4A463D"/>
+                </a:solidFill>
+                <a:latin typeface="Pretendard" pitchFamily="34" charset="0"/>
+                <a:ea typeface="Pretendard" pitchFamily="34" charset="-122"/>
+                <a:cs typeface="Pretendard" pitchFamily="34" charset="-120"/>
+              </a:rPr>
+              <a:t>장별 메시지 1개</a:t>
+            </a:r>
+            <a:endParaRPr lang="en-US" sz="1000" dirty="0"/>
+          </a:p>
+        </p:txBody>
+      </p:sp>
+      <p:sp>
+        <p:nvSpPr>
+          <p:cNvPr id="17" name="Shape 14"/>
+          <p:cNvSpPr/>
+          <p:nvPr/>
+        </p:nvSpPr>
+        <p:spPr>
+          <a:xfrm>
+            <a:off x="5867248" y="2441448"/>
+            <a:ext cx="457200" cy="457200"/>
+          </a:xfrm>
+          <a:prstGeom prst="ellipse">
+            <a:avLst/>
+          </a:prstGeom>
+          <a:solidFill>
+            <a:srgbClr val="FFFFFB"/>
+          </a:solidFill>
+          <a:ln w="19050">
+            <a:solidFill>
+              <a:srgbClr val="2F4B7C"/>
+            </a:solidFill>
+            <a:prstDash val="solid"/>
+          </a:ln>
+        </p:spPr>
+      </p:sp>
+      <p:sp>
+        <p:nvSpPr>
+          <p:cNvPr id="18" name="Text 15"/>
+          <p:cNvSpPr/>
+          <p:nvPr/>
+        </p:nvSpPr>
+        <p:spPr>
+          <a:xfrm>
+            <a:off x="5730088" y="2441448"/>
+            <a:ext cx="731520" cy="457200"/>
+          </a:xfrm>
+          <a:prstGeom prst="rect">
+            <a:avLst/>
+          </a:prstGeom>
+          <a:noFill/>
+          <a:ln/>
+        </p:spPr>
+        <p:txBody>
+          <a:bodyPr wrap="square" lIns="0" tIns="0" rIns="0" bIns="0" rtlCol="0" anchor="ctr"/>
+          <a:lstStyle/>
+          <a:p>
+            <a:pPr algn="ctr" indent="0" marL="0">
+              <a:buNone/>
+            </a:pPr>
+            <a:r>
+              <a:rPr lang="en-US" sz="1200" b="1" dirty="0">
+                <a:solidFill>
+                  <a:srgbClr val="2F4B7C"/>
+                </a:solidFill>
+                <a:latin typeface="Pretendard" pitchFamily="34" charset="0"/>
+                <a:ea typeface="Pretendard" pitchFamily="34" charset="-122"/>
+                <a:cs typeface="Pretendard" pitchFamily="34" charset="-120"/>
+              </a:rPr>
+              <a:t>03</a:t>
+            </a:r>
+            <a:endParaRPr lang="en-US" sz="1200" dirty="0"/>
+          </a:p>
+        </p:txBody>
+      </p:sp>
+      <p:sp>
+        <p:nvSpPr>
+          <p:cNvPr id="19" name="Text 16"/>
+          <p:cNvSpPr/>
+          <p:nvPr/>
+        </p:nvSpPr>
+        <p:spPr>
+          <a:xfrm>
+            <a:off x="5086990" y="3099816"/>
+            <a:ext cx="2017715" cy="292608"/>
+          </a:xfrm>
+          <a:prstGeom prst="rect">
+            <a:avLst/>
+          </a:prstGeom>
+          <a:noFill/>
+          <a:ln/>
+        </p:spPr>
+        <p:txBody>
+          <a:bodyPr wrap="square" rtlCol="0" anchor="ctr"/>
+          <a:lstStyle/>
+          <a:p>
+            <a:pPr algn="ctr" indent="0" marL="0">
+              <a:buNone/>
+            </a:pPr>
+            <a:r>
+              <a:rPr lang="en-US" sz="1550" b="1" dirty="0">
+                <a:solidFill>
+                  <a:srgbClr val="15130F"/>
+                </a:solidFill>
+                <a:latin typeface="Pretendard" pitchFamily="34" charset="0"/>
+                <a:ea typeface="Pretendard" pitchFamily="34" charset="-122"/>
+                <a:cs typeface="Pretendard" pitchFamily="34" charset="-120"/>
+              </a:rPr>
+              <a:t>문구</a:t>
+            </a:r>
+            <a:endParaRPr lang="en-US" sz="1550" dirty="0"/>
+          </a:p>
+        </p:txBody>
+      </p:sp>
+      <p:sp>
+        <p:nvSpPr>
+          <p:cNvPr id="20" name="Text 17"/>
+          <p:cNvSpPr/>
+          <p:nvPr/>
+        </p:nvSpPr>
+        <p:spPr>
+          <a:xfrm>
+            <a:off x="5086990" y="3410712"/>
+            <a:ext cx="2017715" cy="274320"/>
+          </a:xfrm>
+          <a:prstGeom prst="rect">
+            <a:avLst/>
+          </a:prstGeom>
+          <a:noFill/>
+          <a:ln/>
+        </p:spPr>
+        <p:txBody>
+          <a:bodyPr wrap="square" rtlCol="0" anchor="ctr"/>
+          <a:lstStyle/>
+          <a:p>
+            <a:pPr algn="ctr" indent="0" marL="0">
+              <a:buNone/>
+            </a:pPr>
+            <a:r>
+              <a:rPr lang="en-US" sz="1000" dirty="0">
+                <a:solidFill>
+                  <a:srgbClr val="4A463D"/>
+                </a:solidFill>
+                <a:latin typeface="Pretendard" pitchFamily="34" charset="0"/>
+                <a:ea typeface="Pretendard" pitchFamily="34" charset="-122"/>
+                <a:cs typeface="Pretendard" pitchFamily="34" charset="-120"/>
+              </a:rPr>
+              <a:t>제목은 곧 주장</a:t>
+            </a:r>
+            <a:endParaRPr lang="en-US" sz="1000" dirty="0"/>
+          </a:p>
+        </p:txBody>
+      </p:sp>
+      <p:sp>
+        <p:nvSpPr>
+          <p:cNvPr id="21" name="Shape 18"/>
+          <p:cNvSpPr/>
+          <p:nvPr/>
+        </p:nvSpPr>
+        <p:spPr>
+          <a:xfrm>
+            <a:off x="8067843" y="2441448"/>
+            <a:ext cx="457200" cy="457200"/>
+          </a:xfrm>
+          <a:prstGeom prst="ellipse">
+            <a:avLst/>
+          </a:prstGeom>
+          <a:solidFill>
+            <a:srgbClr val="FFFFFB"/>
+          </a:solidFill>
+          <a:ln w="19050">
+            <a:solidFill>
+              <a:srgbClr val="2F4B7C"/>
+            </a:solidFill>
+            <a:prstDash val="solid"/>
+          </a:ln>
+        </p:spPr>
+      </p:sp>
+      <p:sp>
+        <p:nvSpPr>
+          <p:cNvPr id="22" name="Text 19"/>
+          <p:cNvSpPr/>
+          <p:nvPr/>
+        </p:nvSpPr>
+        <p:spPr>
+          <a:xfrm>
+            <a:off x="7930683" y="2441448"/>
+            <a:ext cx="731520" cy="457200"/>
+          </a:xfrm>
+          <a:prstGeom prst="rect">
+            <a:avLst/>
+          </a:prstGeom>
+          <a:noFill/>
+          <a:ln/>
+        </p:spPr>
+        <p:txBody>
+          <a:bodyPr wrap="square" lIns="0" tIns="0" rIns="0" bIns="0" rtlCol="0" anchor="ctr"/>
+          <a:lstStyle/>
+          <a:p>
+            <a:pPr algn="ctr" indent="0" marL="0">
+              <a:buNone/>
+            </a:pPr>
+            <a:r>
+              <a:rPr lang="en-US" sz="1200" b="1" dirty="0">
+                <a:solidFill>
+                  <a:srgbClr val="2F4B7C"/>
+                </a:solidFill>
+                <a:latin typeface="Pretendard" pitchFamily="34" charset="0"/>
+                <a:ea typeface="Pretendard" pitchFamily="34" charset="-122"/>
+                <a:cs typeface="Pretendard" pitchFamily="34" charset="-120"/>
+              </a:rPr>
+              <a:t>04</a:t>
+            </a:r>
+            <a:endParaRPr lang="en-US" sz="1200" dirty="0"/>
+          </a:p>
+        </p:txBody>
+      </p:sp>
+      <p:sp>
+        <p:nvSpPr>
+          <p:cNvPr id="23" name="Text 20"/>
+          <p:cNvSpPr/>
+          <p:nvPr/>
+        </p:nvSpPr>
+        <p:spPr>
+          <a:xfrm>
+            <a:off x="7287585" y="3099816"/>
+            <a:ext cx="2017715" cy="292608"/>
+          </a:xfrm>
+          <a:prstGeom prst="rect">
+            <a:avLst/>
+          </a:prstGeom>
+          <a:noFill/>
+          <a:ln/>
+        </p:spPr>
+        <p:txBody>
+          <a:bodyPr wrap="square" rtlCol="0" anchor="ctr"/>
+          <a:lstStyle/>
+          <a:p>
+            <a:pPr algn="ctr" indent="0" marL="0">
+              <a:buNone/>
+            </a:pPr>
+            <a:r>
+              <a:rPr lang="en-US" sz="1550" b="1" dirty="0">
+                <a:solidFill>
+                  <a:srgbClr val="15130F"/>
+                </a:solidFill>
+                <a:latin typeface="Pretendard" pitchFamily="34" charset="0"/>
+                <a:ea typeface="Pretendard" pitchFamily="34" charset="-122"/>
+                <a:cs typeface="Pretendard" pitchFamily="34" charset="-120"/>
+              </a:rPr>
+              <a:t>디자인</a:t>
+            </a:r>
+            <a:endParaRPr lang="en-US" sz="1550" dirty="0"/>
+          </a:p>
+        </p:txBody>
+      </p:sp>
+      <p:sp>
+        <p:nvSpPr>
+          <p:cNvPr id="24" name="Text 21"/>
+          <p:cNvSpPr/>
+          <p:nvPr/>
+        </p:nvSpPr>
+        <p:spPr>
+          <a:xfrm>
+            <a:off x="7287585" y="3410712"/>
+            <a:ext cx="2017715" cy="274320"/>
+          </a:xfrm>
+          <a:prstGeom prst="rect">
+            <a:avLst/>
+          </a:prstGeom>
+          <a:noFill/>
+          <a:ln/>
+        </p:spPr>
+        <p:txBody>
+          <a:bodyPr wrap="square" rtlCol="0" anchor="ctr"/>
+          <a:lstStyle/>
+          <a:p>
+            <a:pPr algn="ctr" indent="0" marL="0">
+              <a:buNone/>
+            </a:pPr>
+            <a:r>
+              <a:rPr lang="en-US" sz="1000" dirty="0">
+                <a:solidFill>
+                  <a:srgbClr val="4A463D"/>
+                </a:solidFill>
+                <a:latin typeface="Pretendard" pitchFamily="34" charset="0"/>
+                <a:ea typeface="Pretendard" pitchFamily="34" charset="-122"/>
+                <a:cs typeface="Pretendard" pitchFamily="34" charset="-120"/>
+              </a:rPr>
+              <a:t>그다음이 시각</a:t>
+            </a:r>
+            <a:endParaRPr lang="en-US" sz="1000" dirty="0"/>
+          </a:p>
+        </p:txBody>
+      </p:sp>
+      <p:sp>
+        <p:nvSpPr>
+          <p:cNvPr id="25" name="Shape 22"/>
+          <p:cNvSpPr/>
+          <p:nvPr/>
+        </p:nvSpPr>
+        <p:spPr>
+          <a:xfrm>
+            <a:off x="10268438" y="2441448"/>
+            <a:ext cx="457200" cy="457200"/>
+          </a:xfrm>
+          <a:prstGeom prst="ellipse">
+            <a:avLst/>
+          </a:prstGeom>
+          <a:solidFill>
+            <a:srgbClr val="FFFFFB"/>
+          </a:solidFill>
+          <a:ln w="19050">
+            <a:solidFill>
+              <a:srgbClr val="2F4B7C"/>
+            </a:solidFill>
+            <a:prstDash val="solid"/>
+          </a:ln>
+        </p:spPr>
+      </p:sp>
+      <p:sp>
+        <p:nvSpPr>
+          <p:cNvPr id="26" name="Text 23"/>
+          <p:cNvSpPr/>
+          <p:nvPr/>
+        </p:nvSpPr>
+        <p:spPr>
+          <a:xfrm>
+            <a:off x="10131278" y="2441448"/>
+            <a:ext cx="731520" cy="457200"/>
+          </a:xfrm>
+          <a:prstGeom prst="rect">
+            <a:avLst/>
+          </a:prstGeom>
+          <a:noFill/>
+          <a:ln/>
+        </p:spPr>
+        <p:txBody>
+          <a:bodyPr wrap="square" lIns="0" tIns="0" rIns="0" bIns="0" rtlCol="0" anchor="ctr"/>
+          <a:lstStyle/>
+          <a:p>
+            <a:pPr algn="ctr" indent="0" marL="0">
+              <a:buNone/>
+            </a:pPr>
+            <a:r>
+              <a:rPr lang="en-US" sz="1200" b="1" dirty="0">
+                <a:solidFill>
+                  <a:srgbClr val="2F4B7C"/>
+                </a:solidFill>
+                <a:latin typeface="Pretendard" pitchFamily="34" charset="0"/>
+                <a:ea typeface="Pretendard" pitchFamily="34" charset="-122"/>
+                <a:cs typeface="Pretendard" pitchFamily="34" charset="-120"/>
+              </a:rPr>
+              <a:t>05</a:t>
+            </a:r>
+            <a:endParaRPr lang="en-US" sz="1200" dirty="0"/>
+          </a:p>
+        </p:txBody>
+      </p:sp>
+      <p:sp>
+        <p:nvSpPr>
+          <p:cNvPr id="27" name="Text 24"/>
+          <p:cNvSpPr/>
+          <p:nvPr/>
+        </p:nvSpPr>
+        <p:spPr>
+          <a:xfrm>
+            <a:off x="9488180" y="3099816"/>
+            <a:ext cx="2017715" cy="292608"/>
+          </a:xfrm>
+          <a:prstGeom prst="rect">
+            <a:avLst/>
+          </a:prstGeom>
+          <a:noFill/>
+          <a:ln/>
+        </p:spPr>
+        <p:txBody>
+          <a:bodyPr wrap="square" rtlCol="0" anchor="ctr"/>
+          <a:lstStyle/>
+          <a:p>
+            <a:pPr algn="ctr" indent="0" marL="0">
+              <a:buNone/>
+            </a:pPr>
+            <a:r>
+              <a:rPr lang="en-US" sz="1550" b="1" dirty="0">
+                <a:solidFill>
+                  <a:srgbClr val="15130F"/>
+                </a:solidFill>
+                <a:latin typeface="Pretendard" pitchFamily="34" charset="0"/>
+                <a:ea typeface="Pretendard" pitchFamily="34" charset="-122"/>
+                <a:cs typeface="Pretendard" pitchFamily="34" charset="-120"/>
+              </a:rPr>
+              <a:t>내보내기</a:t>
+            </a:r>
+            <a:endParaRPr lang="en-US" sz="1550" dirty="0"/>
+          </a:p>
+        </p:txBody>
+      </p:sp>
+      <p:sp>
+        <p:nvSpPr>
+          <p:cNvPr id="28" name="Text 25"/>
+          <p:cNvSpPr/>
+          <p:nvPr/>
+        </p:nvSpPr>
+        <p:spPr>
+          <a:xfrm>
+            <a:off x="9488180" y="3410712"/>
+            <a:ext cx="2017715" cy="274320"/>
+          </a:xfrm>
+          <a:prstGeom prst="rect">
+            <a:avLst/>
+          </a:prstGeom>
+          <a:noFill/>
+          <a:ln/>
+        </p:spPr>
+        <p:txBody>
+          <a:bodyPr wrap="square" rtlCol="0" anchor="ctr"/>
+          <a:lstStyle/>
+          <a:p>
+            <a:pPr algn="ctr" indent="0" marL="0">
+              <a:buNone/>
+            </a:pPr>
+            <a:r>
+              <a:rPr lang="en-US" sz="1000" dirty="0">
+                <a:solidFill>
+                  <a:srgbClr val="4A463D"/>
+                </a:solidFill>
+                <a:latin typeface="Pretendard" pitchFamily="34" charset="0"/>
+                <a:ea typeface="Pretendard" pitchFamily="34" charset="-122"/>
+                <a:cs typeface="Pretendard" pitchFamily="34" charset="-120"/>
+              </a:rPr>
+              <a:t>최종 형식 확인</a:t>
+            </a:r>
+            <a:endParaRPr lang="en-US" sz="1000" dirty="0"/>
+          </a:p>
+        </p:txBody>
+      </p:sp>
+      <p:sp>
+        <p:nvSpPr>
+          <p:cNvPr id="29" name="Shape 26"/>
+          <p:cNvSpPr/>
+          <p:nvPr/>
+        </p:nvSpPr>
+        <p:spPr>
+          <a:xfrm>
+            <a:off x="685800" y="5029200"/>
+            <a:ext cx="10820095" cy="0"/>
+          </a:xfrm>
+          <a:prstGeom prst="line">
+            <a:avLst/>
+          </a:prstGeom>
+          <a:noFill/>
           <a:ln w="12700">
             <a:solidFill>
               <a:srgbClr val="D8D0C1"/>
             </a:solidFill>
             <a:prstDash val="solid"/>
           </a:ln>
-          <a:effectLst>
-            <a:outerShdw sx="100000" sy="100000" kx="0" ky="0" algn="bl" rotWithShape="0" blurRad="152400" dist="25400" dir="5400000">
-              <a:srgbClr val="8A8272">
-                <a:alpha val="22000"/>
-              </a:srgbClr>
-            </a:outerShdw>
-          </a:effectLst>
-        </p:spPr>
-      </p:sp>
-      <p:sp>
-        <p:nvSpPr>
-          <p:cNvPr id="14" name="Text 11"/>
-          <p:cNvSpPr/>
-          <p:nvPr/>
-        </p:nvSpPr>
-        <p:spPr>
-          <a:xfrm>
-            <a:off x="886968" y="2729484"/>
-            <a:ext cx="1615379" cy="219456"/>
-          </a:xfrm>
-          <a:prstGeom prst="rect">
-            <a:avLst/>
-          </a:prstGeom>
-          <a:noFill/>
-          <a:ln/>
-        </p:spPr>
-        <p:txBody>
-          <a:bodyPr wrap="square" rtlCol="0" anchor="ctr"/>
-          <a:lstStyle/>
-          <a:p>
-            <a:pPr indent="0" marL="0">
-              <a:buNone/>
-            </a:pPr>
-            <a:r>
-              <a:rPr lang="en-US" sz="950" b="1" spc="100" kern="0" dirty="0">
-                <a:solidFill>
-                  <a:srgbClr val="2F4B7C"/>
-                </a:solidFill>
-                <a:latin typeface="Pretendard" pitchFamily="34" charset="0"/>
-                <a:ea typeface="Pretendard" pitchFamily="34" charset="-122"/>
-                <a:cs typeface="Pretendard" pitchFamily="34" charset="-120"/>
-              </a:rPr>
-              <a:t>단계 ①</a:t>
-            </a:r>
-            <a:endParaRPr lang="en-US" sz="950" dirty="0"/>
-          </a:p>
-        </p:txBody>
-      </p:sp>
-      <p:sp>
-        <p:nvSpPr>
-          <p:cNvPr id="15" name="Text 12"/>
-          <p:cNvSpPr/>
-          <p:nvPr/>
-        </p:nvSpPr>
-        <p:spPr>
-          <a:xfrm>
-            <a:off x="886968" y="2985516"/>
-            <a:ext cx="1615379" cy="274320"/>
-          </a:xfrm>
-          <a:prstGeom prst="rect">
-            <a:avLst/>
-          </a:prstGeom>
-          <a:noFill/>
-          <a:ln/>
-        </p:spPr>
-        <p:txBody>
-          <a:bodyPr wrap="square" rtlCol="0" anchor="ctr"/>
-          <a:lstStyle/>
-          <a:p>
-            <a:pPr indent="0" marL="0">
-              <a:buNone/>
-            </a:pPr>
-            <a:r>
-              <a:rPr lang="en-US" sz="1500" b="1" dirty="0">
-                <a:solidFill>
-                  <a:srgbClr val="15130F"/>
-                </a:solidFill>
-                <a:latin typeface="Pretendard" pitchFamily="34" charset="0"/>
-                <a:ea typeface="Pretendard" pitchFamily="34" charset="-122"/>
-                <a:cs typeface="Pretendard" pitchFamily="34" charset="-120"/>
-              </a:rPr>
-              <a:t>자료</a:t>
-            </a:r>
-            <a:endParaRPr lang="en-US" sz="1500" dirty="0"/>
-          </a:p>
-        </p:txBody>
-      </p:sp>
-      <p:sp>
-        <p:nvSpPr>
-          <p:cNvPr id="16" name="Text 13"/>
-          <p:cNvSpPr/>
-          <p:nvPr/>
-        </p:nvSpPr>
-        <p:spPr>
-          <a:xfrm>
-            <a:off x="886968" y="3278124"/>
-            <a:ext cx="1615379" cy="640080"/>
-          </a:xfrm>
-          <a:prstGeom prst="rect">
-            <a:avLst/>
-          </a:prstGeom>
-          <a:noFill/>
-          <a:ln/>
-        </p:spPr>
-        <p:txBody>
-          <a:bodyPr wrap="square" rtlCol="0" anchor="t"/>
-          <a:lstStyle/>
-          <a:p>
-            <a:pPr indent="0" marL="0">
-              <a:buNone/>
-            </a:pPr>
-            <a:r>
-              <a:rPr lang="en-US" sz="950" dirty="0">
-                <a:solidFill>
-                  <a:srgbClr val="4A463D"/>
-                </a:solidFill>
-                <a:latin typeface="Pretendard" pitchFamily="34" charset="0"/>
-                <a:ea typeface="Pretendard" pitchFamily="34" charset="-122"/>
-                <a:cs typeface="Pretendard" pitchFamily="34" charset="-120"/>
-              </a:rPr>
-              <a:t>출처 있는 주장만</a:t>
-            </a:r>
-            <a:endParaRPr lang="en-US" sz="950" dirty="0"/>
-          </a:p>
-        </p:txBody>
-      </p:sp>
-      <p:sp>
-        <p:nvSpPr>
-          <p:cNvPr id="17" name="Shape 14"/>
-          <p:cNvSpPr/>
-          <p:nvPr/>
-        </p:nvSpPr>
-        <p:spPr>
-          <a:xfrm>
-            <a:off x="2886395" y="2583180"/>
-            <a:ext cx="2017715" cy="1463040"/>
+        </p:spPr>
+      </p:sp>
+      <p:sp>
+        <p:nvSpPr>
+          <p:cNvPr id="30" name="Shape 27"/>
+          <p:cNvSpPr/>
+          <p:nvPr/>
+        </p:nvSpPr>
+        <p:spPr>
+          <a:xfrm>
+            <a:off x="685800" y="5340096"/>
+            <a:ext cx="384048" cy="384048"/>
           </a:xfrm>
           <a:prstGeom prst="roundRect">
             <a:avLst>
-              <a:gd name="adj" fmla="val 5000"/>
-            </a:avLst>
-          </a:prstGeom>
-          <a:solidFill>
-            <a:srgbClr val="FFFFFB"/>
-          </a:solidFill>
-          <a:ln w="12700">
-            <a:solidFill>
-              <a:srgbClr val="D8D0C1"/>
-            </a:solidFill>
-            <a:prstDash val="solid"/>
-          </a:ln>
-          <a:effectLst>
-            <a:outerShdw sx="100000" sy="100000" kx="0" ky="0" algn="bl" rotWithShape="0" blurRad="152400" dist="25400" dir="5400000">
-              <a:srgbClr val="8A8272">
-                <a:alpha val="22000"/>
-              </a:srgbClr>
-            </a:outerShdw>
-          </a:effectLst>
-        </p:spPr>
-      </p:sp>
-      <p:sp>
-        <p:nvSpPr>
-          <p:cNvPr id="18" name="Text 15"/>
-          <p:cNvSpPr/>
-          <p:nvPr/>
-        </p:nvSpPr>
-        <p:spPr>
-          <a:xfrm>
-            <a:off x="3087563" y="2729484"/>
-            <a:ext cx="1615379" cy="219456"/>
-          </a:xfrm>
-          <a:prstGeom prst="rect">
-            <a:avLst/>
-          </a:prstGeom>
-          <a:noFill/>
-          <a:ln/>
-        </p:spPr>
-        <p:txBody>
-          <a:bodyPr wrap="square" rtlCol="0" anchor="ctr"/>
-          <a:lstStyle/>
-          <a:p>
-            <a:pPr indent="0" marL="0">
-              <a:buNone/>
-            </a:pPr>
-            <a:r>
-              <a:rPr lang="en-US" sz="950" b="1" spc="100" kern="0" dirty="0">
-                <a:solidFill>
-                  <a:srgbClr val="2F4B7C"/>
-                </a:solidFill>
-                <a:latin typeface="Pretendard" pitchFamily="34" charset="0"/>
-                <a:ea typeface="Pretendard" pitchFamily="34" charset="-122"/>
-                <a:cs typeface="Pretendard" pitchFamily="34" charset="-120"/>
-              </a:rPr>
-              <a:t>단계 ②</a:t>
-            </a:r>
-            <a:endParaRPr lang="en-US" sz="950" dirty="0"/>
-          </a:p>
-        </p:txBody>
-      </p:sp>
-      <p:sp>
-        <p:nvSpPr>
-          <p:cNvPr id="19" name="Text 16"/>
-          <p:cNvSpPr/>
-          <p:nvPr/>
-        </p:nvSpPr>
-        <p:spPr>
-          <a:xfrm>
-            <a:off x="3087563" y="2985516"/>
-            <a:ext cx="1615379" cy="274320"/>
-          </a:xfrm>
-          <a:prstGeom prst="rect">
-            <a:avLst/>
-          </a:prstGeom>
-          <a:noFill/>
-          <a:ln/>
-        </p:spPr>
-        <p:txBody>
-          <a:bodyPr wrap="square" rtlCol="0" anchor="ctr"/>
-          <a:lstStyle/>
-          <a:p>
-            <a:pPr indent="0" marL="0">
-              <a:buNone/>
-            </a:pPr>
-            <a:r>
-              <a:rPr lang="en-US" sz="1500" b="1" dirty="0">
-                <a:solidFill>
-                  <a:srgbClr val="15130F"/>
-                </a:solidFill>
-                <a:latin typeface="Pretendard" pitchFamily="34" charset="0"/>
-                <a:ea typeface="Pretendard" pitchFamily="34" charset="-122"/>
-                <a:cs typeface="Pretendard" pitchFamily="34" charset="-120"/>
-              </a:rPr>
-              <a:t>구성안</a:t>
-            </a:r>
-            <a:endParaRPr lang="en-US" sz="1500" dirty="0"/>
-          </a:p>
-        </p:txBody>
-      </p:sp>
-      <p:sp>
-        <p:nvSpPr>
-          <p:cNvPr id="20" name="Text 17"/>
-          <p:cNvSpPr/>
-          <p:nvPr/>
-        </p:nvSpPr>
-        <p:spPr>
-          <a:xfrm>
-            <a:off x="3087563" y="3278124"/>
-            <a:ext cx="1615379" cy="640080"/>
-          </a:xfrm>
-          <a:prstGeom prst="rect">
-            <a:avLst/>
-          </a:prstGeom>
-          <a:noFill/>
-          <a:ln/>
-        </p:spPr>
-        <p:txBody>
-          <a:bodyPr wrap="square" rtlCol="0" anchor="t"/>
-          <a:lstStyle/>
-          <a:p>
-            <a:pPr indent="0" marL="0">
-              <a:buNone/>
-            </a:pPr>
-            <a:r>
-              <a:rPr lang="en-US" sz="950" dirty="0">
-                <a:solidFill>
-                  <a:srgbClr val="4A463D"/>
-                </a:solidFill>
-                <a:latin typeface="Pretendard" pitchFamily="34" charset="0"/>
-                <a:ea typeface="Pretendard" pitchFamily="34" charset="-122"/>
-                <a:cs typeface="Pretendard" pitchFamily="34" charset="-120"/>
-              </a:rPr>
-              <a:t>장별 메시지 1개</a:t>
-            </a:r>
-            <a:endParaRPr lang="en-US" sz="950" dirty="0"/>
-          </a:p>
-        </p:txBody>
-      </p:sp>
-      <p:sp>
-        <p:nvSpPr>
-          <p:cNvPr id="21" name="Shape 18"/>
-          <p:cNvSpPr/>
-          <p:nvPr/>
-        </p:nvSpPr>
-        <p:spPr>
-          <a:xfrm>
-            <a:off x="5086990" y="2583180"/>
-            <a:ext cx="2017715" cy="1463040"/>
-          </a:xfrm>
-          <a:prstGeom prst="roundRect">
-            <a:avLst>
-              <a:gd name="adj" fmla="val 5000"/>
-            </a:avLst>
-          </a:prstGeom>
-          <a:solidFill>
-            <a:srgbClr val="FFFFFB"/>
-          </a:solidFill>
-          <a:ln w="12700">
-            <a:solidFill>
-              <a:srgbClr val="D8D0C1"/>
-            </a:solidFill>
-            <a:prstDash val="solid"/>
-          </a:ln>
-          <a:effectLst>
-            <a:outerShdw sx="100000" sy="100000" kx="0" ky="0" algn="bl" rotWithShape="0" blurRad="152400" dist="25400" dir="5400000">
-              <a:srgbClr val="8A8272">
-                <a:alpha val="22000"/>
-              </a:srgbClr>
-            </a:outerShdw>
-          </a:effectLst>
-        </p:spPr>
-      </p:sp>
-      <p:sp>
-        <p:nvSpPr>
-          <p:cNvPr id="22" name="Text 19"/>
-          <p:cNvSpPr/>
-          <p:nvPr/>
-        </p:nvSpPr>
-        <p:spPr>
-          <a:xfrm>
-            <a:off x="5288158" y="2729484"/>
-            <a:ext cx="1615379" cy="219456"/>
-          </a:xfrm>
-          <a:prstGeom prst="rect">
-            <a:avLst/>
-          </a:prstGeom>
-          <a:noFill/>
-          <a:ln/>
-        </p:spPr>
-        <p:txBody>
-          <a:bodyPr wrap="square" rtlCol="0" anchor="ctr"/>
-          <a:lstStyle/>
-          <a:p>
-            <a:pPr indent="0" marL="0">
-              <a:buNone/>
-            </a:pPr>
-            <a:r>
-              <a:rPr lang="en-US" sz="950" b="1" spc="100" kern="0" dirty="0">
-                <a:solidFill>
-                  <a:srgbClr val="2F4B7C"/>
-                </a:solidFill>
-                <a:latin typeface="Pretendard" pitchFamily="34" charset="0"/>
-                <a:ea typeface="Pretendard" pitchFamily="34" charset="-122"/>
-                <a:cs typeface="Pretendard" pitchFamily="34" charset="-120"/>
-              </a:rPr>
-              <a:t>단계 ③</a:t>
-            </a:r>
-            <a:endParaRPr lang="en-US" sz="950" dirty="0"/>
-          </a:p>
-        </p:txBody>
-      </p:sp>
-      <p:sp>
-        <p:nvSpPr>
-          <p:cNvPr id="23" name="Text 20"/>
-          <p:cNvSpPr/>
-          <p:nvPr/>
-        </p:nvSpPr>
-        <p:spPr>
-          <a:xfrm>
-            <a:off x="5288158" y="2985516"/>
-            <a:ext cx="1615379" cy="274320"/>
-          </a:xfrm>
-          <a:prstGeom prst="rect">
-            <a:avLst/>
-          </a:prstGeom>
-          <a:noFill/>
-          <a:ln/>
-        </p:spPr>
-        <p:txBody>
-          <a:bodyPr wrap="square" rtlCol="0" anchor="ctr"/>
-          <a:lstStyle/>
-          <a:p>
-            <a:pPr indent="0" marL="0">
-              <a:buNone/>
-            </a:pPr>
-            <a:r>
-              <a:rPr lang="en-US" sz="1500" b="1" dirty="0">
-                <a:solidFill>
-                  <a:srgbClr val="15130F"/>
-                </a:solidFill>
-                <a:latin typeface="Pretendard" pitchFamily="34" charset="0"/>
-                <a:ea typeface="Pretendard" pitchFamily="34" charset="-122"/>
-                <a:cs typeface="Pretendard" pitchFamily="34" charset="-120"/>
-              </a:rPr>
-              <a:t>문구</a:t>
-            </a:r>
-            <a:endParaRPr lang="en-US" sz="1500" dirty="0"/>
-          </a:p>
-        </p:txBody>
-      </p:sp>
-      <p:sp>
-        <p:nvSpPr>
-          <p:cNvPr id="24" name="Text 21"/>
-          <p:cNvSpPr/>
-          <p:nvPr/>
-        </p:nvSpPr>
-        <p:spPr>
-          <a:xfrm>
-            <a:off x="5288158" y="3278124"/>
-            <a:ext cx="1615379" cy="640080"/>
-          </a:xfrm>
-          <a:prstGeom prst="rect">
-            <a:avLst/>
-          </a:prstGeom>
-          <a:noFill/>
-          <a:ln/>
-        </p:spPr>
-        <p:txBody>
-          <a:bodyPr wrap="square" rtlCol="0" anchor="t"/>
-          <a:lstStyle/>
-          <a:p>
-            <a:pPr indent="0" marL="0">
-              <a:buNone/>
-            </a:pPr>
-            <a:r>
-              <a:rPr lang="en-US" sz="950" dirty="0">
-                <a:solidFill>
-                  <a:srgbClr val="4A463D"/>
-                </a:solidFill>
-                <a:latin typeface="Pretendard" pitchFamily="34" charset="0"/>
-                <a:ea typeface="Pretendard" pitchFamily="34" charset="-122"/>
-                <a:cs typeface="Pretendard" pitchFamily="34" charset="-120"/>
-              </a:rPr>
-              <a:t>제목은 곧 주장</a:t>
-            </a:r>
-            <a:endParaRPr lang="en-US" sz="950" dirty="0"/>
-          </a:p>
-        </p:txBody>
-      </p:sp>
-      <p:sp>
-        <p:nvSpPr>
-          <p:cNvPr id="25" name="Shape 22"/>
-          <p:cNvSpPr/>
-          <p:nvPr/>
-        </p:nvSpPr>
-        <p:spPr>
-          <a:xfrm>
-            <a:off x="7287585" y="2583180"/>
-            <a:ext cx="2017715" cy="1463040"/>
-          </a:xfrm>
-          <a:prstGeom prst="roundRect">
-            <a:avLst>
-              <a:gd name="adj" fmla="val 5000"/>
-            </a:avLst>
-          </a:prstGeom>
-          <a:solidFill>
-            <a:srgbClr val="FFFFFB"/>
-          </a:solidFill>
-          <a:ln w="12700">
-            <a:solidFill>
-              <a:srgbClr val="D8D0C1"/>
-            </a:solidFill>
-            <a:prstDash val="solid"/>
-          </a:ln>
-          <a:effectLst>
-            <a:outerShdw sx="100000" sy="100000" kx="0" ky="0" algn="bl" rotWithShape="0" blurRad="152400" dist="25400" dir="5400000">
-              <a:srgbClr val="8A8272">
-                <a:alpha val="22000"/>
-              </a:srgbClr>
-            </a:outerShdw>
-          </a:effectLst>
-        </p:spPr>
-      </p:sp>
-      <p:sp>
-        <p:nvSpPr>
-          <p:cNvPr id="26" name="Text 23"/>
-          <p:cNvSpPr/>
-          <p:nvPr/>
-        </p:nvSpPr>
-        <p:spPr>
-          <a:xfrm>
-            <a:off x="7488753" y="2729484"/>
-            <a:ext cx="1615379" cy="219456"/>
-          </a:xfrm>
-          <a:prstGeom prst="rect">
-            <a:avLst/>
-          </a:prstGeom>
-          <a:noFill/>
-          <a:ln/>
-        </p:spPr>
-        <p:txBody>
-          <a:bodyPr wrap="square" rtlCol="0" anchor="ctr"/>
-          <a:lstStyle/>
-          <a:p>
-            <a:pPr indent="0" marL="0">
-              <a:buNone/>
-            </a:pPr>
-            <a:r>
-              <a:rPr lang="en-US" sz="950" b="1" spc="100" kern="0" dirty="0">
-                <a:solidFill>
-                  <a:srgbClr val="2F4B7C"/>
-                </a:solidFill>
-                <a:latin typeface="Pretendard" pitchFamily="34" charset="0"/>
-                <a:ea typeface="Pretendard" pitchFamily="34" charset="-122"/>
-                <a:cs typeface="Pretendard" pitchFamily="34" charset="-120"/>
-              </a:rPr>
-              <a:t>단계 ④</a:t>
-            </a:r>
-            <a:endParaRPr lang="en-US" sz="950" dirty="0"/>
-          </a:p>
-        </p:txBody>
-      </p:sp>
-      <p:sp>
-        <p:nvSpPr>
-          <p:cNvPr id="27" name="Text 24"/>
-          <p:cNvSpPr/>
-          <p:nvPr/>
-        </p:nvSpPr>
-        <p:spPr>
-          <a:xfrm>
-            <a:off x="7488753" y="2985516"/>
-            <a:ext cx="1615379" cy="274320"/>
-          </a:xfrm>
-          <a:prstGeom prst="rect">
-            <a:avLst/>
-          </a:prstGeom>
-          <a:noFill/>
-          <a:ln/>
-        </p:spPr>
-        <p:txBody>
-          <a:bodyPr wrap="square" rtlCol="0" anchor="ctr"/>
-          <a:lstStyle/>
-          <a:p>
-            <a:pPr indent="0" marL="0">
-              <a:buNone/>
-            </a:pPr>
-            <a:r>
-              <a:rPr lang="en-US" sz="1500" b="1" dirty="0">
-                <a:solidFill>
-                  <a:srgbClr val="15130F"/>
-                </a:solidFill>
-                <a:latin typeface="Pretendard" pitchFamily="34" charset="0"/>
-                <a:ea typeface="Pretendard" pitchFamily="34" charset="-122"/>
-                <a:cs typeface="Pretendard" pitchFamily="34" charset="-120"/>
-              </a:rPr>
-              <a:t>디자인</a:t>
-            </a:r>
-            <a:endParaRPr lang="en-US" sz="1500" dirty="0"/>
-          </a:p>
-        </p:txBody>
-      </p:sp>
-      <p:sp>
-        <p:nvSpPr>
-          <p:cNvPr id="28" name="Text 25"/>
-          <p:cNvSpPr/>
-          <p:nvPr/>
-        </p:nvSpPr>
-        <p:spPr>
-          <a:xfrm>
-            <a:off x="7488753" y="3278124"/>
-            <a:ext cx="1615379" cy="640080"/>
-          </a:xfrm>
-          <a:prstGeom prst="rect">
-            <a:avLst/>
-          </a:prstGeom>
-          <a:noFill/>
-          <a:ln/>
-        </p:spPr>
-        <p:txBody>
-          <a:bodyPr wrap="square" rtlCol="0" anchor="t"/>
-          <a:lstStyle/>
-          <a:p>
-            <a:pPr indent="0" marL="0">
-              <a:buNone/>
-            </a:pPr>
-            <a:r>
-              <a:rPr lang="en-US" sz="950" dirty="0">
-                <a:solidFill>
-                  <a:srgbClr val="4A463D"/>
-                </a:solidFill>
-                <a:latin typeface="Pretendard" pitchFamily="34" charset="0"/>
-                <a:ea typeface="Pretendard" pitchFamily="34" charset="-122"/>
-                <a:cs typeface="Pretendard" pitchFamily="34" charset="-120"/>
-              </a:rPr>
-              <a:t>그다음이 시각</a:t>
-            </a:r>
-            <a:endParaRPr lang="en-US" sz="950" dirty="0"/>
-          </a:p>
-        </p:txBody>
-      </p:sp>
-      <p:sp>
-        <p:nvSpPr>
-          <p:cNvPr id="29" name="Shape 26"/>
-          <p:cNvSpPr/>
-          <p:nvPr/>
-        </p:nvSpPr>
-        <p:spPr>
-          <a:xfrm>
-            <a:off x="9488180" y="2583180"/>
-            <a:ext cx="2017715" cy="1463040"/>
-          </a:xfrm>
-          <a:prstGeom prst="roundRect">
-            <a:avLst>
-              <a:gd name="adj" fmla="val 5000"/>
-            </a:avLst>
-          </a:prstGeom>
-          <a:solidFill>
-            <a:srgbClr val="FFFFFB"/>
-          </a:solidFill>
-          <a:ln w="12700">
-            <a:solidFill>
-              <a:srgbClr val="D8D0C1"/>
-            </a:solidFill>
-            <a:prstDash val="solid"/>
-          </a:ln>
-          <a:effectLst>
-            <a:outerShdw sx="100000" sy="100000" kx="0" ky="0" algn="bl" rotWithShape="0" blurRad="152400" dist="25400" dir="5400000">
-              <a:srgbClr val="8A8272">
-                <a:alpha val="22000"/>
-              </a:srgbClr>
-            </a:outerShdw>
-          </a:effectLst>
-        </p:spPr>
-      </p:sp>
-      <p:sp>
-        <p:nvSpPr>
-          <p:cNvPr id="30" name="Text 27"/>
-          <p:cNvSpPr/>
-          <p:nvPr/>
-        </p:nvSpPr>
-        <p:spPr>
-          <a:xfrm>
-            <a:off x="9689348" y="2729484"/>
-            <a:ext cx="1615379" cy="219456"/>
-          </a:xfrm>
-          <a:prstGeom prst="rect">
-            <a:avLst/>
-          </a:prstGeom>
-          <a:noFill/>
-          <a:ln/>
-        </p:spPr>
-        <p:txBody>
-          <a:bodyPr wrap="square" rtlCol="0" anchor="ctr"/>
-          <a:lstStyle/>
-          <a:p>
-            <a:pPr indent="0" marL="0">
-              <a:buNone/>
-            </a:pPr>
-            <a:r>
-              <a:rPr lang="en-US" sz="950" b="1" spc="100" kern="0" dirty="0">
-                <a:solidFill>
-                  <a:srgbClr val="2F4B7C"/>
-                </a:solidFill>
-                <a:latin typeface="Pretendard" pitchFamily="34" charset="0"/>
-                <a:ea typeface="Pretendard" pitchFamily="34" charset="-122"/>
-                <a:cs typeface="Pretendard" pitchFamily="34" charset="-120"/>
-              </a:rPr>
-              <a:t>단계 ⑤</a:t>
-            </a:r>
-            <a:endParaRPr lang="en-US" sz="950" dirty="0"/>
-          </a:p>
-        </p:txBody>
-      </p:sp>
-      <p:sp>
-        <p:nvSpPr>
-          <p:cNvPr id="31" name="Text 28"/>
-          <p:cNvSpPr/>
-          <p:nvPr/>
-        </p:nvSpPr>
-        <p:spPr>
-          <a:xfrm>
-            <a:off x="9689348" y="2985516"/>
-            <a:ext cx="1615379" cy="274320"/>
-          </a:xfrm>
-          <a:prstGeom prst="rect">
-            <a:avLst/>
-          </a:prstGeom>
-          <a:noFill/>
-          <a:ln/>
-        </p:spPr>
-        <p:txBody>
-          <a:bodyPr wrap="square" rtlCol="0" anchor="ctr"/>
-          <a:lstStyle/>
-          <a:p>
-            <a:pPr indent="0" marL="0">
-              <a:buNone/>
-            </a:pPr>
-            <a:r>
-              <a:rPr lang="en-US" sz="1500" b="1" dirty="0">
-                <a:solidFill>
-                  <a:srgbClr val="15130F"/>
-                </a:solidFill>
-                <a:latin typeface="Pretendard" pitchFamily="34" charset="0"/>
-                <a:ea typeface="Pretendard" pitchFamily="34" charset="-122"/>
-                <a:cs typeface="Pretendard" pitchFamily="34" charset="-120"/>
-              </a:rPr>
-              <a:t>내보내기</a:t>
-            </a:r>
-            <a:endParaRPr lang="en-US" sz="1500" dirty="0"/>
-          </a:p>
-        </p:txBody>
-      </p:sp>
-      <p:sp>
-        <p:nvSpPr>
-          <p:cNvPr id="32" name="Text 29"/>
-          <p:cNvSpPr/>
-          <p:nvPr/>
-        </p:nvSpPr>
-        <p:spPr>
-          <a:xfrm>
-            <a:off x="9689348" y="3278124"/>
-            <a:ext cx="1615379" cy="640080"/>
-          </a:xfrm>
-          <a:prstGeom prst="rect">
-            <a:avLst/>
-          </a:prstGeom>
-          <a:noFill/>
-          <a:ln/>
-        </p:spPr>
-        <p:txBody>
-          <a:bodyPr wrap="square" rtlCol="0" anchor="t"/>
-          <a:lstStyle/>
-          <a:p>
-            <a:pPr indent="0" marL="0">
-              <a:buNone/>
-            </a:pPr>
-            <a:r>
-              <a:rPr lang="en-US" sz="950" dirty="0">
-                <a:solidFill>
-                  <a:srgbClr val="4A463D"/>
-                </a:solidFill>
-                <a:latin typeface="Pretendard" pitchFamily="34" charset="0"/>
-                <a:ea typeface="Pretendard" pitchFamily="34" charset="-122"/>
-                <a:cs typeface="Pretendard" pitchFamily="34" charset="-120"/>
-              </a:rPr>
-              <a:t>최종 형식 확인</a:t>
-            </a:r>
-            <a:endParaRPr lang="en-US" sz="950" dirty="0"/>
-          </a:p>
-        </p:txBody>
-      </p:sp>
-      <p:sp>
-        <p:nvSpPr>
-          <p:cNvPr id="33" name="Shape 30"/>
-          <p:cNvSpPr/>
-          <p:nvPr/>
-        </p:nvSpPr>
-        <p:spPr>
-          <a:xfrm>
-            <a:off x="685800" y="4320540"/>
-            <a:ext cx="5272888" cy="1325880"/>
-          </a:xfrm>
-          <a:prstGeom prst="roundRect">
-            <a:avLst>
-              <a:gd name="adj" fmla="val 5517"/>
-            </a:avLst>
-          </a:prstGeom>
-          <a:solidFill>
-            <a:srgbClr val="FFFFFB"/>
-          </a:solidFill>
-          <a:ln w="12700">
-            <a:solidFill>
-              <a:srgbClr val="D8D0C1"/>
-            </a:solidFill>
-            <a:prstDash val="solid"/>
-          </a:ln>
-          <a:effectLst>
-            <a:outerShdw sx="100000" sy="100000" kx="0" ky="0" algn="bl" rotWithShape="0" blurRad="152400" dist="25400" dir="5400000">
-              <a:srgbClr val="8A8272">
-                <a:alpha val="22000"/>
-              </a:srgbClr>
-            </a:outerShdw>
-          </a:effectLst>
-        </p:spPr>
-      </p:sp>
-      <p:sp>
-        <p:nvSpPr>
-          <p:cNvPr id="34" name="Shape 31"/>
-          <p:cNvSpPr/>
-          <p:nvPr/>
-        </p:nvSpPr>
-        <p:spPr>
-          <a:xfrm>
-            <a:off x="905256" y="4782312"/>
-            <a:ext cx="402336" cy="402336"/>
-          </a:xfrm>
-          <a:prstGeom prst="roundRect">
-            <a:avLst>
-              <a:gd name="adj" fmla="val 22727"/>
+              <a:gd name="adj" fmla="val 23810"/>
             </a:avLst>
           </a:prstGeom>
           <a:solidFill>
@@ -6813,14 +6051,14 @@
       </p:sp>
       <p:sp>
         <p:nvSpPr>
-          <p:cNvPr id="35" name="Text 32"/>
-          <p:cNvSpPr/>
-          <p:nvPr/>
-        </p:nvSpPr>
-        <p:spPr>
-          <a:xfrm>
-            <a:off x="905256" y="4782312"/>
-            <a:ext cx="402336" cy="402336"/>
+          <p:cNvPr id="31" name="Text 28"/>
+          <p:cNvSpPr/>
+          <p:nvPr/>
+        </p:nvSpPr>
+        <p:spPr>
+          <a:xfrm>
+            <a:off x="685800" y="5340096"/>
+            <a:ext cx="384048" cy="384048"/>
           </a:xfrm>
           <a:prstGeom prst="rect">
             <a:avLst/>
@@ -6836,7 +6074,7 @@
               <a:buNone/>
             </a:pPr>
             <a:r>
-              <a:rPr lang="en-US" sz="1300" b="1" dirty="0">
+              <a:rPr lang="en-US" sz="1250" b="1" dirty="0">
                 <a:solidFill>
                   <a:srgbClr val="2F4B7C"/>
                 </a:solidFill>
@@ -6846,20 +6084,20 @@
               </a:rPr>
               <a:t>✓</a:t>
             </a:r>
-            <a:endParaRPr lang="en-US" sz="1300" dirty="0"/>
-          </a:p>
-        </p:txBody>
-      </p:sp>
-      <p:sp>
-        <p:nvSpPr>
-          <p:cNvPr id="36" name="Text 33"/>
-          <p:cNvSpPr/>
-          <p:nvPr/>
-        </p:nvSpPr>
-        <p:spPr>
-          <a:xfrm>
-            <a:off x="1490472" y="4448556"/>
-            <a:ext cx="4248760" cy="201168"/>
+            <a:endParaRPr lang="en-US" sz="1250" dirty="0"/>
+          </a:p>
+        </p:txBody>
+      </p:sp>
+      <p:sp>
+        <p:nvSpPr>
+          <p:cNvPr id="32" name="Text 29"/>
+          <p:cNvSpPr/>
+          <p:nvPr/>
+        </p:nvSpPr>
+        <p:spPr>
+          <a:xfrm>
+            <a:off x="1271016" y="5285232"/>
+            <a:ext cx="4550512" cy="201168"/>
           </a:xfrm>
           <a:prstGeom prst="rect">
             <a:avLst/>
@@ -6891,30 +6129,30 @@
       </p:sp>
       <p:sp>
         <p:nvSpPr>
-          <p:cNvPr id="37" name="Text 34"/>
-          <p:cNvSpPr/>
-          <p:nvPr/>
-        </p:nvSpPr>
-        <p:spPr>
-          <a:xfrm>
-            <a:off x="1490472" y="4649724"/>
-            <a:ext cx="4248760" cy="256032"/>
-          </a:xfrm>
-          <a:prstGeom prst="rect">
-            <a:avLst/>
-          </a:prstGeom>
-          <a:noFill/>
-          <a:ln/>
-        </p:spPr>
-        <p:txBody>
-          <a:bodyPr wrap="square" rtlCol="0" anchor="ctr"/>
-          <a:lstStyle/>
-          <a:p>
-            <a:pPr indent="0" marL="0">
-              <a:buNone/>
-            </a:pPr>
-            <a:r>
-              <a:rPr lang="en-US" sz="1300" b="1" dirty="0">
+          <p:cNvPr id="33" name="Text 30"/>
+          <p:cNvSpPr/>
+          <p:nvPr/>
+        </p:nvSpPr>
+        <p:spPr>
+          <a:xfrm>
+            <a:off x="1271016" y="5486400"/>
+            <a:ext cx="4550512" cy="256032"/>
+          </a:xfrm>
+          <a:prstGeom prst="rect">
+            <a:avLst/>
+          </a:prstGeom>
+          <a:noFill/>
+          <a:ln/>
+        </p:spPr>
+        <p:txBody>
+          <a:bodyPr wrap="square" rtlCol="0" anchor="ctr"/>
+          <a:lstStyle/>
+          <a:p>
+            <a:pPr indent="0" marL="0">
+              <a:buNone/>
+            </a:pPr>
+            <a:r>
+              <a:rPr lang="en-US" sz="1350" b="1" dirty="0">
                 <a:solidFill>
                   <a:srgbClr val="15130F"/>
                 </a:solidFill>
@@ -6924,20 +6162,20 @@
               </a:rPr>
               <a:t>자동 경고</a:t>
             </a:r>
-            <a:endParaRPr lang="en-US" sz="1300" dirty="0"/>
-          </a:p>
-        </p:txBody>
-      </p:sp>
-      <p:sp>
-        <p:nvSpPr>
-          <p:cNvPr id="38" name="Text 35"/>
-          <p:cNvSpPr/>
-          <p:nvPr/>
-        </p:nvSpPr>
-        <p:spPr>
-          <a:xfrm>
-            <a:off x="1490472" y="4905756"/>
-            <a:ext cx="4248760" cy="630936"/>
+            <a:endParaRPr lang="en-US" sz="1350" dirty="0"/>
+          </a:p>
+        </p:txBody>
+      </p:sp>
+      <p:sp>
+        <p:nvSpPr>
+          <p:cNvPr id="34" name="Text 31"/>
+          <p:cNvSpPr/>
+          <p:nvPr/>
+        </p:nvSpPr>
+        <p:spPr>
+          <a:xfrm>
+            <a:off x="1271016" y="5760720"/>
+            <a:ext cx="4550512" cy="438912"/>
           </a:xfrm>
           <a:prstGeom prst="rect">
             <a:avLst/>
@@ -6969,52 +6207,18 @@
       </p:sp>
       <p:sp>
         <p:nvSpPr>
-          <p:cNvPr id="39" name="Shape 36"/>
-          <p:cNvSpPr/>
-          <p:nvPr/>
-        </p:nvSpPr>
-        <p:spPr>
-          <a:xfrm>
-            <a:off x="6233008" y="4320540"/>
-            <a:ext cx="5272888" cy="1325880"/>
+          <p:cNvPr id="35" name="Shape 32"/>
+          <p:cNvSpPr/>
+          <p:nvPr/>
+        </p:nvSpPr>
+        <p:spPr>
+          <a:xfrm>
+            <a:off x="6370168" y="5340096"/>
+            <a:ext cx="384048" cy="384048"/>
           </a:xfrm>
           <a:prstGeom prst="roundRect">
             <a:avLst>
-              <a:gd name="adj" fmla="val 5517"/>
-            </a:avLst>
-          </a:prstGeom>
-          <a:solidFill>
-            <a:srgbClr val="FFFFFB"/>
-          </a:solidFill>
-          <a:ln w="12700">
-            <a:solidFill>
-              <a:srgbClr val="D8D0C1"/>
-            </a:solidFill>
-            <a:prstDash val="solid"/>
-          </a:ln>
-          <a:effectLst>
-            <a:outerShdw sx="100000" sy="100000" kx="0" ky="0" algn="bl" rotWithShape="0" blurRad="152400" dist="25400" dir="5400000">
-              <a:srgbClr val="8A8272">
-                <a:alpha val="22000"/>
-              </a:srgbClr>
-            </a:outerShdw>
-          </a:effectLst>
-        </p:spPr>
-      </p:sp>
-      <p:sp>
-        <p:nvSpPr>
-          <p:cNvPr id="40" name="Shape 37"/>
-          <p:cNvSpPr/>
-          <p:nvPr/>
-        </p:nvSpPr>
-        <p:spPr>
-          <a:xfrm>
-            <a:off x="6452464" y="4782312"/>
-            <a:ext cx="402336" cy="402336"/>
-          </a:xfrm>
-          <a:prstGeom prst="roundRect">
-            <a:avLst>
-              <a:gd name="adj" fmla="val 22727"/>
+              <a:gd name="adj" fmla="val 23810"/>
             </a:avLst>
           </a:prstGeom>
           <a:solidFill>
@@ -7030,14 +6234,14 @@
       </p:sp>
       <p:sp>
         <p:nvSpPr>
-          <p:cNvPr id="41" name="Text 38"/>
-          <p:cNvSpPr/>
-          <p:nvPr/>
-        </p:nvSpPr>
-        <p:spPr>
-          <a:xfrm>
-            <a:off x="6452464" y="4782312"/>
-            <a:ext cx="402336" cy="402336"/>
+          <p:cNvPr id="36" name="Text 33"/>
+          <p:cNvSpPr/>
+          <p:nvPr/>
+        </p:nvSpPr>
+        <p:spPr>
+          <a:xfrm>
+            <a:off x="6370168" y="5340096"/>
+            <a:ext cx="384048" cy="384048"/>
           </a:xfrm>
           <a:prstGeom prst="rect">
             <a:avLst/>
@@ -7053,7 +6257,7 @@
               <a:buNone/>
             </a:pPr>
             <a:r>
-              <a:rPr lang="en-US" sz="1300" b="1" dirty="0">
+              <a:rPr lang="en-US" sz="1250" b="1" dirty="0">
                 <a:solidFill>
                   <a:srgbClr val="2F4B7C"/>
                 </a:solidFill>
@@ -7063,20 +6267,20 @@
               </a:rPr>
               <a:t>✓</a:t>
             </a:r>
-            <a:endParaRPr lang="en-US" sz="1300" dirty="0"/>
-          </a:p>
-        </p:txBody>
-      </p:sp>
-      <p:sp>
-        <p:nvSpPr>
-          <p:cNvPr id="42" name="Text 39"/>
-          <p:cNvSpPr/>
-          <p:nvPr/>
-        </p:nvSpPr>
-        <p:spPr>
-          <a:xfrm>
-            <a:off x="7037680" y="4448556"/>
-            <a:ext cx="4248760" cy="201168"/>
+            <a:endParaRPr lang="en-US" sz="1250" dirty="0"/>
+          </a:p>
+        </p:txBody>
+      </p:sp>
+      <p:sp>
+        <p:nvSpPr>
+          <p:cNvPr id="37" name="Text 34"/>
+          <p:cNvSpPr/>
+          <p:nvPr/>
+        </p:nvSpPr>
+        <p:spPr>
+          <a:xfrm>
+            <a:off x="6955384" y="5285232"/>
+            <a:ext cx="4550512" cy="201168"/>
           </a:xfrm>
           <a:prstGeom prst="rect">
             <a:avLst/>
@@ -7108,30 +6312,30 @@
       </p:sp>
       <p:sp>
         <p:nvSpPr>
-          <p:cNvPr id="43" name="Text 40"/>
-          <p:cNvSpPr/>
-          <p:nvPr/>
-        </p:nvSpPr>
-        <p:spPr>
-          <a:xfrm>
-            <a:off x="7037680" y="4649724"/>
-            <a:ext cx="4248760" cy="256032"/>
-          </a:xfrm>
-          <a:prstGeom prst="rect">
-            <a:avLst/>
-          </a:prstGeom>
-          <a:noFill/>
-          <a:ln/>
-        </p:spPr>
-        <p:txBody>
-          <a:bodyPr wrap="square" rtlCol="0" anchor="ctr"/>
-          <a:lstStyle/>
-          <a:p>
-            <a:pPr indent="0" marL="0">
-              <a:buNone/>
-            </a:pPr>
-            <a:r>
-              <a:rPr lang="en-US" sz="1300" b="1" dirty="0">
+          <p:cNvPr id="38" name="Text 35"/>
+          <p:cNvSpPr/>
+          <p:nvPr/>
+        </p:nvSpPr>
+        <p:spPr>
+          <a:xfrm>
+            <a:off x="6955384" y="5486400"/>
+            <a:ext cx="4550512" cy="256032"/>
+          </a:xfrm>
+          <a:prstGeom prst="rect">
+            <a:avLst/>
+          </a:prstGeom>
+          <a:noFill/>
+          <a:ln/>
+        </p:spPr>
+        <p:txBody>
+          <a:bodyPr wrap="square" rtlCol="0" anchor="ctr"/>
+          <a:lstStyle/>
+          <a:p>
+            <a:pPr indent="0" marL="0">
+              <a:buNone/>
+            </a:pPr>
+            <a:r>
+              <a:rPr lang="en-US" sz="1350" b="1" dirty="0">
                 <a:solidFill>
                   <a:srgbClr val="15130F"/>
                 </a:solidFill>
@@ -7141,20 +6345,20 @@
               </a:rPr>
               <a:t>사람 승인</a:t>
             </a:r>
-            <a:endParaRPr lang="en-US" sz="1300" dirty="0"/>
-          </a:p>
-        </p:txBody>
-      </p:sp>
-      <p:sp>
-        <p:nvSpPr>
-          <p:cNvPr id="44" name="Text 41"/>
-          <p:cNvSpPr/>
-          <p:nvPr/>
-        </p:nvSpPr>
-        <p:spPr>
-          <a:xfrm>
-            <a:off x="7037680" y="4905756"/>
-            <a:ext cx="4248760" cy="630936"/>
+            <a:endParaRPr lang="en-US" sz="1350" dirty="0"/>
+          </a:p>
+        </p:txBody>
+      </p:sp>
+      <p:sp>
+        <p:nvSpPr>
+          <p:cNvPr id="39" name="Text 36"/>
+          <p:cNvSpPr/>
+          <p:nvPr/>
+        </p:nvSpPr>
+        <p:spPr>
+          <a:xfrm>
+            <a:off x="6955384" y="5760720"/>
+            <a:ext cx="4550512" cy="438912"/>
           </a:xfrm>
           <a:prstGeom prst="rect">
             <a:avLst/>
@@ -7218,117 +6422,7 @@
       </p:grpSpPr>
       <p:sp>
         <p:nvSpPr>
-          <p:cNvPr id="2" name="Shape 0"/>
-          <p:cNvSpPr/>
-          <p:nvPr/>
-        </p:nvSpPr>
-        <p:spPr>
-          <a:xfrm>
-            <a:off x="0" y="4389120"/>
-            <a:ext cx="12191695" cy="2478024"/>
-          </a:xfrm>
-          <a:prstGeom prst="rect">
-            <a:avLst/>
-          </a:prstGeom>
-          <a:solidFill>
-            <a:srgbClr val="15130F">
-              <a:alpha val="1000"/>
-            </a:srgbClr>
-          </a:solidFill>
-          <a:ln/>
-        </p:spPr>
-      </p:sp>
-      <p:sp>
-        <p:nvSpPr>
-          <p:cNvPr id="3" name="Shape 1"/>
-          <p:cNvSpPr/>
-          <p:nvPr/>
-        </p:nvSpPr>
-        <p:spPr>
-          <a:xfrm>
-            <a:off x="0" y="4882896"/>
-            <a:ext cx="12191695" cy="1984248"/>
-          </a:xfrm>
-          <a:prstGeom prst="rect">
-            <a:avLst/>
-          </a:prstGeom>
-          <a:solidFill>
-            <a:srgbClr val="15130F">
-              <a:alpha val="2000"/>
-            </a:srgbClr>
-          </a:solidFill>
-          <a:ln/>
-        </p:spPr>
-      </p:sp>
-      <p:sp>
-        <p:nvSpPr>
-          <p:cNvPr id="4" name="Shape 2"/>
-          <p:cNvSpPr/>
-          <p:nvPr/>
-        </p:nvSpPr>
-        <p:spPr>
-          <a:xfrm>
-            <a:off x="0" y="5376672"/>
-            <a:ext cx="12191695" cy="1490472"/>
-          </a:xfrm>
-          <a:prstGeom prst="rect">
-            <a:avLst/>
-          </a:prstGeom>
-          <a:solidFill>
-            <a:srgbClr val="15130F">
-              <a:alpha val="3000"/>
-            </a:srgbClr>
-          </a:solidFill>
-          <a:ln/>
-        </p:spPr>
-      </p:sp>
-      <p:sp>
-        <p:nvSpPr>
-          <p:cNvPr id="5" name="Shape 3"/>
-          <p:cNvSpPr/>
-          <p:nvPr/>
-        </p:nvSpPr>
-        <p:spPr>
-          <a:xfrm>
-            <a:off x="0" y="5870448"/>
-            <a:ext cx="12191695" cy="996696"/>
-          </a:xfrm>
-          <a:prstGeom prst="rect">
-            <a:avLst/>
-          </a:prstGeom>
-          <a:solidFill>
-            <a:srgbClr val="15130F">
-              <a:alpha val="4000"/>
-            </a:srgbClr>
-          </a:solidFill>
-          <a:ln/>
-        </p:spPr>
-      </p:sp>
-      <p:sp>
-        <p:nvSpPr>
-          <p:cNvPr id="6" name="Shape 4"/>
-          <p:cNvSpPr/>
-          <p:nvPr/>
-        </p:nvSpPr>
-        <p:spPr>
-          <a:xfrm>
-            <a:off x="0" y="6364224"/>
-            <a:ext cx="12191695" cy="502920"/>
-          </a:xfrm>
-          <a:prstGeom prst="rect">
-            <a:avLst/>
-          </a:prstGeom>
-          <a:solidFill>
-            <a:srgbClr val="15130F">
-              <a:alpha val="5000"/>
-            </a:srgbClr>
-          </a:solidFill>
-          <a:ln/>
-        </p:spPr>
-      </p:sp>
-      <p:sp>
-        <p:nvSpPr>
-          <p:cNvPr id="8" name="Text 5"/>
+          <p:cNvPr id="3" name="Text 0"/>
           <p:cNvSpPr/>
           <p:nvPr/>
         </p:nvSpPr>
@@ -7381,7 +6475,7 @@
       </p:sp>
       <p:sp>
         <p:nvSpPr>
-          <p:cNvPr id="9" name="Text 6"/>
+          <p:cNvPr id="4" name="Text 1"/>
           <p:cNvSpPr/>
           <p:nvPr/>
         </p:nvSpPr>
@@ -7420,7 +6514,7 @@
       </p:sp>
       <p:sp>
         <p:nvSpPr>
-          <p:cNvPr id="10" name="Text 7"/>
+          <p:cNvPr id="5" name="Text 2"/>
           <p:cNvSpPr/>
           <p:nvPr/>
         </p:nvSpPr>
@@ -7459,7 +6553,7 @@
       </p:sp>
       <p:sp>
         <p:nvSpPr>
-          <p:cNvPr id="11" name="Text 8"/>
+          <p:cNvPr id="6" name="Text 3"/>
           <p:cNvSpPr/>
           <p:nvPr/>
         </p:nvSpPr>
@@ -7498,7 +6592,7 @@
       </p:sp>
       <p:sp>
         <p:nvSpPr>
-          <p:cNvPr id="12" name="Text 9"/>
+          <p:cNvPr id="7" name="Text 4"/>
           <p:cNvSpPr/>
           <p:nvPr/>
         </p:nvSpPr>
@@ -7537,7 +6631,7 @@
       </p:sp>
       <p:sp>
         <p:nvSpPr>
-          <p:cNvPr id="13" name="Text 10"/>
+          <p:cNvPr id="8" name="Text 5"/>
           <p:cNvSpPr/>
           <p:nvPr/>
         </p:nvSpPr>
@@ -7576,64 +6670,53 @@
       </p:sp>
       <p:sp>
         <p:nvSpPr>
-          <p:cNvPr id="14" name="Shape 11"/>
-          <p:cNvSpPr/>
-          <p:nvPr/>
-        </p:nvSpPr>
-        <p:spPr>
-          <a:xfrm>
-            <a:off x="685800" y="2514600"/>
-            <a:ext cx="3460394" cy="1463040"/>
-          </a:xfrm>
-          <a:prstGeom prst="roundRect">
-            <a:avLst>
-              <a:gd name="adj" fmla="val 5000"/>
-            </a:avLst>
-          </a:prstGeom>
-          <a:solidFill>
-            <a:srgbClr val="FFFFFB"/>
-          </a:solidFill>
+          <p:cNvPr id="9" name="Shape 6"/>
+          <p:cNvSpPr/>
+          <p:nvPr/>
+        </p:nvSpPr>
+        <p:spPr>
+          <a:xfrm>
+            <a:off x="685800" y="2446020"/>
+            <a:ext cx="3271418" cy="0"/>
+          </a:xfrm>
+          <a:prstGeom prst="line">
+            <a:avLst/>
+          </a:prstGeom>
+          <a:noFill/>
           <a:ln w="12700">
             <a:solidFill>
               <a:srgbClr val="D8D0C1"/>
             </a:solidFill>
             <a:prstDash val="solid"/>
           </a:ln>
-          <a:effectLst>
-            <a:outerShdw sx="100000" sy="100000" kx="0" ky="0" algn="bl" rotWithShape="0" blurRad="152400" dist="25400" dir="5400000">
-              <a:srgbClr val="8A8272">
-                <a:alpha val="22000"/>
-              </a:srgbClr>
-            </a:outerShdw>
-          </a:effectLst>
-        </p:spPr>
-      </p:sp>
-      <p:sp>
-        <p:nvSpPr>
-          <p:cNvPr id="15" name="Text 12"/>
-          <p:cNvSpPr/>
-          <p:nvPr/>
-        </p:nvSpPr>
-        <p:spPr>
-          <a:xfrm>
-            <a:off x="941832" y="2679192"/>
-            <a:ext cx="2948330" cy="457200"/>
-          </a:xfrm>
-          <a:prstGeom prst="rect">
-            <a:avLst/>
-          </a:prstGeom>
-          <a:noFill/>
-          <a:ln/>
-        </p:spPr>
-        <p:txBody>
-          <a:bodyPr wrap="square" rtlCol="0" anchor="ctr"/>
-          <a:lstStyle/>
-          <a:p>
-            <a:pPr indent="0" marL="0">
-              <a:buNone/>
-            </a:pPr>
-            <a:r>
-              <a:rPr lang="en-US" sz="2700" b="1" dirty="0">
+        </p:spPr>
+      </p:sp>
+      <p:sp>
+        <p:nvSpPr>
+          <p:cNvPr id="10" name="Text 7"/>
+          <p:cNvSpPr/>
+          <p:nvPr/>
+        </p:nvSpPr>
+        <p:spPr>
+          <a:xfrm>
+            <a:off x="685800" y="2574036"/>
+            <a:ext cx="3271418" cy="512064"/>
+          </a:xfrm>
+          <a:prstGeom prst="rect">
+            <a:avLst/>
+          </a:prstGeom>
+          <a:noFill/>
+          <a:ln/>
+        </p:spPr>
+        <p:txBody>
+          <a:bodyPr wrap="square" rtlCol="0" anchor="ctr"/>
+          <a:lstStyle/>
+          <a:p>
+            <a:pPr indent="0" marL="0">
+              <a:buNone/>
+            </a:pPr>
+            <a:r>
+              <a:rPr lang="en-US" sz="3000" b="1" dirty="0">
                 <a:solidFill>
                   <a:srgbClr val="2F4B7C"/>
                 </a:solidFill>
@@ -7643,20 +6726,20 @@
               </a:rPr>
               <a:t>1</a:t>
             </a:r>
-            <a:endParaRPr lang="en-US" sz="2700" dirty="0"/>
-          </a:p>
-        </p:txBody>
-      </p:sp>
-      <p:sp>
-        <p:nvSpPr>
-          <p:cNvPr id="16" name="Text 13"/>
-          <p:cNvSpPr/>
-          <p:nvPr/>
-        </p:nvSpPr>
-        <p:spPr>
-          <a:xfrm>
-            <a:off x="941832" y="3172968"/>
-            <a:ext cx="2948330" cy="256032"/>
+            <a:endParaRPr lang="en-US" sz="3000" dirty="0"/>
+          </a:p>
+        </p:txBody>
+      </p:sp>
+      <p:sp>
+        <p:nvSpPr>
+          <p:cNvPr id="11" name="Text 8"/>
+          <p:cNvSpPr/>
+          <p:nvPr/>
+        </p:nvSpPr>
+        <p:spPr>
+          <a:xfrm>
+            <a:off x="685800" y="3122676"/>
+            <a:ext cx="3271418" cy="256032"/>
           </a:xfrm>
           <a:prstGeom prst="rect">
             <a:avLst/>
@@ -7688,14 +6771,14 @@
       </p:sp>
       <p:sp>
         <p:nvSpPr>
-          <p:cNvPr id="17" name="Text 14"/>
-          <p:cNvSpPr/>
-          <p:nvPr/>
-        </p:nvSpPr>
-        <p:spPr>
-          <a:xfrm>
-            <a:off x="941832" y="3429000"/>
-            <a:ext cx="2948330" cy="438912"/>
+          <p:cNvPr id="12" name="Text 9"/>
+          <p:cNvSpPr/>
+          <p:nvPr/>
+        </p:nvSpPr>
+        <p:spPr>
+          <a:xfrm>
+            <a:off x="685800" y="3378708"/>
+            <a:ext cx="3271418" cy="457200"/>
           </a:xfrm>
           <a:prstGeom prst="rect">
             <a:avLst/>
@@ -7727,64 +6810,53 @@
       </p:sp>
       <p:sp>
         <p:nvSpPr>
-          <p:cNvPr id="18" name="Shape 15"/>
-          <p:cNvSpPr/>
-          <p:nvPr/>
-        </p:nvSpPr>
-        <p:spPr>
-          <a:xfrm>
-            <a:off x="4365650" y="2514600"/>
-            <a:ext cx="3460394" cy="1463040"/>
-          </a:xfrm>
-          <a:prstGeom prst="roundRect">
-            <a:avLst>
-              <a:gd name="adj" fmla="val 5000"/>
-            </a:avLst>
-          </a:prstGeom>
-          <a:solidFill>
-            <a:srgbClr val="FFFFFB"/>
-          </a:solidFill>
+          <p:cNvPr id="13" name="Shape 10"/>
+          <p:cNvSpPr/>
+          <p:nvPr/>
+        </p:nvSpPr>
+        <p:spPr>
+          <a:xfrm>
+            <a:off x="4460138" y="2446020"/>
+            <a:ext cx="3271418" cy="0"/>
+          </a:xfrm>
+          <a:prstGeom prst="line">
+            <a:avLst/>
+          </a:prstGeom>
+          <a:noFill/>
           <a:ln w="12700">
             <a:solidFill>
               <a:srgbClr val="D8D0C1"/>
             </a:solidFill>
             <a:prstDash val="solid"/>
           </a:ln>
-          <a:effectLst>
-            <a:outerShdw sx="100000" sy="100000" kx="0" ky="0" algn="bl" rotWithShape="0" blurRad="152400" dist="25400" dir="5400000">
-              <a:srgbClr val="8A8272">
-                <a:alpha val="22000"/>
-              </a:srgbClr>
-            </a:outerShdw>
-          </a:effectLst>
-        </p:spPr>
-      </p:sp>
-      <p:sp>
-        <p:nvSpPr>
-          <p:cNvPr id="19" name="Text 16"/>
-          <p:cNvSpPr/>
-          <p:nvPr/>
-        </p:nvSpPr>
-        <p:spPr>
-          <a:xfrm>
-            <a:off x="4621682" y="2679192"/>
-            <a:ext cx="2948330" cy="457200"/>
-          </a:xfrm>
-          <a:prstGeom prst="rect">
-            <a:avLst/>
-          </a:prstGeom>
-          <a:noFill/>
-          <a:ln/>
-        </p:spPr>
-        <p:txBody>
-          <a:bodyPr wrap="square" rtlCol="0" anchor="ctr"/>
-          <a:lstStyle/>
-          <a:p>
-            <a:pPr indent="0" marL="0">
-              <a:buNone/>
-            </a:pPr>
-            <a:r>
-              <a:rPr lang="en-US" sz="2700" b="1" dirty="0">
+        </p:spPr>
+      </p:sp>
+      <p:sp>
+        <p:nvSpPr>
+          <p:cNvPr id="14" name="Text 11"/>
+          <p:cNvSpPr/>
+          <p:nvPr/>
+        </p:nvSpPr>
+        <p:spPr>
+          <a:xfrm>
+            <a:off x="4460138" y="2574036"/>
+            <a:ext cx="3271418" cy="512064"/>
+          </a:xfrm>
+          <a:prstGeom prst="rect">
+            <a:avLst/>
+          </a:prstGeom>
+          <a:noFill/>
+          <a:ln/>
+        </p:spPr>
+        <p:txBody>
+          <a:bodyPr wrap="square" rtlCol="0" anchor="ctr"/>
+          <a:lstStyle/>
+          <a:p>
+            <a:pPr indent="0" marL="0">
+              <a:buNone/>
+            </a:pPr>
+            <a:r>
+              <a:rPr lang="en-US" sz="3000" b="1" dirty="0">
                 <a:solidFill>
                   <a:srgbClr val="2F4B7C"/>
                 </a:solidFill>
@@ -7794,20 +6866,20 @@
               </a:rPr>
               <a:t>0</a:t>
             </a:r>
-            <a:endParaRPr lang="en-US" sz="2700" dirty="0"/>
-          </a:p>
-        </p:txBody>
-      </p:sp>
-      <p:sp>
-        <p:nvSpPr>
-          <p:cNvPr id="20" name="Text 17"/>
-          <p:cNvSpPr/>
-          <p:nvPr/>
-        </p:nvSpPr>
-        <p:spPr>
-          <a:xfrm>
-            <a:off x="4621682" y="3172968"/>
-            <a:ext cx="2948330" cy="256032"/>
+            <a:endParaRPr lang="en-US" sz="3000" dirty="0"/>
+          </a:p>
+        </p:txBody>
+      </p:sp>
+      <p:sp>
+        <p:nvSpPr>
+          <p:cNvPr id="15" name="Text 12"/>
+          <p:cNvSpPr/>
+          <p:nvPr/>
+        </p:nvSpPr>
+        <p:spPr>
+          <a:xfrm>
+            <a:off x="4460138" y="3122676"/>
+            <a:ext cx="3271418" cy="256032"/>
           </a:xfrm>
           <a:prstGeom prst="rect">
             <a:avLst/>
@@ -7839,14 +6911,14 @@
       </p:sp>
       <p:sp>
         <p:nvSpPr>
-          <p:cNvPr id="21" name="Text 18"/>
-          <p:cNvSpPr/>
-          <p:nvPr/>
-        </p:nvSpPr>
-        <p:spPr>
-          <a:xfrm>
-            <a:off x="4621682" y="3429000"/>
-            <a:ext cx="2948330" cy="438912"/>
+          <p:cNvPr id="16" name="Text 13"/>
+          <p:cNvSpPr/>
+          <p:nvPr/>
+        </p:nvSpPr>
+        <p:spPr>
+          <a:xfrm>
+            <a:off x="4460138" y="3378708"/>
+            <a:ext cx="3271418" cy="457200"/>
           </a:xfrm>
           <a:prstGeom prst="rect">
             <a:avLst/>
@@ -7878,64 +6950,53 @@
       </p:sp>
       <p:sp>
         <p:nvSpPr>
-          <p:cNvPr id="22" name="Shape 19"/>
-          <p:cNvSpPr/>
-          <p:nvPr/>
-        </p:nvSpPr>
-        <p:spPr>
-          <a:xfrm>
-            <a:off x="8045501" y="2514600"/>
-            <a:ext cx="3460394" cy="1463040"/>
-          </a:xfrm>
-          <a:prstGeom prst="roundRect">
-            <a:avLst>
-              <a:gd name="adj" fmla="val 5000"/>
-            </a:avLst>
-          </a:prstGeom>
-          <a:solidFill>
-            <a:srgbClr val="FFFFFB"/>
-          </a:solidFill>
+          <p:cNvPr id="17" name="Shape 14"/>
+          <p:cNvSpPr/>
+          <p:nvPr/>
+        </p:nvSpPr>
+        <p:spPr>
+          <a:xfrm>
+            <a:off x="8234477" y="2446020"/>
+            <a:ext cx="3271418" cy="0"/>
+          </a:xfrm>
+          <a:prstGeom prst="line">
+            <a:avLst/>
+          </a:prstGeom>
+          <a:noFill/>
           <a:ln w="12700">
             <a:solidFill>
               <a:srgbClr val="D8D0C1"/>
             </a:solidFill>
             <a:prstDash val="solid"/>
           </a:ln>
-          <a:effectLst>
-            <a:outerShdw sx="100000" sy="100000" kx="0" ky="0" algn="bl" rotWithShape="0" blurRad="152400" dist="25400" dir="5400000">
-              <a:srgbClr val="8A8272">
-                <a:alpha val="22000"/>
-              </a:srgbClr>
-            </a:outerShdw>
-          </a:effectLst>
-        </p:spPr>
-      </p:sp>
-      <p:sp>
-        <p:nvSpPr>
-          <p:cNvPr id="23" name="Text 20"/>
-          <p:cNvSpPr/>
-          <p:nvPr/>
-        </p:nvSpPr>
-        <p:spPr>
-          <a:xfrm>
-            <a:off x="8301533" y="2679192"/>
-            <a:ext cx="2948330" cy="457200"/>
-          </a:xfrm>
-          <a:prstGeom prst="rect">
-            <a:avLst/>
-          </a:prstGeom>
-          <a:noFill/>
-          <a:ln/>
-        </p:spPr>
-        <p:txBody>
-          <a:bodyPr wrap="square" rtlCol="0" anchor="ctr"/>
-          <a:lstStyle/>
-          <a:p>
-            <a:pPr indent="0" marL="0">
-              <a:buNone/>
-            </a:pPr>
-            <a:r>
-              <a:rPr lang="en-US" sz="2700" b="1" dirty="0">
+        </p:spPr>
+      </p:sp>
+      <p:sp>
+        <p:nvSpPr>
+          <p:cNvPr id="18" name="Text 15"/>
+          <p:cNvSpPr/>
+          <p:nvPr/>
+        </p:nvSpPr>
+        <p:spPr>
+          <a:xfrm>
+            <a:off x="8234477" y="2574036"/>
+            <a:ext cx="3271418" cy="512064"/>
+          </a:xfrm>
+          <a:prstGeom prst="rect">
+            <a:avLst/>
+          </a:prstGeom>
+          <a:noFill/>
+          <a:ln/>
+        </p:spPr>
+        <p:txBody>
+          <a:bodyPr wrap="square" rtlCol="0" anchor="ctr"/>
+          <a:lstStyle/>
+          <a:p>
+            <a:pPr indent="0" marL="0">
+              <a:buNone/>
+            </a:pPr>
+            <a:r>
+              <a:rPr lang="en-US" sz="3000" b="1" dirty="0">
                 <a:solidFill>
                   <a:srgbClr val="2F4B7C"/>
                 </a:solidFill>
@@ -7945,20 +7006,20 @@
               </a:rPr>
               <a:t>7</a:t>
             </a:r>
-            <a:endParaRPr lang="en-US" sz="2700" dirty="0"/>
-          </a:p>
-        </p:txBody>
-      </p:sp>
-      <p:sp>
-        <p:nvSpPr>
-          <p:cNvPr id="24" name="Text 21"/>
-          <p:cNvSpPr/>
-          <p:nvPr/>
-        </p:nvSpPr>
-        <p:spPr>
-          <a:xfrm>
-            <a:off x="8301533" y="3172968"/>
-            <a:ext cx="2948330" cy="256032"/>
+            <a:endParaRPr lang="en-US" sz="3000" dirty="0"/>
+          </a:p>
+        </p:txBody>
+      </p:sp>
+      <p:sp>
+        <p:nvSpPr>
+          <p:cNvPr id="19" name="Text 16"/>
+          <p:cNvSpPr/>
+          <p:nvPr/>
+        </p:nvSpPr>
+        <p:spPr>
+          <a:xfrm>
+            <a:off x="8234477" y="3122676"/>
+            <a:ext cx="3271418" cy="256032"/>
           </a:xfrm>
           <a:prstGeom prst="rect">
             <a:avLst/>
@@ -7990,14 +7051,14 @@
       </p:sp>
       <p:sp>
         <p:nvSpPr>
-          <p:cNvPr id="25" name="Text 22"/>
-          <p:cNvSpPr/>
-          <p:nvPr/>
-        </p:nvSpPr>
-        <p:spPr>
-          <a:xfrm>
-            <a:off x="8301533" y="3429000"/>
-            <a:ext cx="2948330" cy="438912"/>
+          <p:cNvPr id="20" name="Text 17"/>
+          <p:cNvSpPr/>
+          <p:nvPr/>
+        </p:nvSpPr>
+        <p:spPr>
+          <a:xfrm>
+            <a:off x="8234477" y="3378708"/>
+            <a:ext cx="3271418" cy="457200"/>
           </a:xfrm>
           <a:prstGeom prst="rect">
             <a:avLst/>
@@ -8029,52 +7090,41 @@
       </p:sp>
       <p:sp>
         <p:nvSpPr>
-          <p:cNvPr id="26" name="Shape 23"/>
-          <p:cNvSpPr/>
-          <p:nvPr/>
-        </p:nvSpPr>
-        <p:spPr>
-          <a:xfrm>
-            <a:off x="685800" y="4251960"/>
-            <a:ext cx="3423818" cy="1463040"/>
-          </a:xfrm>
-          <a:prstGeom prst="roundRect">
-            <a:avLst>
-              <a:gd name="adj" fmla="val 5000"/>
-            </a:avLst>
-          </a:prstGeom>
-          <a:solidFill>
-            <a:srgbClr val="FFFFFB"/>
-          </a:solidFill>
+          <p:cNvPr id="21" name="Shape 18"/>
+          <p:cNvSpPr/>
+          <p:nvPr/>
+        </p:nvSpPr>
+        <p:spPr>
+          <a:xfrm>
+            <a:off x="685800" y="4274820"/>
+            <a:ext cx="10820095" cy="0"/>
+          </a:xfrm>
+          <a:prstGeom prst="line">
+            <a:avLst/>
+          </a:prstGeom>
+          <a:noFill/>
           <a:ln w="12700">
             <a:solidFill>
               <a:srgbClr val="D8D0C1"/>
             </a:solidFill>
             <a:prstDash val="solid"/>
           </a:ln>
-          <a:effectLst>
-            <a:outerShdw sx="100000" sy="100000" kx="0" ky="0" algn="bl" rotWithShape="0" blurRad="152400" dist="25400" dir="5400000">
-              <a:srgbClr val="8A8272">
-                <a:alpha val="22000"/>
-              </a:srgbClr>
-            </a:outerShdw>
-          </a:effectLst>
-        </p:spPr>
-      </p:sp>
-      <p:sp>
-        <p:nvSpPr>
-          <p:cNvPr id="27" name="Shape 24"/>
-          <p:cNvSpPr/>
-          <p:nvPr/>
-        </p:nvSpPr>
-        <p:spPr>
-          <a:xfrm>
-            <a:off x="905256" y="4782312"/>
-            <a:ext cx="402336" cy="402336"/>
+        </p:spPr>
+      </p:sp>
+      <p:sp>
+        <p:nvSpPr>
+          <p:cNvPr id="22" name="Shape 19"/>
+          <p:cNvSpPr/>
+          <p:nvPr/>
+        </p:nvSpPr>
+        <p:spPr>
+          <a:xfrm>
+            <a:off x="685800" y="4604004"/>
+            <a:ext cx="384048" cy="384048"/>
           </a:xfrm>
           <a:prstGeom prst="roundRect">
             <a:avLst>
-              <a:gd name="adj" fmla="val 22727"/>
+              <a:gd name="adj" fmla="val 23810"/>
             </a:avLst>
           </a:prstGeom>
           <a:solidFill>
@@ -8090,14 +7140,14 @@
       </p:sp>
       <p:sp>
         <p:nvSpPr>
-          <p:cNvPr id="28" name="Text 25"/>
-          <p:cNvSpPr/>
-          <p:nvPr/>
-        </p:nvSpPr>
-        <p:spPr>
-          <a:xfrm>
-            <a:off x="905256" y="4782312"/>
-            <a:ext cx="402336" cy="402336"/>
+          <p:cNvPr id="23" name="Text 20"/>
+          <p:cNvSpPr/>
+          <p:nvPr/>
+        </p:nvSpPr>
+        <p:spPr>
+          <a:xfrm>
+            <a:off x="685800" y="4604004"/>
+            <a:ext cx="384048" cy="384048"/>
           </a:xfrm>
           <a:prstGeom prst="rect">
             <a:avLst/>
@@ -8113,7 +7163,7 @@
               <a:buNone/>
             </a:pPr>
             <a:r>
-              <a:rPr lang="en-US" sz="1300" b="1" dirty="0">
+              <a:rPr lang="en-US" sz="1250" b="1" dirty="0">
                 <a:solidFill>
                   <a:srgbClr val="2F4B7C"/>
                 </a:solidFill>
@@ -8123,20 +7173,20 @@
               </a:rPr>
               <a:t>▣</a:t>
             </a:r>
-            <a:endParaRPr lang="en-US" sz="1300" dirty="0"/>
-          </a:p>
-        </p:txBody>
-      </p:sp>
-      <p:sp>
-        <p:nvSpPr>
-          <p:cNvPr id="29" name="Text 26"/>
-          <p:cNvSpPr/>
-          <p:nvPr/>
-        </p:nvSpPr>
-        <p:spPr>
-          <a:xfrm>
-            <a:off x="1490472" y="4379976"/>
-            <a:ext cx="2399690" cy="201168"/>
+            <a:endParaRPr lang="en-US" sz="1250" dirty="0"/>
+          </a:p>
+        </p:txBody>
+      </p:sp>
+      <p:sp>
+        <p:nvSpPr>
+          <p:cNvPr id="24" name="Text 21"/>
+          <p:cNvSpPr/>
+          <p:nvPr/>
+        </p:nvSpPr>
+        <p:spPr>
+          <a:xfrm>
+            <a:off x="1271016" y="4549140"/>
+            <a:ext cx="2686202" cy="201168"/>
           </a:xfrm>
           <a:prstGeom prst="rect">
             <a:avLst/>
@@ -8168,30 +7218,30 @@
       </p:sp>
       <p:sp>
         <p:nvSpPr>
-          <p:cNvPr id="30" name="Text 27"/>
-          <p:cNvSpPr/>
-          <p:nvPr/>
-        </p:nvSpPr>
-        <p:spPr>
-          <a:xfrm>
-            <a:off x="1490472" y="4581144"/>
-            <a:ext cx="2399690" cy="256032"/>
-          </a:xfrm>
-          <a:prstGeom prst="rect">
-            <a:avLst/>
-          </a:prstGeom>
-          <a:noFill/>
-          <a:ln/>
-        </p:spPr>
-        <p:txBody>
-          <a:bodyPr wrap="square" rtlCol="0" anchor="ctr"/>
-          <a:lstStyle/>
-          <a:p>
-            <a:pPr indent="0" marL="0">
-              <a:buNone/>
-            </a:pPr>
-            <a:r>
-              <a:rPr lang="en-US" sz="1300" b="1" dirty="0">
+          <p:cNvPr id="25" name="Text 22"/>
+          <p:cNvSpPr/>
+          <p:nvPr/>
+        </p:nvSpPr>
+        <p:spPr>
+          <a:xfrm>
+            <a:off x="1271016" y="4750308"/>
+            <a:ext cx="2686202" cy="256032"/>
+          </a:xfrm>
+          <a:prstGeom prst="rect">
+            <a:avLst/>
+          </a:prstGeom>
+          <a:noFill/>
+          <a:ln/>
+        </p:spPr>
+        <p:txBody>
+          <a:bodyPr wrap="square" rtlCol="0" anchor="ctr"/>
+          <a:lstStyle/>
+          <a:p>
+            <a:pPr indent="0" marL="0">
+              <a:buNone/>
+            </a:pPr>
+            <a:r>
+              <a:rPr lang="en-US" sz="1350" b="1" dirty="0">
                 <a:solidFill>
                   <a:srgbClr val="15130F"/>
                 </a:solidFill>
@@ -8201,20 +7251,20 @@
               </a:rPr>
               <a:t>HTML</a:t>
             </a:r>
-            <a:endParaRPr lang="en-US" sz="1300" dirty="0"/>
-          </a:p>
-        </p:txBody>
-      </p:sp>
-      <p:sp>
-        <p:nvSpPr>
-          <p:cNvPr id="31" name="Text 28"/>
-          <p:cNvSpPr/>
-          <p:nvPr/>
-        </p:nvSpPr>
-        <p:spPr>
-          <a:xfrm>
-            <a:off x="1490472" y="4837176"/>
-            <a:ext cx="2399690" cy="768096"/>
+            <a:endParaRPr lang="en-US" sz="1350" dirty="0"/>
+          </a:p>
+        </p:txBody>
+      </p:sp>
+      <p:sp>
+        <p:nvSpPr>
+          <p:cNvPr id="26" name="Text 23"/>
+          <p:cNvSpPr/>
+          <p:nvPr/>
+        </p:nvSpPr>
+        <p:spPr>
+          <a:xfrm>
+            <a:off x="1271016" y="5024628"/>
+            <a:ext cx="2686202" cy="758952"/>
           </a:xfrm>
           <a:prstGeom prst="rect">
             <a:avLst/>
@@ -8246,52 +7296,18 @@
       </p:sp>
       <p:sp>
         <p:nvSpPr>
-          <p:cNvPr id="32" name="Shape 29"/>
-          <p:cNvSpPr/>
-          <p:nvPr/>
-        </p:nvSpPr>
-        <p:spPr>
-          <a:xfrm>
-            <a:off x="4383938" y="4251960"/>
-            <a:ext cx="3423818" cy="1463040"/>
+          <p:cNvPr id="27" name="Shape 24"/>
+          <p:cNvSpPr/>
+          <p:nvPr/>
+        </p:nvSpPr>
+        <p:spPr>
+          <a:xfrm>
+            <a:off x="4460138" y="4604004"/>
+            <a:ext cx="384048" cy="384048"/>
           </a:xfrm>
           <a:prstGeom prst="roundRect">
             <a:avLst>
-              <a:gd name="adj" fmla="val 5000"/>
-            </a:avLst>
-          </a:prstGeom>
-          <a:solidFill>
-            <a:srgbClr val="FFFFFB"/>
-          </a:solidFill>
-          <a:ln w="12700">
-            <a:solidFill>
-              <a:srgbClr val="D8D0C1"/>
-            </a:solidFill>
-            <a:prstDash val="solid"/>
-          </a:ln>
-          <a:effectLst>
-            <a:outerShdw sx="100000" sy="100000" kx="0" ky="0" algn="bl" rotWithShape="0" blurRad="152400" dist="25400" dir="5400000">
-              <a:srgbClr val="8A8272">
-                <a:alpha val="22000"/>
-              </a:srgbClr>
-            </a:outerShdw>
-          </a:effectLst>
-        </p:spPr>
-      </p:sp>
-      <p:sp>
-        <p:nvSpPr>
-          <p:cNvPr id="33" name="Shape 30"/>
-          <p:cNvSpPr/>
-          <p:nvPr/>
-        </p:nvSpPr>
-        <p:spPr>
-          <a:xfrm>
-            <a:off x="4603394" y="4782312"/>
-            <a:ext cx="402336" cy="402336"/>
-          </a:xfrm>
-          <a:prstGeom prst="roundRect">
-            <a:avLst>
-              <a:gd name="adj" fmla="val 22727"/>
+              <a:gd name="adj" fmla="val 23810"/>
             </a:avLst>
           </a:prstGeom>
           <a:solidFill>
@@ -8307,14 +7323,14 @@
       </p:sp>
       <p:sp>
         <p:nvSpPr>
-          <p:cNvPr id="34" name="Text 31"/>
-          <p:cNvSpPr/>
-          <p:nvPr/>
-        </p:nvSpPr>
-        <p:spPr>
-          <a:xfrm>
-            <a:off x="4603394" y="4782312"/>
-            <a:ext cx="402336" cy="402336"/>
+          <p:cNvPr id="28" name="Text 25"/>
+          <p:cNvSpPr/>
+          <p:nvPr/>
+        </p:nvSpPr>
+        <p:spPr>
+          <a:xfrm>
+            <a:off x="4460138" y="4604004"/>
+            <a:ext cx="384048" cy="384048"/>
           </a:xfrm>
           <a:prstGeom prst="rect">
             <a:avLst/>
@@ -8330,7 +7346,7 @@
               <a:buNone/>
             </a:pPr>
             <a:r>
-              <a:rPr lang="en-US" sz="1300" b="1" dirty="0">
+              <a:rPr lang="en-US" sz="1250" b="1" dirty="0">
                 <a:solidFill>
                   <a:srgbClr val="2F4B7C"/>
                 </a:solidFill>
@@ -8340,20 +7356,20 @@
               </a:rPr>
               <a:t>⎙</a:t>
             </a:r>
-            <a:endParaRPr lang="en-US" sz="1300" dirty="0"/>
-          </a:p>
-        </p:txBody>
-      </p:sp>
-      <p:sp>
-        <p:nvSpPr>
-          <p:cNvPr id="35" name="Text 32"/>
-          <p:cNvSpPr/>
-          <p:nvPr/>
-        </p:nvSpPr>
-        <p:spPr>
-          <a:xfrm>
-            <a:off x="5188610" y="4379976"/>
-            <a:ext cx="2399690" cy="201168"/>
+            <a:endParaRPr lang="en-US" sz="1250" dirty="0"/>
+          </a:p>
+        </p:txBody>
+      </p:sp>
+      <p:sp>
+        <p:nvSpPr>
+          <p:cNvPr id="29" name="Text 26"/>
+          <p:cNvSpPr/>
+          <p:nvPr/>
+        </p:nvSpPr>
+        <p:spPr>
+          <a:xfrm>
+            <a:off x="5045354" y="4549140"/>
+            <a:ext cx="2686202" cy="201168"/>
           </a:xfrm>
           <a:prstGeom prst="rect">
             <a:avLst/>
@@ -8385,30 +7401,30 @@
       </p:sp>
       <p:sp>
         <p:nvSpPr>
-          <p:cNvPr id="36" name="Text 33"/>
-          <p:cNvSpPr/>
-          <p:nvPr/>
-        </p:nvSpPr>
-        <p:spPr>
-          <a:xfrm>
-            <a:off x="5188610" y="4581144"/>
-            <a:ext cx="2399690" cy="256032"/>
-          </a:xfrm>
-          <a:prstGeom prst="rect">
-            <a:avLst/>
-          </a:prstGeom>
-          <a:noFill/>
-          <a:ln/>
-        </p:spPr>
-        <p:txBody>
-          <a:bodyPr wrap="square" rtlCol="0" anchor="ctr"/>
-          <a:lstStyle/>
-          <a:p>
-            <a:pPr indent="0" marL="0">
-              <a:buNone/>
-            </a:pPr>
-            <a:r>
-              <a:rPr lang="en-US" sz="1300" b="1" dirty="0">
+          <p:cNvPr id="30" name="Text 27"/>
+          <p:cNvSpPr/>
+          <p:nvPr/>
+        </p:nvSpPr>
+        <p:spPr>
+          <a:xfrm>
+            <a:off x="5045354" y="4750308"/>
+            <a:ext cx="2686202" cy="256032"/>
+          </a:xfrm>
+          <a:prstGeom prst="rect">
+            <a:avLst/>
+          </a:prstGeom>
+          <a:noFill/>
+          <a:ln/>
+        </p:spPr>
+        <p:txBody>
+          <a:bodyPr wrap="square" rtlCol="0" anchor="ctr"/>
+          <a:lstStyle/>
+          <a:p>
+            <a:pPr indent="0" marL="0">
+              <a:buNone/>
+            </a:pPr>
+            <a:r>
+              <a:rPr lang="en-US" sz="1350" b="1" dirty="0">
                 <a:solidFill>
                   <a:srgbClr val="15130F"/>
                 </a:solidFill>
@@ -8418,20 +7434,20 @@
               </a:rPr>
               <a:t>PDF</a:t>
             </a:r>
-            <a:endParaRPr lang="en-US" sz="1300" dirty="0"/>
-          </a:p>
-        </p:txBody>
-      </p:sp>
-      <p:sp>
-        <p:nvSpPr>
-          <p:cNvPr id="37" name="Text 34"/>
-          <p:cNvSpPr/>
-          <p:nvPr/>
-        </p:nvSpPr>
-        <p:spPr>
-          <a:xfrm>
-            <a:off x="5188610" y="4837176"/>
-            <a:ext cx="2399690" cy="768096"/>
+            <a:endParaRPr lang="en-US" sz="1350" dirty="0"/>
+          </a:p>
+        </p:txBody>
+      </p:sp>
+      <p:sp>
+        <p:nvSpPr>
+          <p:cNvPr id="31" name="Text 28"/>
+          <p:cNvSpPr/>
+          <p:nvPr/>
+        </p:nvSpPr>
+        <p:spPr>
+          <a:xfrm>
+            <a:off x="5045354" y="5024628"/>
+            <a:ext cx="2686202" cy="758952"/>
           </a:xfrm>
           <a:prstGeom prst="rect">
             <a:avLst/>
@@ -8463,52 +7479,18 @@
       </p:sp>
       <p:sp>
         <p:nvSpPr>
-          <p:cNvPr id="38" name="Shape 35"/>
-          <p:cNvSpPr/>
-          <p:nvPr/>
-        </p:nvSpPr>
-        <p:spPr>
-          <a:xfrm>
-            <a:off x="8082077" y="4251960"/>
-            <a:ext cx="3423818" cy="1463040"/>
+          <p:cNvPr id="32" name="Shape 29"/>
+          <p:cNvSpPr/>
+          <p:nvPr/>
+        </p:nvSpPr>
+        <p:spPr>
+          <a:xfrm>
+            <a:off x="8234477" y="4604004"/>
+            <a:ext cx="384048" cy="384048"/>
           </a:xfrm>
           <a:prstGeom prst="roundRect">
             <a:avLst>
-              <a:gd name="adj" fmla="val 5000"/>
-            </a:avLst>
-          </a:prstGeom>
-          <a:solidFill>
-            <a:srgbClr val="FFFFFB"/>
-          </a:solidFill>
-          <a:ln w="12700">
-            <a:solidFill>
-              <a:srgbClr val="D8D0C1"/>
-            </a:solidFill>
-            <a:prstDash val="solid"/>
-          </a:ln>
-          <a:effectLst>
-            <a:outerShdw sx="100000" sy="100000" kx="0" ky="0" algn="bl" rotWithShape="0" blurRad="152400" dist="25400" dir="5400000">
-              <a:srgbClr val="8A8272">
-                <a:alpha val="22000"/>
-              </a:srgbClr>
-            </a:outerShdw>
-          </a:effectLst>
-        </p:spPr>
-      </p:sp>
-      <p:sp>
-        <p:nvSpPr>
-          <p:cNvPr id="39" name="Shape 36"/>
-          <p:cNvSpPr/>
-          <p:nvPr/>
-        </p:nvSpPr>
-        <p:spPr>
-          <a:xfrm>
-            <a:off x="8301533" y="4782312"/>
-            <a:ext cx="402336" cy="402336"/>
-          </a:xfrm>
-          <a:prstGeom prst="roundRect">
-            <a:avLst>
-              <a:gd name="adj" fmla="val 22727"/>
+              <a:gd name="adj" fmla="val 23810"/>
             </a:avLst>
           </a:prstGeom>
           <a:solidFill>
@@ -8524,14 +7506,14 @@
       </p:sp>
       <p:sp>
         <p:nvSpPr>
-          <p:cNvPr id="40" name="Text 37"/>
-          <p:cNvSpPr/>
-          <p:nvPr/>
-        </p:nvSpPr>
-        <p:spPr>
-          <a:xfrm>
-            <a:off x="8301533" y="4782312"/>
-            <a:ext cx="402336" cy="402336"/>
+          <p:cNvPr id="33" name="Text 30"/>
+          <p:cNvSpPr/>
+          <p:nvPr/>
+        </p:nvSpPr>
+        <p:spPr>
+          <a:xfrm>
+            <a:off x="8234477" y="4604004"/>
+            <a:ext cx="384048" cy="384048"/>
           </a:xfrm>
           <a:prstGeom prst="rect">
             <a:avLst/>
@@ -8547,7 +7529,7 @@
               <a:buNone/>
             </a:pPr>
             <a:r>
-              <a:rPr lang="en-US" sz="1300" b="1" dirty="0">
+              <a:rPr lang="en-US" sz="1250" b="1" dirty="0">
                 <a:solidFill>
                   <a:srgbClr val="2F4B7C"/>
                 </a:solidFill>
@@ -8557,20 +7539,20 @@
               </a:rPr>
               <a:t>⌗</a:t>
             </a:r>
-            <a:endParaRPr lang="en-US" sz="1300" dirty="0"/>
-          </a:p>
-        </p:txBody>
-      </p:sp>
-      <p:sp>
-        <p:nvSpPr>
-          <p:cNvPr id="41" name="Text 38"/>
-          <p:cNvSpPr/>
-          <p:nvPr/>
-        </p:nvSpPr>
-        <p:spPr>
-          <a:xfrm>
-            <a:off x="8886749" y="4379976"/>
-            <a:ext cx="2399690" cy="201168"/>
+            <a:endParaRPr lang="en-US" sz="1250" dirty="0"/>
+          </a:p>
+        </p:txBody>
+      </p:sp>
+      <p:sp>
+        <p:nvSpPr>
+          <p:cNvPr id="34" name="Text 31"/>
+          <p:cNvSpPr/>
+          <p:nvPr/>
+        </p:nvSpPr>
+        <p:spPr>
+          <a:xfrm>
+            <a:off x="8819693" y="4549140"/>
+            <a:ext cx="2686202" cy="201168"/>
           </a:xfrm>
           <a:prstGeom prst="rect">
             <a:avLst/>
@@ -8602,30 +7584,30 @@
       </p:sp>
       <p:sp>
         <p:nvSpPr>
-          <p:cNvPr id="42" name="Text 39"/>
-          <p:cNvSpPr/>
-          <p:nvPr/>
-        </p:nvSpPr>
-        <p:spPr>
-          <a:xfrm>
-            <a:off x="8886749" y="4581144"/>
-            <a:ext cx="2399690" cy="256032"/>
-          </a:xfrm>
-          <a:prstGeom prst="rect">
-            <a:avLst/>
-          </a:prstGeom>
-          <a:noFill/>
-          <a:ln/>
-        </p:spPr>
-        <p:txBody>
-          <a:bodyPr wrap="square" rtlCol="0" anchor="ctr"/>
-          <a:lstStyle/>
-          <a:p>
-            <a:pPr indent="0" marL="0">
-              <a:buNone/>
-            </a:pPr>
-            <a:r>
-              <a:rPr lang="en-US" sz="1300" b="1" dirty="0">
+          <p:cNvPr id="35" name="Text 32"/>
+          <p:cNvSpPr/>
+          <p:nvPr/>
+        </p:nvSpPr>
+        <p:spPr>
+          <a:xfrm>
+            <a:off x="8819693" y="4750308"/>
+            <a:ext cx="2686202" cy="256032"/>
+          </a:xfrm>
+          <a:prstGeom prst="rect">
+            <a:avLst/>
+          </a:prstGeom>
+          <a:noFill/>
+          <a:ln/>
+        </p:spPr>
+        <p:txBody>
+          <a:bodyPr wrap="square" rtlCol="0" anchor="ctr"/>
+          <a:lstStyle/>
+          <a:p>
+            <a:pPr indent="0" marL="0">
+              <a:buNone/>
+            </a:pPr>
+            <a:r>
+              <a:rPr lang="en-US" sz="1350" b="1" dirty="0">
                 <a:solidFill>
                   <a:srgbClr val="15130F"/>
                 </a:solidFill>
@@ -8635,20 +7617,20 @@
               </a:rPr>
               <a:t>편집 가능 PPTX</a:t>
             </a:r>
-            <a:endParaRPr lang="en-US" sz="1300" dirty="0"/>
-          </a:p>
-        </p:txBody>
-      </p:sp>
-      <p:sp>
-        <p:nvSpPr>
-          <p:cNvPr id="43" name="Text 40"/>
-          <p:cNvSpPr/>
-          <p:nvPr/>
-        </p:nvSpPr>
-        <p:spPr>
-          <a:xfrm>
-            <a:off x="8886749" y="4837176"/>
-            <a:ext cx="2399690" cy="768096"/>
+            <a:endParaRPr lang="en-US" sz="1350" dirty="0"/>
+          </a:p>
+        </p:txBody>
+      </p:sp>
+      <p:sp>
+        <p:nvSpPr>
+          <p:cNvPr id="36" name="Text 33"/>
+          <p:cNvSpPr/>
+          <p:nvPr/>
+        </p:nvSpPr>
+        <p:spPr>
+          <a:xfrm>
+            <a:off x="8819693" y="5024628"/>
+            <a:ext cx="2686202" cy="758952"/>
           </a:xfrm>
           <a:prstGeom prst="rect">
             <a:avLst/>
@@ -8712,117 +7694,7 @@
       </p:grpSpPr>
       <p:sp>
         <p:nvSpPr>
-          <p:cNvPr id="2" name="Shape 0"/>
-          <p:cNvSpPr/>
-          <p:nvPr/>
-        </p:nvSpPr>
-        <p:spPr>
-          <a:xfrm>
-            <a:off x="0" y="4389120"/>
-            <a:ext cx="12191695" cy="2478024"/>
-          </a:xfrm>
-          <a:prstGeom prst="rect">
-            <a:avLst/>
-          </a:prstGeom>
-          <a:solidFill>
-            <a:srgbClr val="15130F">
-              <a:alpha val="1000"/>
-            </a:srgbClr>
-          </a:solidFill>
-          <a:ln/>
-        </p:spPr>
-      </p:sp>
-      <p:sp>
-        <p:nvSpPr>
-          <p:cNvPr id="3" name="Shape 1"/>
-          <p:cNvSpPr/>
-          <p:nvPr/>
-        </p:nvSpPr>
-        <p:spPr>
-          <a:xfrm>
-            <a:off x="0" y="4882896"/>
-            <a:ext cx="12191695" cy="1984248"/>
-          </a:xfrm>
-          <a:prstGeom prst="rect">
-            <a:avLst/>
-          </a:prstGeom>
-          <a:solidFill>
-            <a:srgbClr val="15130F">
-              <a:alpha val="2000"/>
-            </a:srgbClr>
-          </a:solidFill>
-          <a:ln/>
-        </p:spPr>
-      </p:sp>
-      <p:sp>
-        <p:nvSpPr>
-          <p:cNvPr id="4" name="Shape 2"/>
-          <p:cNvSpPr/>
-          <p:nvPr/>
-        </p:nvSpPr>
-        <p:spPr>
-          <a:xfrm>
-            <a:off x="0" y="5376672"/>
-            <a:ext cx="12191695" cy="1490472"/>
-          </a:xfrm>
-          <a:prstGeom prst="rect">
-            <a:avLst/>
-          </a:prstGeom>
-          <a:solidFill>
-            <a:srgbClr val="15130F">
-              <a:alpha val="3000"/>
-            </a:srgbClr>
-          </a:solidFill>
-          <a:ln/>
-        </p:spPr>
-      </p:sp>
-      <p:sp>
-        <p:nvSpPr>
-          <p:cNvPr id="5" name="Shape 3"/>
-          <p:cNvSpPr/>
-          <p:nvPr/>
-        </p:nvSpPr>
-        <p:spPr>
-          <a:xfrm>
-            <a:off x="0" y="5870448"/>
-            <a:ext cx="12191695" cy="996696"/>
-          </a:xfrm>
-          <a:prstGeom prst="rect">
-            <a:avLst/>
-          </a:prstGeom>
-          <a:solidFill>
-            <a:srgbClr val="15130F">
-              <a:alpha val="4000"/>
-            </a:srgbClr>
-          </a:solidFill>
-          <a:ln/>
-        </p:spPr>
-      </p:sp>
-      <p:sp>
-        <p:nvSpPr>
-          <p:cNvPr id="6" name="Shape 4"/>
-          <p:cNvSpPr/>
-          <p:nvPr/>
-        </p:nvSpPr>
-        <p:spPr>
-          <a:xfrm>
-            <a:off x="0" y="6364224"/>
-            <a:ext cx="12191695" cy="502920"/>
-          </a:xfrm>
-          <a:prstGeom prst="rect">
-            <a:avLst/>
-          </a:prstGeom>
-          <a:solidFill>
-            <a:srgbClr val="15130F">
-              <a:alpha val="5000"/>
-            </a:srgbClr>
-          </a:solidFill>
-          <a:ln/>
-        </p:spPr>
-      </p:sp>
-      <p:sp>
-        <p:nvSpPr>
-          <p:cNvPr id="8" name="Text 5"/>
+          <p:cNvPr id="3" name="Text 0"/>
           <p:cNvSpPr/>
           <p:nvPr/>
         </p:nvSpPr>
@@ -8861,7 +7733,7 @@
       </p:sp>
       <p:sp>
         <p:nvSpPr>
-          <p:cNvPr id="9" name="Text 6"/>
+          <p:cNvPr id="4" name="Text 1"/>
           <p:cNvSpPr/>
           <p:nvPr/>
         </p:nvSpPr>
@@ -8900,7 +7772,7 @@
       </p:sp>
       <p:sp>
         <p:nvSpPr>
-          <p:cNvPr id="10" name="Text 7"/>
+          <p:cNvPr id="5" name="Text 2"/>
           <p:cNvSpPr/>
           <p:nvPr/>
         </p:nvSpPr>
@@ -8939,52 +7811,18 @@
       </p:sp>
       <p:sp>
         <p:nvSpPr>
-          <p:cNvPr id="11" name="Shape 8"/>
-          <p:cNvSpPr/>
-          <p:nvPr/>
-        </p:nvSpPr>
-        <p:spPr>
-          <a:xfrm>
-            <a:off x="1843888" y="3383280"/>
-            <a:ext cx="2651760" cy="914400"/>
+          <p:cNvPr id="6" name="Shape 3"/>
+          <p:cNvSpPr/>
+          <p:nvPr/>
+        </p:nvSpPr>
+        <p:spPr>
+          <a:xfrm>
+            <a:off x="1935328" y="3483864"/>
+            <a:ext cx="384048" cy="384048"/>
           </a:xfrm>
           <a:prstGeom prst="roundRect">
             <a:avLst>
-              <a:gd name="adj" fmla="val 8000"/>
-            </a:avLst>
-          </a:prstGeom>
-          <a:solidFill>
-            <a:srgbClr val="FFFFFB"/>
-          </a:solidFill>
-          <a:ln w="12700">
-            <a:solidFill>
-              <a:srgbClr val="D8D0C1"/>
-            </a:solidFill>
-            <a:prstDash val="solid"/>
-          </a:ln>
-          <a:effectLst>
-            <a:outerShdw sx="100000" sy="100000" kx="0" ky="0" algn="bl" rotWithShape="0" blurRad="152400" dist="25400" dir="5400000">
-              <a:srgbClr val="8A8272">
-                <a:alpha val="22000"/>
-              </a:srgbClr>
-            </a:outerShdw>
-          </a:effectLst>
-        </p:spPr>
-      </p:sp>
-      <p:sp>
-        <p:nvSpPr>
-          <p:cNvPr id="12" name="Shape 9"/>
-          <p:cNvSpPr/>
-          <p:nvPr/>
-        </p:nvSpPr>
-        <p:spPr>
-          <a:xfrm>
-            <a:off x="2063344" y="3639312"/>
-            <a:ext cx="402336" cy="402336"/>
-          </a:xfrm>
-          <a:prstGeom prst="roundRect">
-            <a:avLst>
-              <a:gd name="adj" fmla="val 22727"/>
+              <a:gd name="adj" fmla="val 23810"/>
             </a:avLst>
           </a:prstGeom>
           <a:solidFill>
@@ -9000,14 +7838,14 @@
       </p:sp>
       <p:sp>
         <p:nvSpPr>
-          <p:cNvPr id="13" name="Text 10"/>
-          <p:cNvSpPr/>
-          <p:nvPr/>
-        </p:nvSpPr>
-        <p:spPr>
-          <a:xfrm>
-            <a:off x="2063344" y="3639312"/>
-            <a:ext cx="402336" cy="402336"/>
+          <p:cNvPr id="7" name="Text 4"/>
+          <p:cNvSpPr/>
+          <p:nvPr/>
+        </p:nvSpPr>
+        <p:spPr>
+          <a:xfrm>
+            <a:off x="1935328" y="3483864"/>
+            <a:ext cx="384048" cy="384048"/>
           </a:xfrm>
           <a:prstGeom prst="rect">
             <a:avLst/>
@@ -9023,7 +7861,7 @@
               <a:buNone/>
             </a:pPr>
             <a:r>
-              <a:rPr lang="en-US" sz="1300" b="1" dirty="0">
+              <a:rPr lang="en-US" sz="1250" b="1" dirty="0">
                 <a:solidFill>
                   <a:srgbClr val="2F4B7C"/>
                 </a:solidFill>
@@ -9033,36 +7871,36 @@
               </a:rPr>
               <a:t>✦</a:t>
             </a:r>
-            <a:endParaRPr lang="en-US" sz="1300" dirty="0"/>
-          </a:p>
-        </p:txBody>
-      </p:sp>
-      <p:sp>
-        <p:nvSpPr>
-          <p:cNvPr id="14" name="Text 11"/>
-          <p:cNvSpPr/>
-          <p:nvPr/>
-        </p:nvSpPr>
-        <p:spPr>
-          <a:xfrm>
-            <a:off x="2648560" y="3511296"/>
-            <a:ext cx="1627632" cy="256032"/>
-          </a:xfrm>
-          <a:prstGeom prst="rect">
-            <a:avLst/>
-          </a:prstGeom>
-          <a:noFill/>
-          <a:ln/>
-        </p:spPr>
-        <p:txBody>
-          <a:bodyPr wrap="square" rtlCol="0" anchor="ctr"/>
-          <a:lstStyle/>
-          <a:p>
-            <a:pPr indent="0" marL="0">
-              <a:buNone/>
-            </a:pPr>
-            <a:r>
-              <a:rPr lang="en-US" sz="1300" b="1" dirty="0">
+            <a:endParaRPr lang="en-US" sz="1250" dirty="0"/>
+          </a:p>
+        </p:txBody>
+      </p:sp>
+      <p:sp>
+        <p:nvSpPr>
+          <p:cNvPr id="8" name="Text 5"/>
+          <p:cNvSpPr/>
+          <p:nvPr/>
+        </p:nvSpPr>
+        <p:spPr>
+          <a:xfrm>
+            <a:off x="2520544" y="3429000"/>
+            <a:ext cx="1883664" cy="256032"/>
+          </a:xfrm>
+          <a:prstGeom prst="rect">
+            <a:avLst/>
+          </a:prstGeom>
+          <a:noFill/>
+          <a:ln/>
+        </p:spPr>
+        <p:txBody>
+          <a:bodyPr wrap="square" rtlCol="0" anchor="ctr"/>
+          <a:lstStyle/>
+          <a:p>
+            <a:pPr indent="0" marL="0">
+              <a:buNone/>
+            </a:pPr>
+            <a:r>
+              <a:rPr lang="en-US" sz="1350" b="1" dirty="0">
                 <a:solidFill>
                   <a:srgbClr val="15130F"/>
                 </a:solidFill>
@@ -9072,20 +7910,20 @@
               </a:rPr>
               <a:t>둘러보기</a:t>
             </a:r>
-            <a:endParaRPr lang="en-US" sz="1300" dirty="0"/>
-          </a:p>
-        </p:txBody>
-      </p:sp>
-      <p:sp>
-        <p:nvSpPr>
-          <p:cNvPr id="15" name="Text 12"/>
-          <p:cNvSpPr/>
-          <p:nvPr/>
-        </p:nvSpPr>
-        <p:spPr>
-          <a:xfrm>
-            <a:off x="2648560" y="3767328"/>
-            <a:ext cx="1627632" cy="420624"/>
+            <a:endParaRPr lang="en-US" sz="1350" dirty="0"/>
+          </a:p>
+        </p:txBody>
+      </p:sp>
+      <p:sp>
+        <p:nvSpPr>
+          <p:cNvPr id="9" name="Text 6"/>
+          <p:cNvSpPr/>
+          <p:nvPr/>
+        </p:nvSpPr>
+        <p:spPr>
+          <a:xfrm>
+            <a:off x="2520544" y="3703320"/>
+            <a:ext cx="1883664" cy="594360"/>
           </a:xfrm>
           <a:prstGeom prst="rect">
             <a:avLst/>
@@ -9117,52 +7955,18 @@
       </p:sp>
       <p:sp>
         <p:nvSpPr>
-          <p:cNvPr id="16" name="Shape 13"/>
-          <p:cNvSpPr/>
-          <p:nvPr/>
-        </p:nvSpPr>
-        <p:spPr>
-          <a:xfrm>
-            <a:off x="4769968" y="3383280"/>
-            <a:ext cx="2651760" cy="914400"/>
+          <p:cNvPr id="10" name="Shape 7"/>
+          <p:cNvSpPr/>
+          <p:nvPr/>
+        </p:nvSpPr>
+        <p:spPr>
+          <a:xfrm>
+            <a:off x="4861408" y="3483864"/>
+            <a:ext cx="384048" cy="384048"/>
           </a:xfrm>
           <a:prstGeom prst="roundRect">
             <a:avLst>
-              <a:gd name="adj" fmla="val 8000"/>
-            </a:avLst>
-          </a:prstGeom>
-          <a:solidFill>
-            <a:srgbClr val="FFFFFB"/>
-          </a:solidFill>
-          <a:ln w="12700">
-            <a:solidFill>
-              <a:srgbClr val="D8D0C1"/>
-            </a:solidFill>
-            <a:prstDash val="solid"/>
-          </a:ln>
-          <a:effectLst>
-            <a:outerShdw sx="100000" sy="100000" kx="0" ky="0" algn="bl" rotWithShape="0" blurRad="152400" dist="25400" dir="5400000">
-              <a:srgbClr val="8A8272">
-                <a:alpha val="22000"/>
-              </a:srgbClr>
-            </a:outerShdw>
-          </a:effectLst>
-        </p:spPr>
-      </p:sp>
-      <p:sp>
-        <p:nvSpPr>
-          <p:cNvPr id="17" name="Shape 14"/>
-          <p:cNvSpPr/>
-          <p:nvPr/>
-        </p:nvSpPr>
-        <p:spPr>
-          <a:xfrm>
-            <a:off x="4989424" y="3639312"/>
-            <a:ext cx="402336" cy="402336"/>
-          </a:xfrm>
-          <a:prstGeom prst="roundRect">
-            <a:avLst>
-              <a:gd name="adj" fmla="val 22727"/>
+              <a:gd name="adj" fmla="val 23810"/>
             </a:avLst>
           </a:prstGeom>
           <a:solidFill>
@@ -9178,14 +7982,14 @@
       </p:sp>
       <p:sp>
         <p:nvSpPr>
-          <p:cNvPr id="18" name="Text 15"/>
-          <p:cNvSpPr/>
-          <p:nvPr/>
-        </p:nvSpPr>
-        <p:spPr>
-          <a:xfrm>
-            <a:off x="4989424" y="3639312"/>
-            <a:ext cx="402336" cy="402336"/>
+          <p:cNvPr id="11" name="Text 8"/>
+          <p:cNvSpPr/>
+          <p:nvPr/>
+        </p:nvSpPr>
+        <p:spPr>
+          <a:xfrm>
+            <a:off x="4861408" y="3483864"/>
+            <a:ext cx="384048" cy="384048"/>
           </a:xfrm>
           <a:prstGeom prst="rect">
             <a:avLst/>
@@ -9201,7 +8005,7 @@
               <a:buNone/>
             </a:pPr>
             <a:r>
-              <a:rPr lang="en-US" sz="1300" b="1" dirty="0">
+              <a:rPr lang="en-US" sz="1250" b="1" dirty="0">
                 <a:solidFill>
                   <a:srgbClr val="2F4B7C"/>
                 </a:solidFill>
@@ -9211,36 +8015,36 @@
               </a:rPr>
               <a:t>⧉</a:t>
             </a:r>
-            <a:endParaRPr lang="en-US" sz="1300" dirty="0"/>
-          </a:p>
-        </p:txBody>
-      </p:sp>
-      <p:sp>
-        <p:nvSpPr>
-          <p:cNvPr id="19" name="Text 16"/>
-          <p:cNvSpPr/>
-          <p:nvPr/>
-        </p:nvSpPr>
-        <p:spPr>
-          <a:xfrm>
-            <a:off x="5574640" y="3511296"/>
-            <a:ext cx="1627632" cy="256032"/>
-          </a:xfrm>
-          <a:prstGeom prst="rect">
-            <a:avLst/>
-          </a:prstGeom>
-          <a:noFill/>
-          <a:ln/>
-        </p:spPr>
-        <p:txBody>
-          <a:bodyPr wrap="square" rtlCol="0" anchor="ctr"/>
-          <a:lstStyle/>
-          <a:p>
-            <a:pPr indent="0" marL="0">
-              <a:buNone/>
-            </a:pPr>
-            <a:r>
-              <a:rPr lang="en-US" sz="1300" b="1" dirty="0">
+            <a:endParaRPr lang="en-US" sz="1250" dirty="0"/>
+          </a:p>
+        </p:txBody>
+      </p:sp>
+      <p:sp>
+        <p:nvSpPr>
+          <p:cNvPr id="12" name="Text 9"/>
+          <p:cNvSpPr/>
+          <p:nvPr/>
+        </p:nvSpPr>
+        <p:spPr>
+          <a:xfrm>
+            <a:off x="5446624" y="3429000"/>
+            <a:ext cx="1883664" cy="256032"/>
+          </a:xfrm>
+          <a:prstGeom prst="rect">
+            <a:avLst/>
+          </a:prstGeom>
+          <a:noFill/>
+          <a:ln/>
+        </p:spPr>
+        <p:txBody>
+          <a:bodyPr wrap="square" rtlCol="0" anchor="ctr"/>
+          <a:lstStyle/>
+          <a:p>
+            <a:pPr indent="0" marL="0">
+              <a:buNone/>
+            </a:pPr>
+            <a:r>
+              <a:rPr lang="en-US" sz="1350" b="1" dirty="0">
                 <a:solidFill>
                   <a:srgbClr val="15130F"/>
                 </a:solidFill>
@@ -9250,20 +8054,20 @@
               </a:rPr>
               <a:t>에이전트 진입</a:t>
             </a:r>
-            <a:endParaRPr lang="en-US" sz="1300" dirty="0"/>
-          </a:p>
-        </p:txBody>
-      </p:sp>
-      <p:sp>
-        <p:nvSpPr>
-          <p:cNvPr id="20" name="Text 17"/>
-          <p:cNvSpPr/>
-          <p:nvPr/>
-        </p:nvSpPr>
-        <p:spPr>
-          <a:xfrm>
-            <a:off x="5574640" y="3767328"/>
-            <a:ext cx="1627632" cy="420624"/>
+            <a:endParaRPr lang="en-US" sz="1350" dirty="0"/>
+          </a:p>
+        </p:txBody>
+      </p:sp>
+      <p:sp>
+        <p:nvSpPr>
+          <p:cNvPr id="13" name="Text 10"/>
+          <p:cNvSpPr/>
+          <p:nvPr/>
+        </p:nvSpPr>
+        <p:spPr>
+          <a:xfrm>
+            <a:off x="5446624" y="3703320"/>
+            <a:ext cx="1883664" cy="594360"/>
           </a:xfrm>
           <a:prstGeom prst="rect">
             <a:avLst/>
@@ -9295,52 +8099,18 @@
       </p:sp>
       <p:sp>
         <p:nvSpPr>
-          <p:cNvPr id="21" name="Shape 18"/>
-          <p:cNvSpPr/>
-          <p:nvPr/>
-        </p:nvSpPr>
-        <p:spPr>
-          <a:xfrm>
-            <a:off x="7696048" y="3383280"/>
-            <a:ext cx="2651760" cy="914400"/>
+          <p:cNvPr id="14" name="Shape 11"/>
+          <p:cNvSpPr/>
+          <p:nvPr/>
+        </p:nvSpPr>
+        <p:spPr>
+          <a:xfrm>
+            <a:off x="7787488" y="3483864"/>
+            <a:ext cx="384048" cy="384048"/>
           </a:xfrm>
           <a:prstGeom prst="roundRect">
             <a:avLst>
-              <a:gd name="adj" fmla="val 8000"/>
-            </a:avLst>
-          </a:prstGeom>
-          <a:solidFill>
-            <a:srgbClr val="FFFFFB"/>
-          </a:solidFill>
-          <a:ln w="12700">
-            <a:solidFill>
-              <a:srgbClr val="D8D0C1"/>
-            </a:solidFill>
-            <a:prstDash val="solid"/>
-          </a:ln>
-          <a:effectLst>
-            <a:outerShdw sx="100000" sy="100000" kx="0" ky="0" algn="bl" rotWithShape="0" blurRad="152400" dist="25400" dir="5400000">
-              <a:srgbClr val="8A8272">
-                <a:alpha val="22000"/>
-              </a:srgbClr>
-            </a:outerShdw>
-          </a:effectLst>
-        </p:spPr>
-      </p:sp>
-      <p:sp>
-        <p:nvSpPr>
-          <p:cNvPr id="22" name="Shape 19"/>
-          <p:cNvSpPr/>
-          <p:nvPr/>
-        </p:nvSpPr>
-        <p:spPr>
-          <a:xfrm>
-            <a:off x="7915504" y="3639312"/>
-            <a:ext cx="402336" cy="402336"/>
-          </a:xfrm>
-          <a:prstGeom prst="roundRect">
-            <a:avLst>
-              <a:gd name="adj" fmla="val 22727"/>
+              <a:gd name="adj" fmla="val 23810"/>
             </a:avLst>
           </a:prstGeom>
           <a:solidFill>
@@ -9356,14 +8126,14 @@
       </p:sp>
       <p:sp>
         <p:nvSpPr>
-          <p:cNvPr id="23" name="Text 20"/>
-          <p:cNvSpPr/>
-          <p:nvPr/>
-        </p:nvSpPr>
-        <p:spPr>
-          <a:xfrm>
-            <a:off x="7915504" y="3639312"/>
-            <a:ext cx="402336" cy="402336"/>
+          <p:cNvPr id="15" name="Text 12"/>
+          <p:cNvSpPr/>
+          <p:nvPr/>
+        </p:nvSpPr>
+        <p:spPr>
+          <a:xfrm>
+            <a:off x="7787488" y="3483864"/>
+            <a:ext cx="384048" cy="384048"/>
           </a:xfrm>
           <a:prstGeom prst="rect">
             <a:avLst/>
@@ -9379,7 +8149,7 @@
               <a:buNone/>
             </a:pPr>
             <a:r>
-              <a:rPr lang="en-US" sz="1300" b="1" dirty="0">
+              <a:rPr lang="en-US" sz="1250" b="1" dirty="0">
                 <a:solidFill>
                   <a:srgbClr val="2F4B7C"/>
                 </a:solidFill>
@@ -9389,36 +8159,36 @@
               </a:rPr>
               <a:t>⌗</a:t>
             </a:r>
-            <a:endParaRPr lang="en-US" sz="1300" dirty="0"/>
-          </a:p>
-        </p:txBody>
-      </p:sp>
-      <p:sp>
-        <p:nvSpPr>
-          <p:cNvPr id="24" name="Text 21"/>
-          <p:cNvSpPr/>
-          <p:nvPr/>
-        </p:nvSpPr>
-        <p:spPr>
-          <a:xfrm>
-            <a:off x="8500720" y="3511296"/>
-            <a:ext cx="1627632" cy="256032"/>
-          </a:xfrm>
-          <a:prstGeom prst="rect">
-            <a:avLst/>
-          </a:prstGeom>
-          <a:noFill/>
-          <a:ln/>
-        </p:spPr>
-        <p:txBody>
-          <a:bodyPr wrap="square" rtlCol="0" anchor="ctr"/>
-          <a:lstStyle/>
-          <a:p>
-            <a:pPr indent="0" marL="0">
-              <a:buNone/>
-            </a:pPr>
-            <a:r>
-              <a:rPr lang="en-US" sz="1300" b="1" dirty="0">
+            <a:endParaRPr lang="en-US" sz="1250" dirty="0"/>
+          </a:p>
+        </p:txBody>
+      </p:sp>
+      <p:sp>
+        <p:nvSpPr>
+          <p:cNvPr id="16" name="Text 13"/>
+          <p:cNvSpPr/>
+          <p:nvPr/>
+        </p:nvSpPr>
+        <p:spPr>
+          <a:xfrm>
+            <a:off x="8372704" y="3429000"/>
+            <a:ext cx="1883664" cy="256032"/>
+          </a:xfrm>
+          <a:prstGeom prst="rect">
+            <a:avLst/>
+          </a:prstGeom>
+          <a:noFill/>
+          <a:ln/>
+        </p:spPr>
+        <p:txBody>
+          <a:bodyPr wrap="square" rtlCol="0" anchor="ctr"/>
+          <a:lstStyle/>
+          <a:p>
+            <a:pPr indent="0" marL="0">
+              <a:buNone/>
+            </a:pPr>
+            <a:r>
+              <a:rPr lang="en-US" sz="1350" b="1" dirty="0">
                 <a:solidFill>
                   <a:srgbClr val="15130F"/>
                 </a:solidFill>
@@ -9428,20 +8198,20 @@
               </a:rPr>
               <a:t>편집 PPTX</a:t>
             </a:r>
-            <a:endParaRPr lang="en-US" sz="1300" dirty="0"/>
-          </a:p>
-        </p:txBody>
-      </p:sp>
-      <p:sp>
-        <p:nvSpPr>
-          <p:cNvPr id="25" name="Text 22"/>
-          <p:cNvSpPr/>
-          <p:nvPr/>
-        </p:nvSpPr>
-        <p:spPr>
-          <a:xfrm>
-            <a:off x="8500720" y="3767328"/>
-            <a:ext cx="1627632" cy="420624"/>
+            <a:endParaRPr lang="en-US" sz="1350" dirty="0"/>
+          </a:p>
+        </p:txBody>
+      </p:sp>
+      <p:sp>
+        <p:nvSpPr>
+          <p:cNvPr id="17" name="Text 14"/>
+          <p:cNvSpPr/>
+          <p:nvPr/>
+        </p:nvSpPr>
+        <p:spPr>
+          <a:xfrm>
+            <a:off x="8372704" y="3703320"/>
+            <a:ext cx="1883664" cy="594360"/>
           </a:xfrm>
           <a:prstGeom prst="rect">
             <a:avLst/>

--- a/decks/askewly-design-intro/export/askewly-design-intro.bespoke.pptx
+++ b/decks/askewly-design-intro/export/askewly-design-intro.bespoke.pptx
@@ -2693,48 +2693,39 @@
           </a:ln>
         </p:spPr>
       </p:sp>
-      <p:sp>
-        <p:nvSpPr>
-          <p:cNvPr id="23" name="Text 20"/>
-          <p:cNvSpPr/>
-          <p:nvPr/>
-        </p:nvSpPr>
-        <p:spPr>
-          <a:xfrm>
-            <a:off x="685800" y="4604004"/>
-            <a:ext cx="384048" cy="384048"/>
-          </a:xfrm>
-          <a:prstGeom prst="rect">
-            <a:avLst/>
-          </a:prstGeom>
-          <a:noFill/>
-          <a:ln/>
-        </p:spPr>
-        <p:txBody>
-          <a:bodyPr wrap="square" lIns="0" tIns="0" rIns="0" bIns="0" rtlCol="0" anchor="ctr"/>
-          <a:lstStyle/>
-          <a:p>
-            <a:pPr algn="ctr" indent="0" marL="0">
-              <a:buNone/>
-            </a:pPr>
-            <a:r>
-              <a:rPr lang="en-US" sz="1250" b="1" dirty="0">
-                <a:solidFill>
-                  <a:srgbClr val="2F4B7C"/>
-                </a:solidFill>
-                <a:latin typeface="Pretendard" pitchFamily="34" charset="0"/>
-                <a:ea typeface="Pretendard" pitchFamily="34" charset="-122"/>
-                <a:cs typeface="Pretendard" pitchFamily="34" charset="-120"/>
-              </a:rPr>
-              <a:t>✦</a:t>
-            </a:r>
-            <a:endParaRPr lang="en-US" sz="1250" dirty="0"/>
-          </a:p>
-        </p:txBody>
-      </p:sp>
-      <p:sp>
-        <p:nvSpPr>
-          <p:cNvPr id="24" name="Text 21"/>
+      <p:pic>
+        <p:nvPicPr>
+          <p:cNvPr id="23" name="Image 0" descr="preencoded.png">    </p:cNvPr>
+          <p:cNvPicPr>
+            <a:picLocks noChangeAspect="1"/>
+          </p:cNvPicPr>
+          <p:nvPr/>
+        </p:nvPicPr>
+        <p:blipFill>
+          <a:blip r:embed="rId1">
+            <a:extLst>
+              <a:ext uri="{96DAC541-7B7A-43D3-8B79-37D633B846F1}">
+                <asvg:svgBlip xmlns:asvg="http://schemas.microsoft.com/office/drawing/2016/SVG/main" r:embed="rId2"/>
+              </a:ext>
+            </a:extLst>
+          </a:blip>
+          <a:stretch>
+            <a:fillRect/>
+          </a:stretch>
+        </p:blipFill>
+        <p:spPr>
+          <a:xfrm>
+            <a:off x="777972" y="4696176"/>
+            <a:ext cx="199705" cy="199705"/>
+          </a:xfrm>
+          <a:prstGeom prst="rect">
+            <a:avLst/>
+          </a:prstGeom>
+        </p:spPr>
+      </p:pic>
+      <p:sp>
+        <p:nvSpPr>
+          <p:cNvPr id="24" name="Text 20"/>
           <p:cNvSpPr/>
           <p:nvPr/>
         </p:nvSpPr>
@@ -2773,7 +2764,7 @@
       </p:sp>
       <p:sp>
         <p:nvSpPr>
-          <p:cNvPr id="25" name="Text 22"/>
+          <p:cNvPr id="25" name="Text 21"/>
           <p:cNvSpPr/>
           <p:nvPr/>
         </p:nvSpPr>
@@ -2812,7 +2803,7 @@
       </p:sp>
       <p:sp>
         <p:nvSpPr>
-          <p:cNvPr id="26" name="Text 23"/>
+          <p:cNvPr id="26" name="Text 22"/>
           <p:cNvSpPr/>
           <p:nvPr/>
         </p:nvSpPr>
@@ -2851,7 +2842,7 @@
       </p:sp>
       <p:sp>
         <p:nvSpPr>
-          <p:cNvPr id="27" name="Shape 24"/>
+          <p:cNvPr id="27" name="Shape 23"/>
           <p:cNvSpPr/>
           <p:nvPr/>
         </p:nvSpPr>
@@ -2876,48 +2867,39 @@
           </a:ln>
         </p:spPr>
       </p:sp>
-      <p:sp>
-        <p:nvSpPr>
-          <p:cNvPr id="28" name="Text 25"/>
-          <p:cNvSpPr/>
-          <p:nvPr/>
-        </p:nvSpPr>
-        <p:spPr>
-          <a:xfrm>
-            <a:off x="4460138" y="4604004"/>
-            <a:ext cx="384048" cy="384048"/>
-          </a:xfrm>
-          <a:prstGeom prst="rect">
-            <a:avLst/>
-          </a:prstGeom>
-          <a:noFill/>
-          <a:ln/>
-        </p:spPr>
-        <p:txBody>
-          <a:bodyPr wrap="square" lIns="0" tIns="0" rIns="0" bIns="0" rtlCol="0" anchor="ctr"/>
-          <a:lstStyle/>
-          <a:p>
-            <a:pPr algn="ctr" indent="0" marL="0">
-              <a:buNone/>
-            </a:pPr>
-            <a:r>
-              <a:rPr lang="en-US" sz="1250" b="1" dirty="0">
-                <a:solidFill>
-                  <a:srgbClr val="2F4B7C"/>
-                </a:solidFill>
-                <a:latin typeface="Pretendard" pitchFamily="34" charset="0"/>
-                <a:ea typeface="Pretendard" pitchFamily="34" charset="-122"/>
-                <a:cs typeface="Pretendard" pitchFamily="34" charset="-120"/>
-              </a:rPr>
-              <a:t>⧉</a:t>
-            </a:r>
-            <a:endParaRPr lang="en-US" sz="1250" dirty="0"/>
-          </a:p>
-        </p:txBody>
-      </p:sp>
-      <p:sp>
-        <p:nvSpPr>
-          <p:cNvPr id="29" name="Text 26"/>
+      <p:pic>
+        <p:nvPicPr>
+          <p:cNvPr id="28" name="Image 1" descr="preencoded.png">    </p:cNvPr>
+          <p:cNvPicPr>
+            <a:picLocks noChangeAspect="1"/>
+          </p:cNvPicPr>
+          <p:nvPr/>
+        </p:nvPicPr>
+        <p:blipFill>
+          <a:blip r:embed="rId3">
+            <a:extLst>
+              <a:ext uri="{96DAC541-7B7A-43D3-8B79-37D633B846F1}">
+                <asvg:svgBlip xmlns:asvg="http://schemas.microsoft.com/office/drawing/2016/SVG/main" r:embed="rId4"/>
+              </a:ext>
+            </a:extLst>
+          </a:blip>
+          <a:stretch>
+            <a:fillRect/>
+          </a:stretch>
+        </p:blipFill>
+        <p:spPr>
+          <a:xfrm>
+            <a:off x="4552310" y="4696176"/>
+            <a:ext cx="199705" cy="199705"/>
+          </a:xfrm>
+          <a:prstGeom prst="rect">
+            <a:avLst/>
+          </a:prstGeom>
+        </p:spPr>
+      </p:pic>
+      <p:sp>
+        <p:nvSpPr>
+          <p:cNvPr id="29" name="Text 24"/>
           <p:cNvSpPr/>
           <p:nvPr/>
         </p:nvSpPr>
@@ -2956,7 +2938,7 @@
       </p:sp>
       <p:sp>
         <p:nvSpPr>
-          <p:cNvPr id="30" name="Text 27"/>
+          <p:cNvPr id="30" name="Text 25"/>
           <p:cNvSpPr/>
           <p:nvPr/>
         </p:nvSpPr>
@@ -2995,7 +2977,7 @@
       </p:sp>
       <p:sp>
         <p:nvSpPr>
-          <p:cNvPr id="31" name="Text 28"/>
+          <p:cNvPr id="31" name="Text 26"/>
           <p:cNvSpPr/>
           <p:nvPr/>
         </p:nvSpPr>
@@ -3034,7 +3016,7 @@
       </p:sp>
       <p:sp>
         <p:nvSpPr>
-          <p:cNvPr id="32" name="Shape 29"/>
+          <p:cNvPr id="32" name="Shape 27"/>
           <p:cNvSpPr/>
           <p:nvPr/>
         </p:nvSpPr>
@@ -3059,48 +3041,39 @@
           </a:ln>
         </p:spPr>
       </p:sp>
-      <p:sp>
-        <p:nvSpPr>
-          <p:cNvPr id="33" name="Text 30"/>
-          <p:cNvSpPr/>
-          <p:nvPr/>
-        </p:nvSpPr>
-        <p:spPr>
-          <a:xfrm>
-            <a:off x="8234477" y="4604004"/>
-            <a:ext cx="384048" cy="384048"/>
-          </a:xfrm>
-          <a:prstGeom prst="rect">
-            <a:avLst/>
-          </a:prstGeom>
-          <a:noFill/>
-          <a:ln/>
-        </p:spPr>
-        <p:txBody>
-          <a:bodyPr wrap="square" lIns="0" tIns="0" rIns="0" bIns="0" rtlCol="0" anchor="ctr"/>
-          <a:lstStyle/>
-          <a:p>
-            <a:pPr algn="ctr" indent="0" marL="0">
-              <a:buNone/>
-            </a:pPr>
-            <a:r>
-              <a:rPr lang="en-US" sz="1250" b="1" dirty="0">
-                <a:solidFill>
-                  <a:srgbClr val="2F4B7C"/>
-                </a:solidFill>
-                <a:latin typeface="Pretendard" pitchFamily="34" charset="0"/>
-                <a:ea typeface="Pretendard" pitchFamily="34" charset="-122"/>
-                <a:cs typeface="Pretendard" pitchFamily="34" charset="-120"/>
-              </a:rPr>
-              <a:t>⇄</a:t>
-            </a:r>
-            <a:endParaRPr lang="en-US" sz="1250" dirty="0"/>
-          </a:p>
-        </p:txBody>
-      </p:sp>
-      <p:sp>
-        <p:nvSpPr>
-          <p:cNvPr id="34" name="Text 31"/>
+      <p:pic>
+        <p:nvPicPr>
+          <p:cNvPr id="33" name="Image 2" descr="preencoded.png">    </p:cNvPr>
+          <p:cNvPicPr>
+            <a:picLocks noChangeAspect="1"/>
+          </p:cNvPicPr>
+          <p:nvPr/>
+        </p:nvPicPr>
+        <p:blipFill>
+          <a:blip r:embed="rId5">
+            <a:extLst>
+              <a:ext uri="{96DAC541-7B7A-43D3-8B79-37D633B846F1}">
+                <asvg:svgBlip xmlns:asvg="http://schemas.microsoft.com/office/drawing/2016/SVG/main" r:embed="rId6"/>
+              </a:ext>
+            </a:extLst>
+          </a:blip>
+          <a:stretch>
+            <a:fillRect/>
+          </a:stretch>
+        </p:blipFill>
+        <p:spPr>
+          <a:xfrm>
+            <a:off x="8326648" y="4696176"/>
+            <a:ext cx="199705" cy="199705"/>
+          </a:xfrm>
+          <a:prstGeom prst="rect">
+            <a:avLst/>
+          </a:prstGeom>
+        </p:spPr>
+      </p:pic>
+      <p:sp>
+        <p:nvSpPr>
+          <p:cNvPr id="34" name="Text 28"/>
           <p:cNvSpPr/>
           <p:nvPr/>
         </p:nvSpPr>
@@ -3139,7 +3112,7 @@
       </p:sp>
       <p:sp>
         <p:nvSpPr>
-          <p:cNvPr id="35" name="Text 32"/>
+          <p:cNvPr id="35" name="Text 29"/>
           <p:cNvSpPr/>
           <p:nvPr/>
         </p:nvSpPr>
@@ -3178,7 +3151,7 @@
       </p:sp>
       <p:sp>
         <p:nvSpPr>
-          <p:cNvPr id="36" name="Text 33"/>
+          <p:cNvPr id="36" name="Text 30"/>
           <p:cNvSpPr/>
           <p:nvPr/>
         </p:nvSpPr>
@@ -3464,8 +3437,8 @@
         </p:nvSpPr>
         <p:spPr>
           <a:xfrm>
-            <a:off x="685800" y="2446020"/>
-            <a:ext cx="5158588" cy="0"/>
+            <a:off x="685800" y="2779776"/>
+            <a:ext cx="4998568" cy="0"/>
           </a:xfrm>
           <a:prstGeom prst="line">
             <a:avLst/>
@@ -3487,8 +3460,8 @@
         </p:nvSpPr>
         <p:spPr>
           <a:xfrm>
-            <a:off x="685800" y="2574036"/>
-            <a:ext cx="5158588" cy="512064"/>
+            <a:off x="685800" y="2907792"/>
+            <a:ext cx="4998568" cy="512064"/>
           </a:xfrm>
           <a:prstGeom prst="rect">
             <a:avLst/>
@@ -3526,8 +3499,8 @@
         </p:nvSpPr>
         <p:spPr>
           <a:xfrm>
-            <a:off x="685800" y="3122676"/>
-            <a:ext cx="5158588" cy="256032"/>
+            <a:off x="685800" y="3456432"/>
+            <a:ext cx="4998568" cy="256032"/>
           </a:xfrm>
           <a:prstGeom prst="rect">
             <a:avLst/>
@@ -3565,8 +3538,8 @@
         </p:nvSpPr>
         <p:spPr>
           <a:xfrm>
-            <a:off x="685800" y="3378708"/>
-            <a:ext cx="5158588" cy="457200"/>
+            <a:off x="685800" y="3712464"/>
+            <a:ext cx="4998568" cy="457200"/>
           </a:xfrm>
           <a:prstGeom prst="rect">
             <a:avLst/>
@@ -3604,8 +3577,8 @@
         </p:nvSpPr>
         <p:spPr>
           <a:xfrm>
-            <a:off x="6347308" y="2446020"/>
-            <a:ext cx="5158588" cy="0"/>
+            <a:off x="685800" y="4215384"/>
+            <a:ext cx="4998568" cy="0"/>
           </a:xfrm>
           <a:prstGeom prst="line">
             <a:avLst/>
@@ -3627,8 +3600,8 @@
         </p:nvSpPr>
         <p:spPr>
           <a:xfrm>
-            <a:off x="6347308" y="2574036"/>
-            <a:ext cx="5158588" cy="512064"/>
+            <a:off x="685800" y="4343400"/>
+            <a:ext cx="4998568" cy="512064"/>
           </a:xfrm>
           <a:prstGeom prst="rect">
             <a:avLst/>
@@ -3666,8 +3639,8 @@
         </p:nvSpPr>
         <p:spPr>
           <a:xfrm>
-            <a:off x="6347308" y="3122676"/>
-            <a:ext cx="5158588" cy="256032"/>
+            <a:off x="685800" y="4892040"/>
+            <a:ext cx="4998568" cy="256032"/>
           </a:xfrm>
           <a:prstGeom prst="rect">
             <a:avLst/>
@@ -3705,8 +3678,8 @@
         </p:nvSpPr>
         <p:spPr>
           <a:xfrm>
-            <a:off x="6347308" y="3378708"/>
-            <a:ext cx="5158588" cy="457200"/>
+            <a:off x="685800" y="5148072"/>
+            <a:ext cx="4998568" cy="457200"/>
           </a:xfrm>
           <a:prstGeom prst="rect">
             <a:avLst/>
@@ -3744,8 +3717,8 @@
         </p:nvSpPr>
         <p:spPr>
           <a:xfrm>
-            <a:off x="685800" y="4274820"/>
-            <a:ext cx="10820095" cy="0"/>
+            <a:off x="6095848" y="2075688"/>
+            <a:ext cx="0" cy="4078224"/>
           </a:xfrm>
           <a:prstGeom prst="line">
             <a:avLst/>
@@ -3767,7 +3740,7 @@
         </p:nvSpPr>
         <p:spPr>
           <a:xfrm>
-            <a:off x="685800" y="4604004"/>
+            <a:off x="6507328" y="3072384"/>
             <a:ext cx="384048" cy="384048"/>
           </a:xfrm>
           <a:prstGeom prst="roundRect">
@@ -3786,32 +3759,62 @@
           </a:ln>
         </p:spPr>
       </p:sp>
-      <p:sp>
-        <p:nvSpPr>
-          <p:cNvPr id="18" name="Text 15"/>
-          <p:cNvSpPr/>
-          <p:nvPr/>
-        </p:nvSpPr>
-        <p:spPr>
-          <a:xfrm>
-            <a:off x="685800" y="4604004"/>
-            <a:ext cx="384048" cy="384048"/>
-          </a:xfrm>
-          <a:prstGeom prst="rect">
-            <a:avLst/>
-          </a:prstGeom>
-          <a:noFill/>
-          <a:ln/>
-        </p:spPr>
-        <p:txBody>
-          <a:bodyPr wrap="square" lIns="0" tIns="0" rIns="0" bIns="0" rtlCol="0" anchor="ctr"/>
-          <a:lstStyle/>
-          <a:p>
-            <a:pPr algn="ctr" indent="0" marL="0">
-              <a:buNone/>
-            </a:pPr>
-            <a:r>
-              <a:rPr lang="en-US" sz="1250" b="1" dirty="0">
+      <p:pic>
+        <p:nvPicPr>
+          <p:cNvPr id="18" name="Image 0" descr="preencoded.png">    </p:cNvPr>
+          <p:cNvPicPr>
+            <a:picLocks noChangeAspect="1"/>
+          </p:cNvPicPr>
+          <p:nvPr/>
+        </p:nvPicPr>
+        <p:blipFill>
+          <a:blip r:embed="rId1">
+            <a:extLst>
+              <a:ext uri="{96DAC541-7B7A-43D3-8B79-37D633B846F1}">
+                <asvg:svgBlip xmlns:asvg="http://schemas.microsoft.com/office/drawing/2016/SVG/main" r:embed="rId2"/>
+              </a:ext>
+            </a:extLst>
+          </a:blip>
+          <a:stretch>
+            <a:fillRect/>
+          </a:stretch>
+        </p:blipFill>
+        <p:spPr>
+          <a:xfrm>
+            <a:off x="6599499" y="3164556"/>
+            <a:ext cx="199705" cy="199705"/>
+          </a:xfrm>
+          <a:prstGeom prst="rect">
+            <a:avLst/>
+          </a:prstGeom>
+        </p:spPr>
+      </p:pic>
+      <p:sp>
+        <p:nvSpPr>
+          <p:cNvPr id="19" name="Text 15"/>
+          <p:cNvSpPr/>
+          <p:nvPr/>
+        </p:nvSpPr>
+        <p:spPr>
+          <a:xfrm>
+            <a:off x="7092544" y="3017520"/>
+            <a:ext cx="4413352" cy="201168"/>
+          </a:xfrm>
+          <a:prstGeom prst="rect">
+            <a:avLst/>
+          </a:prstGeom>
+          <a:noFill/>
+          <a:ln/>
+        </p:spPr>
+        <p:txBody>
+          <a:bodyPr wrap="square" rtlCol="0" anchor="ctr"/>
+          <a:lstStyle/>
+          <a:p>
+            <a:pPr indent="0" marL="0">
+              <a:buNone/>
+            </a:pPr>
+            <a:r>
+              <a:rPr lang="en-US" sz="900" b="1" spc="100" kern="0" dirty="0">
                 <a:solidFill>
                   <a:srgbClr val="2F4B7C"/>
                 </a:solidFill>
@@ -3819,45 +3822,6 @@
                 <a:ea typeface="Pretendard" pitchFamily="34" charset="-122"/>
                 <a:cs typeface="Pretendard" pitchFamily="34" charset="-120"/>
               </a:rPr>
-              <a:t>▣</a:t>
-            </a:r>
-            <a:endParaRPr lang="en-US" sz="1250" dirty="0"/>
-          </a:p>
-        </p:txBody>
-      </p:sp>
-      <p:sp>
-        <p:nvSpPr>
-          <p:cNvPr id="19" name="Text 16"/>
-          <p:cNvSpPr/>
-          <p:nvPr/>
-        </p:nvSpPr>
-        <p:spPr>
-          <a:xfrm>
-            <a:off x="1271016" y="4549140"/>
-            <a:ext cx="4573372" cy="201168"/>
-          </a:xfrm>
-          <a:prstGeom prst="rect">
-            <a:avLst/>
-          </a:prstGeom>
-          <a:noFill/>
-          <a:ln/>
-        </p:spPr>
-        <p:txBody>
-          <a:bodyPr wrap="square" rtlCol="0" anchor="ctr"/>
-          <a:lstStyle/>
-          <a:p>
-            <a:pPr indent="0" marL="0">
-              <a:buNone/>
-            </a:pPr>
-            <a:r>
-              <a:rPr lang="en-US" sz="900" b="1" spc="100" kern="0" dirty="0">
-                <a:solidFill>
-                  <a:srgbClr val="2F4B7C"/>
-                </a:solidFill>
-                <a:latin typeface="Pretendard" pitchFamily="34" charset="0"/>
-                <a:ea typeface="Pretendard" pitchFamily="34" charset="-122"/>
-                <a:cs typeface="Pretendard" pitchFamily="34" charset="-120"/>
-              </a:rPr>
               <a:t>검사 ①</a:t>
             </a:r>
             <a:endParaRPr lang="en-US" sz="900" dirty="0"/>
@@ -3866,14 +3830,14 @@
       </p:sp>
       <p:sp>
         <p:nvSpPr>
-          <p:cNvPr id="20" name="Text 17"/>
-          <p:cNvSpPr/>
-          <p:nvPr/>
-        </p:nvSpPr>
-        <p:spPr>
-          <a:xfrm>
-            <a:off x="1271016" y="4750308"/>
-            <a:ext cx="4573372" cy="256032"/>
+          <p:cNvPr id="20" name="Text 16"/>
+          <p:cNvSpPr/>
+          <p:nvPr/>
+        </p:nvSpPr>
+        <p:spPr>
+          <a:xfrm>
+            <a:off x="7092544" y="3218688"/>
+            <a:ext cx="4413352" cy="256032"/>
           </a:xfrm>
           <a:prstGeom prst="rect">
             <a:avLst/>
@@ -3905,14 +3869,14 @@
       </p:sp>
       <p:sp>
         <p:nvSpPr>
-          <p:cNvPr id="21" name="Text 18"/>
-          <p:cNvSpPr/>
-          <p:nvPr/>
-        </p:nvSpPr>
-        <p:spPr>
-          <a:xfrm>
-            <a:off x="1271016" y="5024628"/>
-            <a:ext cx="4573372" cy="758952"/>
+          <p:cNvPr id="21" name="Text 17"/>
+          <p:cNvSpPr/>
+          <p:nvPr/>
+        </p:nvSpPr>
+        <p:spPr>
+          <a:xfrm>
+            <a:off x="7092544" y="3493008"/>
+            <a:ext cx="4413352" cy="484632"/>
           </a:xfrm>
           <a:prstGeom prst="rect">
             <a:avLst/>
@@ -3944,13 +3908,13 @@
       </p:sp>
       <p:sp>
         <p:nvSpPr>
-          <p:cNvPr id="22" name="Shape 19"/>
-          <p:cNvSpPr/>
-          <p:nvPr/>
-        </p:nvSpPr>
-        <p:spPr>
-          <a:xfrm>
-            <a:off x="6347308" y="4604004"/>
+          <p:cNvPr id="22" name="Shape 18"/>
+          <p:cNvSpPr/>
+          <p:nvPr/>
+        </p:nvSpPr>
+        <p:spPr>
+          <a:xfrm>
+            <a:off x="6507328" y="4306824"/>
             <a:ext cx="384048" cy="384048"/>
           </a:xfrm>
           <a:prstGeom prst="roundRect">
@@ -3969,32 +3933,62 @@
           </a:ln>
         </p:spPr>
       </p:sp>
-      <p:sp>
-        <p:nvSpPr>
-          <p:cNvPr id="23" name="Text 20"/>
-          <p:cNvSpPr/>
-          <p:nvPr/>
-        </p:nvSpPr>
-        <p:spPr>
-          <a:xfrm>
-            <a:off x="6347308" y="4604004"/>
-            <a:ext cx="384048" cy="384048"/>
-          </a:xfrm>
-          <a:prstGeom prst="rect">
-            <a:avLst/>
-          </a:prstGeom>
-          <a:noFill/>
-          <a:ln/>
-        </p:spPr>
-        <p:txBody>
-          <a:bodyPr wrap="square" lIns="0" tIns="0" rIns="0" bIns="0" rtlCol="0" anchor="ctr"/>
-          <a:lstStyle/>
-          <a:p>
-            <a:pPr algn="ctr" indent="0" marL="0">
-              <a:buNone/>
-            </a:pPr>
-            <a:r>
-              <a:rPr lang="en-US" sz="1250" b="1" dirty="0">
+      <p:pic>
+        <p:nvPicPr>
+          <p:cNvPr id="23" name="Image 1" descr="preencoded.png">    </p:cNvPr>
+          <p:cNvPicPr>
+            <a:picLocks noChangeAspect="1"/>
+          </p:cNvPicPr>
+          <p:nvPr/>
+        </p:nvPicPr>
+        <p:blipFill>
+          <a:blip r:embed="rId3">
+            <a:extLst>
+              <a:ext uri="{96DAC541-7B7A-43D3-8B79-37D633B846F1}">
+                <asvg:svgBlip xmlns:asvg="http://schemas.microsoft.com/office/drawing/2016/SVG/main" r:embed="rId4"/>
+              </a:ext>
+            </a:extLst>
+          </a:blip>
+          <a:stretch>
+            <a:fillRect/>
+          </a:stretch>
+        </p:blipFill>
+        <p:spPr>
+          <a:xfrm>
+            <a:off x="6599499" y="4398996"/>
+            <a:ext cx="199705" cy="199705"/>
+          </a:xfrm>
+          <a:prstGeom prst="rect">
+            <a:avLst/>
+          </a:prstGeom>
+        </p:spPr>
+      </p:pic>
+      <p:sp>
+        <p:nvSpPr>
+          <p:cNvPr id="24" name="Text 19"/>
+          <p:cNvSpPr/>
+          <p:nvPr/>
+        </p:nvSpPr>
+        <p:spPr>
+          <a:xfrm>
+            <a:off x="7092544" y="4251960"/>
+            <a:ext cx="4413352" cy="201168"/>
+          </a:xfrm>
+          <a:prstGeom prst="rect">
+            <a:avLst/>
+          </a:prstGeom>
+          <a:noFill/>
+          <a:ln/>
+        </p:spPr>
+        <p:txBody>
+          <a:bodyPr wrap="square" rtlCol="0" anchor="ctr"/>
+          <a:lstStyle/>
+          <a:p>
+            <a:pPr indent="0" marL="0">
+              <a:buNone/>
+            </a:pPr>
+            <a:r>
+              <a:rPr lang="en-US" sz="900" b="1" spc="100" kern="0" dirty="0">
                 <a:solidFill>
                   <a:srgbClr val="2F4B7C"/>
                 </a:solidFill>
@@ -4002,45 +3996,6 @@
                 <a:ea typeface="Pretendard" pitchFamily="34" charset="-122"/>
                 <a:cs typeface="Pretendard" pitchFamily="34" charset="-120"/>
               </a:rPr>
-              <a:t>◎</a:t>
-            </a:r>
-            <a:endParaRPr lang="en-US" sz="1250" dirty="0"/>
-          </a:p>
-        </p:txBody>
-      </p:sp>
-      <p:sp>
-        <p:nvSpPr>
-          <p:cNvPr id="24" name="Text 21"/>
-          <p:cNvSpPr/>
-          <p:nvPr/>
-        </p:nvSpPr>
-        <p:spPr>
-          <a:xfrm>
-            <a:off x="6932524" y="4549140"/>
-            <a:ext cx="4573372" cy="201168"/>
-          </a:xfrm>
-          <a:prstGeom prst="rect">
-            <a:avLst/>
-          </a:prstGeom>
-          <a:noFill/>
-          <a:ln/>
-        </p:spPr>
-        <p:txBody>
-          <a:bodyPr wrap="square" rtlCol="0" anchor="ctr"/>
-          <a:lstStyle/>
-          <a:p>
-            <a:pPr indent="0" marL="0">
-              <a:buNone/>
-            </a:pPr>
-            <a:r>
-              <a:rPr lang="en-US" sz="900" b="1" spc="100" kern="0" dirty="0">
-                <a:solidFill>
-                  <a:srgbClr val="2F4B7C"/>
-                </a:solidFill>
-                <a:latin typeface="Pretendard" pitchFamily="34" charset="0"/>
-                <a:ea typeface="Pretendard" pitchFamily="34" charset="-122"/>
-                <a:cs typeface="Pretendard" pitchFamily="34" charset="-120"/>
-              </a:rPr>
               <a:t>검사 ②</a:t>
             </a:r>
             <a:endParaRPr lang="en-US" sz="900" dirty="0"/>
@@ -4049,14 +4004,14 @@
       </p:sp>
       <p:sp>
         <p:nvSpPr>
-          <p:cNvPr id="25" name="Text 22"/>
-          <p:cNvSpPr/>
-          <p:nvPr/>
-        </p:nvSpPr>
-        <p:spPr>
-          <a:xfrm>
-            <a:off x="6932524" y="4750308"/>
-            <a:ext cx="4573372" cy="256032"/>
+          <p:cNvPr id="25" name="Text 20"/>
+          <p:cNvSpPr/>
+          <p:nvPr/>
+        </p:nvSpPr>
+        <p:spPr>
+          <a:xfrm>
+            <a:off x="7092544" y="4453128"/>
+            <a:ext cx="4413352" cy="256032"/>
           </a:xfrm>
           <a:prstGeom prst="rect">
             <a:avLst/>
@@ -4088,14 +4043,14 @@
       </p:sp>
       <p:sp>
         <p:nvSpPr>
-          <p:cNvPr id="26" name="Text 23"/>
-          <p:cNvSpPr/>
-          <p:nvPr/>
-        </p:nvSpPr>
-        <p:spPr>
-          <a:xfrm>
-            <a:off x="6932524" y="5024628"/>
-            <a:ext cx="4573372" cy="758952"/>
+          <p:cNvPr id="26" name="Text 21"/>
+          <p:cNvSpPr/>
+          <p:nvPr/>
+        </p:nvSpPr>
+        <p:spPr>
+          <a:xfrm>
+            <a:off x="7092544" y="4727448"/>
+            <a:ext cx="4413352" cy="484632"/>
           </a:xfrm>
           <a:prstGeom prst="rect">
             <a:avLst/>
@@ -6049,48 +6004,39 @@
           </a:ln>
         </p:spPr>
       </p:sp>
-      <p:sp>
-        <p:nvSpPr>
-          <p:cNvPr id="31" name="Text 28"/>
-          <p:cNvSpPr/>
-          <p:nvPr/>
-        </p:nvSpPr>
-        <p:spPr>
-          <a:xfrm>
-            <a:off x="685800" y="5340096"/>
-            <a:ext cx="384048" cy="384048"/>
-          </a:xfrm>
-          <a:prstGeom prst="rect">
-            <a:avLst/>
-          </a:prstGeom>
-          <a:noFill/>
-          <a:ln/>
-        </p:spPr>
-        <p:txBody>
-          <a:bodyPr wrap="square" lIns="0" tIns="0" rIns="0" bIns="0" rtlCol="0" anchor="ctr"/>
-          <a:lstStyle/>
-          <a:p>
-            <a:pPr algn="ctr" indent="0" marL="0">
-              <a:buNone/>
-            </a:pPr>
-            <a:r>
-              <a:rPr lang="en-US" sz="1250" b="1" dirty="0">
-                <a:solidFill>
-                  <a:srgbClr val="2F4B7C"/>
-                </a:solidFill>
-                <a:latin typeface="Pretendard" pitchFamily="34" charset="0"/>
-                <a:ea typeface="Pretendard" pitchFamily="34" charset="-122"/>
-                <a:cs typeface="Pretendard" pitchFamily="34" charset="-120"/>
-              </a:rPr>
-              <a:t>✓</a:t>
-            </a:r>
-            <a:endParaRPr lang="en-US" sz="1250" dirty="0"/>
-          </a:p>
-        </p:txBody>
-      </p:sp>
-      <p:sp>
-        <p:nvSpPr>
-          <p:cNvPr id="32" name="Text 29"/>
+      <p:pic>
+        <p:nvPicPr>
+          <p:cNvPr id="31" name="Image 0" descr="preencoded.png">    </p:cNvPr>
+          <p:cNvPicPr>
+            <a:picLocks noChangeAspect="1"/>
+          </p:cNvPicPr>
+          <p:nvPr/>
+        </p:nvPicPr>
+        <p:blipFill>
+          <a:blip r:embed="rId1">
+            <a:extLst>
+              <a:ext uri="{96DAC541-7B7A-43D3-8B79-37D633B846F1}">
+                <asvg:svgBlip xmlns:asvg="http://schemas.microsoft.com/office/drawing/2016/SVG/main" r:embed="rId2"/>
+              </a:ext>
+            </a:extLst>
+          </a:blip>
+          <a:stretch>
+            <a:fillRect/>
+          </a:stretch>
+        </p:blipFill>
+        <p:spPr>
+          <a:xfrm>
+            <a:off x="777972" y="5432268"/>
+            <a:ext cx="199705" cy="199705"/>
+          </a:xfrm>
+          <a:prstGeom prst="rect">
+            <a:avLst/>
+          </a:prstGeom>
+        </p:spPr>
+      </p:pic>
+      <p:sp>
+        <p:nvSpPr>
+          <p:cNvPr id="32" name="Text 28"/>
           <p:cNvSpPr/>
           <p:nvPr/>
         </p:nvSpPr>
@@ -6129,7 +6075,7 @@
       </p:sp>
       <p:sp>
         <p:nvSpPr>
-          <p:cNvPr id="33" name="Text 30"/>
+          <p:cNvPr id="33" name="Text 29"/>
           <p:cNvSpPr/>
           <p:nvPr/>
         </p:nvSpPr>
@@ -6168,7 +6114,7 @@
       </p:sp>
       <p:sp>
         <p:nvSpPr>
-          <p:cNvPr id="34" name="Text 31"/>
+          <p:cNvPr id="34" name="Text 30"/>
           <p:cNvSpPr/>
           <p:nvPr/>
         </p:nvSpPr>
@@ -6207,7 +6153,7 @@
       </p:sp>
       <p:sp>
         <p:nvSpPr>
-          <p:cNvPr id="35" name="Shape 32"/>
+          <p:cNvPr id="35" name="Shape 31"/>
           <p:cNvSpPr/>
           <p:nvPr/>
         </p:nvSpPr>
@@ -6232,48 +6178,39 @@
           </a:ln>
         </p:spPr>
       </p:sp>
-      <p:sp>
-        <p:nvSpPr>
-          <p:cNvPr id="36" name="Text 33"/>
-          <p:cNvSpPr/>
-          <p:nvPr/>
-        </p:nvSpPr>
-        <p:spPr>
-          <a:xfrm>
-            <a:off x="6370168" y="5340096"/>
-            <a:ext cx="384048" cy="384048"/>
-          </a:xfrm>
-          <a:prstGeom prst="rect">
-            <a:avLst/>
-          </a:prstGeom>
-          <a:noFill/>
-          <a:ln/>
-        </p:spPr>
-        <p:txBody>
-          <a:bodyPr wrap="square" lIns="0" tIns="0" rIns="0" bIns="0" rtlCol="0" anchor="ctr"/>
-          <a:lstStyle/>
-          <a:p>
-            <a:pPr algn="ctr" indent="0" marL="0">
-              <a:buNone/>
-            </a:pPr>
-            <a:r>
-              <a:rPr lang="en-US" sz="1250" b="1" dirty="0">
-                <a:solidFill>
-                  <a:srgbClr val="2F4B7C"/>
-                </a:solidFill>
-                <a:latin typeface="Pretendard" pitchFamily="34" charset="0"/>
-                <a:ea typeface="Pretendard" pitchFamily="34" charset="-122"/>
-                <a:cs typeface="Pretendard" pitchFamily="34" charset="-120"/>
-              </a:rPr>
-              <a:t>✓</a:t>
-            </a:r>
-            <a:endParaRPr lang="en-US" sz="1250" dirty="0"/>
-          </a:p>
-        </p:txBody>
-      </p:sp>
-      <p:sp>
-        <p:nvSpPr>
-          <p:cNvPr id="37" name="Text 34"/>
+      <p:pic>
+        <p:nvPicPr>
+          <p:cNvPr id="36" name="Image 1" descr="preencoded.png">    </p:cNvPr>
+          <p:cNvPicPr>
+            <a:picLocks noChangeAspect="1"/>
+          </p:cNvPicPr>
+          <p:nvPr/>
+        </p:nvPicPr>
+        <p:blipFill>
+          <a:blip r:embed="rId3">
+            <a:extLst>
+              <a:ext uri="{96DAC541-7B7A-43D3-8B79-37D633B846F1}">
+                <asvg:svgBlip xmlns:asvg="http://schemas.microsoft.com/office/drawing/2016/SVG/main" r:embed="rId4"/>
+              </a:ext>
+            </a:extLst>
+          </a:blip>
+          <a:stretch>
+            <a:fillRect/>
+          </a:stretch>
+        </p:blipFill>
+        <p:spPr>
+          <a:xfrm>
+            <a:off x="6462339" y="5432268"/>
+            <a:ext cx="199705" cy="199705"/>
+          </a:xfrm>
+          <a:prstGeom prst="rect">
+            <a:avLst/>
+          </a:prstGeom>
+        </p:spPr>
+      </p:pic>
+      <p:sp>
+        <p:nvSpPr>
+          <p:cNvPr id="37" name="Text 32"/>
           <p:cNvSpPr/>
           <p:nvPr/>
         </p:nvSpPr>
@@ -6312,7 +6249,7 @@
       </p:sp>
       <p:sp>
         <p:nvSpPr>
-          <p:cNvPr id="38" name="Text 35"/>
+          <p:cNvPr id="38" name="Text 33"/>
           <p:cNvSpPr/>
           <p:nvPr/>
         </p:nvSpPr>
@@ -6351,7 +6288,7 @@
       </p:sp>
       <p:sp>
         <p:nvSpPr>
-          <p:cNvPr id="39" name="Text 36"/>
+          <p:cNvPr id="39" name="Text 34"/>
           <p:cNvSpPr/>
           <p:nvPr/>
         </p:nvSpPr>
@@ -7138,48 +7075,39 @@
           </a:ln>
         </p:spPr>
       </p:sp>
-      <p:sp>
-        <p:nvSpPr>
-          <p:cNvPr id="23" name="Text 20"/>
-          <p:cNvSpPr/>
-          <p:nvPr/>
-        </p:nvSpPr>
-        <p:spPr>
-          <a:xfrm>
-            <a:off x="685800" y="4604004"/>
-            <a:ext cx="384048" cy="384048"/>
-          </a:xfrm>
-          <a:prstGeom prst="rect">
-            <a:avLst/>
-          </a:prstGeom>
-          <a:noFill/>
-          <a:ln/>
-        </p:spPr>
-        <p:txBody>
-          <a:bodyPr wrap="square" lIns="0" tIns="0" rIns="0" bIns="0" rtlCol="0" anchor="ctr"/>
-          <a:lstStyle/>
-          <a:p>
-            <a:pPr algn="ctr" indent="0" marL="0">
-              <a:buNone/>
-            </a:pPr>
-            <a:r>
-              <a:rPr lang="en-US" sz="1250" b="1" dirty="0">
-                <a:solidFill>
-                  <a:srgbClr val="2F4B7C"/>
-                </a:solidFill>
-                <a:latin typeface="Pretendard" pitchFamily="34" charset="0"/>
-                <a:ea typeface="Pretendard" pitchFamily="34" charset="-122"/>
-                <a:cs typeface="Pretendard" pitchFamily="34" charset="-120"/>
-              </a:rPr>
-              <a:t>▣</a:t>
-            </a:r>
-            <a:endParaRPr lang="en-US" sz="1250" dirty="0"/>
-          </a:p>
-        </p:txBody>
-      </p:sp>
-      <p:sp>
-        <p:nvSpPr>
-          <p:cNvPr id="24" name="Text 21"/>
+      <p:pic>
+        <p:nvPicPr>
+          <p:cNvPr id="23" name="Image 0" descr="preencoded.png">    </p:cNvPr>
+          <p:cNvPicPr>
+            <a:picLocks noChangeAspect="1"/>
+          </p:cNvPicPr>
+          <p:nvPr/>
+        </p:nvPicPr>
+        <p:blipFill>
+          <a:blip r:embed="rId1">
+            <a:extLst>
+              <a:ext uri="{96DAC541-7B7A-43D3-8B79-37D633B846F1}">
+                <asvg:svgBlip xmlns:asvg="http://schemas.microsoft.com/office/drawing/2016/SVG/main" r:embed="rId2"/>
+              </a:ext>
+            </a:extLst>
+          </a:blip>
+          <a:stretch>
+            <a:fillRect/>
+          </a:stretch>
+        </p:blipFill>
+        <p:spPr>
+          <a:xfrm>
+            <a:off x="777972" y="4696176"/>
+            <a:ext cx="199705" cy="199705"/>
+          </a:xfrm>
+          <a:prstGeom prst="rect">
+            <a:avLst/>
+          </a:prstGeom>
+        </p:spPr>
+      </p:pic>
+      <p:sp>
+        <p:nvSpPr>
+          <p:cNvPr id="24" name="Text 20"/>
           <p:cNvSpPr/>
           <p:nvPr/>
         </p:nvSpPr>
@@ -7218,7 +7146,7 @@
       </p:sp>
       <p:sp>
         <p:nvSpPr>
-          <p:cNvPr id="25" name="Text 22"/>
+          <p:cNvPr id="25" name="Text 21"/>
           <p:cNvSpPr/>
           <p:nvPr/>
         </p:nvSpPr>
@@ -7257,7 +7185,7 @@
       </p:sp>
       <p:sp>
         <p:nvSpPr>
-          <p:cNvPr id="26" name="Text 23"/>
+          <p:cNvPr id="26" name="Text 22"/>
           <p:cNvSpPr/>
           <p:nvPr/>
         </p:nvSpPr>
@@ -7296,7 +7224,7 @@
       </p:sp>
       <p:sp>
         <p:nvSpPr>
-          <p:cNvPr id="27" name="Shape 24"/>
+          <p:cNvPr id="27" name="Shape 23"/>
           <p:cNvSpPr/>
           <p:nvPr/>
         </p:nvSpPr>
@@ -7321,48 +7249,39 @@
           </a:ln>
         </p:spPr>
       </p:sp>
-      <p:sp>
-        <p:nvSpPr>
-          <p:cNvPr id="28" name="Text 25"/>
-          <p:cNvSpPr/>
-          <p:nvPr/>
-        </p:nvSpPr>
-        <p:spPr>
-          <a:xfrm>
-            <a:off x="4460138" y="4604004"/>
-            <a:ext cx="384048" cy="384048"/>
-          </a:xfrm>
-          <a:prstGeom prst="rect">
-            <a:avLst/>
-          </a:prstGeom>
-          <a:noFill/>
-          <a:ln/>
-        </p:spPr>
-        <p:txBody>
-          <a:bodyPr wrap="square" lIns="0" tIns="0" rIns="0" bIns="0" rtlCol="0" anchor="ctr"/>
-          <a:lstStyle/>
-          <a:p>
-            <a:pPr algn="ctr" indent="0" marL="0">
-              <a:buNone/>
-            </a:pPr>
-            <a:r>
-              <a:rPr lang="en-US" sz="1250" b="1" dirty="0">
-                <a:solidFill>
-                  <a:srgbClr val="2F4B7C"/>
-                </a:solidFill>
-                <a:latin typeface="Pretendard" pitchFamily="34" charset="0"/>
-                <a:ea typeface="Pretendard" pitchFamily="34" charset="-122"/>
-                <a:cs typeface="Pretendard" pitchFamily="34" charset="-120"/>
-              </a:rPr>
-              <a:t>⎙</a:t>
-            </a:r>
-            <a:endParaRPr lang="en-US" sz="1250" dirty="0"/>
-          </a:p>
-        </p:txBody>
-      </p:sp>
-      <p:sp>
-        <p:nvSpPr>
-          <p:cNvPr id="29" name="Text 26"/>
+      <p:pic>
+        <p:nvPicPr>
+          <p:cNvPr id="28" name="Image 1" descr="preencoded.png">    </p:cNvPr>
+          <p:cNvPicPr>
+            <a:picLocks noChangeAspect="1"/>
+          </p:cNvPicPr>
+          <p:nvPr/>
+        </p:nvPicPr>
+        <p:blipFill>
+          <a:blip r:embed="rId3">
+            <a:extLst>
+              <a:ext uri="{96DAC541-7B7A-43D3-8B79-37D633B846F1}">
+                <asvg:svgBlip xmlns:asvg="http://schemas.microsoft.com/office/drawing/2016/SVG/main" r:embed="rId4"/>
+              </a:ext>
+            </a:extLst>
+          </a:blip>
+          <a:stretch>
+            <a:fillRect/>
+          </a:stretch>
+        </p:blipFill>
+        <p:spPr>
+          <a:xfrm>
+            <a:off x="4552310" y="4696176"/>
+            <a:ext cx="199705" cy="199705"/>
+          </a:xfrm>
+          <a:prstGeom prst="rect">
+            <a:avLst/>
+          </a:prstGeom>
+        </p:spPr>
+      </p:pic>
+      <p:sp>
+        <p:nvSpPr>
+          <p:cNvPr id="29" name="Text 24"/>
           <p:cNvSpPr/>
           <p:nvPr/>
         </p:nvSpPr>
@@ -7401,7 +7320,7 @@
       </p:sp>
       <p:sp>
         <p:nvSpPr>
-          <p:cNvPr id="30" name="Text 27"/>
+          <p:cNvPr id="30" name="Text 25"/>
           <p:cNvSpPr/>
           <p:nvPr/>
         </p:nvSpPr>
@@ -7440,7 +7359,7 @@
       </p:sp>
       <p:sp>
         <p:nvSpPr>
-          <p:cNvPr id="31" name="Text 28"/>
+          <p:cNvPr id="31" name="Text 26"/>
           <p:cNvSpPr/>
           <p:nvPr/>
         </p:nvSpPr>
@@ -7479,7 +7398,7 @@
       </p:sp>
       <p:sp>
         <p:nvSpPr>
-          <p:cNvPr id="32" name="Shape 29"/>
+          <p:cNvPr id="32" name="Shape 27"/>
           <p:cNvSpPr/>
           <p:nvPr/>
         </p:nvSpPr>
@@ -7504,48 +7423,39 @@
           </a:ln>
         </p:spPr>
       </p:sp>
-      <p:sp>
-        <p:nvSpPr>
-          <p:cNvPr id="33" name="Text 30"/>
-          <p:cNvSpPr/>
-          <p:nvPr/>
-        </p:nvSpPr>
-        <p:spPr>
-          <a:xfrm>
-            <a:off x="8234477" y="4604004"/>
-            <a:ext cx="384048" cy="384048"/>
-          </a:xfrm>
-          <a:prstGeom prst="rect">
-            <a:avLst/>
-          </a:prstGeom>
-          <a:noFill/>
-          <a:ln/>
-        </p:spPr>
-        <p:txBody>
-          <a:bodyPr wrap="square" lIns="0" tIns="0" rIns="0" bIns="0" rtlCol="0" anchor="ctr"/>
-          <a:lstStyle/>
-          <a:p>
-            <a:pPr algn="ctr" indent="0" marL="0">
-              <a:buNone/>
-            </a:pPr>
-            <a:r>
-              <a:rPr lang="en-US" sz="1250" b="1" dirty="0">
-                <a:solidFill>
-                  <a:srgbClr val="2F4B7C"/>
-                </a:solidFill>
-                <a:latin typeface="Pretendard" pitchFamily="34" charset="0"/>
-                <a:ea typeface="Pretendard" pitchFamily="34" charset="-122"/>
-                <a:cs typeface="Pretendard" pitchFamily="34" charset="-120"/>
-              </a:rPr>
-              <a:t>⌗</a:t>
-            </a:r>
-            <a:endParaRPr lang="en-US" sz="1250" dirty="0"/>
-          </a:p>
-        </p:txBody>
-      </p:sp>
-      <p:sp>
-        <p:nvSpPr>
-          <p:cNvPr id="34" name="Text 31"/>
+      <p:pic>
+        <p:nvPicPr>
+          <p:cNvPr id="33" name="Image 2" descr="preencoded.png">    </p:cNvPr>
+          <p:cNvPicPr>
+            <a:picLocks noChangeAspect="1"/>
+          </p:cNvPicPr>
+          <p:nvPr/>
+        </p:nvPicPr>
+        <p:blipFill>
+          <a:blip r:embed="rId5">
+            <a:extLst>
+              <a:ext uri="{96DAC541-7B7A-43D3-8B79-37D633B846F1}">
+                <asvg:svgBlip xmlns:asvg="http://schemas.microsoft.com/office/drawing/2016/SVG/main" r:embed="rId6"/>
+              </a:ext>
+            </a:extLst>
+          </a:blip>
+          <a:stretch>
+            <a:fillRect/>
+          </a:stretch>
+        </p:blipFill>
+        <p:spPr>
+          <a:xfrm>
+            <a:off x="8326648" y="4696176"/>
+            <a:ext cx="199705" cy="199705"/>
+          </a:xfrm>
+          <a:prstGeom prst="rect">
+            <a:avLst/>
+          </a:prstGeom>
+        </p:spPr>
+      </p:pic>
+      <p:sp>
+        <p:nvSpPr>
+          <p:cNvPr id="34" name="Text 28"/>
           <p:cNvSpPr/>
           <p:nvPr/>
         </p:nvSpPr>
@@ -7584,7 +7494,7 @@
       </p:sp>
       <p:sp>
         <p:nvSpPr>
-          <p:cNvPr id="35" name="Text 32"/>
+          <p:cNvPr id="35" name="Text 29"/>
           <p:cNvSpPr/>
           <p:nvPr/>
         </p:nvSpPr>
@@ -7623,7 +7533,7 @@
       </p:sp>
       <p:sp>
         <p:nvSpPr>
-          <p:cNvPr id="36" name="Text 33"/>
+          <p:cNvPr id="36" name="Text 30"/>
           <p:cNvSpPr/>
           <p:nvPr/>
         </p:nvSpPr>
@@ -7836,48 +7746,39 @@
           </a:ln>
         </p:spPr>
       </p:sp>
-      <p:sp>
-        <p:nvSpPr>
-          <p:cNvPr id="7" name="Text 4"/>
-          <p:cNvSpPr/>
-          <p:nvPr/>
-        </p:nvSpPr>
-        <p:spPr>
-          <a:xfrm>
-            <a:off x="1935328" y="3483864"/>
-            <a:ext cx="384048" cy="384048"/>
-          </a:xfrm>
-          <a:prstGeom prst="rect">
-            <a:avLst/>
-          </a:prstGeom>
-          <a:noFill/>
-          <a:ln/>
-        </p:spPr>
-        <p:txBody>
-          <a:bodyPr wrap="square" lIns="0" tIns="0" rIns="0" bIns="0" rtlCol="0" anchor="ctr"/>
-          <a:lstStyle/>
-          <a:p>
-            <a:pPr algn="ctr" indent="0" marL="0">
-              <a:buNone/>
-            </a:pPr>
-            <a:r>
-              <a:rPr lang="en-US" sz="1250" b="1" dirty="0">
-                <a:solidFill>
-                  <a:srgbClr val="2F4B7C"/>
-                </a:solidFill>
-                <a:latin typeface="Pretendard" pitchFamily="34" charset="0"/>
-                <a:ea typeface="Pretendard" pitchFamily="34" charset="-122"/>
-                <a:cs typeface="Pretendard" pitchFamily="34" charset="-120"/>
-              </a:rPr>
-              <a:t>✦</a:t>
-            </a:r>
-            <a:endParaRPr lang="en-US" sz="1250" dirty="0"/>
-          </a:p>
-        </p:txBody>
-      </p:sp>
-      <p:sp>
-        <p:nvSpPr>
-          <p:cNvPr id="8" name="Text 5"/>
+      <p:pic>
+        <p:nvPicPr>
+          <p:cNvPr id="7" name="Image 0" descr="preencoded.png">    </p:cNvPr>
+          <p:cNvPicPr>
+            <a:picLocks noChangeAspect="1"/>
+          </p:cNvPicPr>
+          <p:nvPr/>
+        </p:nvPicPr>
+        <p:blipFill>
+          <a:blip r:embed="rId1">
+            <a:extLst>
+              <a:ext uri="{96DAC541-7B7A-43D3-8B79-37D633B846F1}">
+                <asvg:svgBlip xmlns:asvg="http://schemas.microsoft.com/office/drawing/2016/SVG/main" r:embed="rId2"/>
+              </a:ext>
+            </a:extLst>
+          </a:blip>
+          <a:stretch>
+            <a:fillRect/>
+          </a:stretch>
+        </p:blipFill>
+        <p:spPr>
+          <a:xfrm>
+            <a:off x="2027499" y="3576036"/>
+            <a:ext cx="199705" cy="199705"/>
+          </a:xfrm>
+          <a:prstGeom prst="rect">
+            <a:avLst/>
+          </a:prstGeom>
+        </p:spPr>
+      </p:pic>
+      <p:sp>
+        <p:nvSpPr>
+          <p:cNvPr id="8" name="Text 4"/>
           <p:cNvSpPr/>
           <p:nvPr/>
         </p:nvSpPr>
@@ -7916,7 +7817,7 @@
       </p:sp>
       <p:sp>
         <p:nvSpPr>
-          <p:cNvPr id="9" name="Text 6"/>
+          <p:cNvPr id="9" name="Text 5"/>
           <p:cNvSpPr/>
           <p:nvPr/>
         </p:nvSpPr>
@@ -7955,7 +7856,7 @@
       </p:sp>
       <p:sp>
         <p:nvSpPr>
-          <p:cNvPr id="10" name="Shape 7"/>
+          <p:cNvPr id="10" name="Shape 6"/>
           <p:cNvSpPr/>
           <p:nvPr/>
         </p:nvSpPr>
@@ -7980,48 +7881,39 @@
           </a:ln>
         </p:spPr>
       </p:sp>
-      <p:sp>
-        <p:nvSpPr>
-          <p:cNvPr id="11" name="Text 8"/>
-          <p:cNvSpPr/>
-          <p:nvPr/>
-        </p:nvSpPr>
-        <p:spPr>
-          <a:xfrm>
-            <a:off x="4861408" y="3483864"/>
-            <a:ext cx="384048" cy="384048"/>
-          </a:xfrm>
-          <a:prstGeom prst="rect">
-            <a:avLst/>
-          </a:prstGeom>
-          <a:noFill/>
-          <a:ln/>
-        </p:spPr>
-        <p:txBody>
-          <a:bodyPr wrap="square" lIns="0" tIns="0" rIns="0" bIns="0" rtlCol="0" anchor="ctr"/>
-          <a:lstStyle/>
-          <a:p>
-            <a:pPr algn="ctr" indent="0" marL="0">
-              <a:buNone/>
-            </a:pPr>
-            <a:r>
-              <a:rPr lang="en-US" sz="1250" b="1" dirty="0">
-                <a:solidFill>
-                  <a:srgbClr val="2F4B7C"/>
-                </a:solidFill>
-                <a:latin typeface="Pretendard" pitchFamily="34" charset="0"/>
-                <a:ea typeface="Pretendard" pitchFamily="34" charset="-122"/>
-                <a:cs typeface="Pretendard" pitchFamily="34" charset="-120"/>
-              </a:rPr>
-              <a:t>⧉</a:t>
-            </a:r>
-            <a:endParaRPr lang="en-US" sz="1250" dirty="0"/>
-          </a:p>
-        </p:txBody>
-      </p:sp>
-      <p:sp>
-        <p:nvSpPr>
-          <p:cNvPr id="12" name="Text 9"/>
+      <p:pic>
+        <p:nvPicPr>
+          <p:cNvPr id="11" name="Image 1" descr="preencoded.png">    </p:cNvPr>
+          <p:cNvPicPr>
+            <a:picLocks noChangeAspect="1"/>
+          </p:cNvPicPr>
+          <p:nvPr/>
+        </p:nvPicPr>
+        <p:blipFill>
+          <a:blip r:embed="rId3">
+            <a:extLst>
+              <a:ext uri="{96DAC541-7B7A-43D3-8B79-37D633B846F1}">
+                <asvg:svgBlip xmlns:asvg="http://schemas.microsoft.com/office/drawing/2016/SVG/main" r:embed="rId4"/>
+              </a:ext>
+            </a:extLst>
+          </a:blip>
+          <a:stretch>
+            <a:fillRect/>
+          </a:stretch>
+        </p:blipFill>
+        <p:spPr>
+          <a:xfrm>
+            <a:off x="4953579" y="3576036"/>
+            <a:ext cx="199705" cy="199705"/>
+          </a:xfrm>
+          <a:prstGeom prst="rect">
+            <a:avLst/>
+          </a:prstGeom>
+        </p:spPr>
+      </p:pic>
+      <p:sp>
+        <p:nvSpPr>
+          <p:cNvPr id="12" name="Text 7"/>
           <p:cNvSpPr/>
           <p:nvPr/>
         </p:nvSpPr>
@@ -8060,7 +7952,7 @@
       </p:sp>
       <p:sp>
         <p:nvSpPr>
-          <p:cNvPr id="13" name="Text 10"/>
+          <p:cNvPr id="13" name="Text 8"/>
           <p:cNvSpPr/>
           <p:nvPr/>
         </p:nvSpPr>
@@ -8099,7 +7991,7 @@
       </p:sp>
       <p:sp>
         <p:nvSpPr>
-          <p:cNvPr id="14" name="Shape 11"/>
+          <p:cNvPr id="14" name="Shape 9"/>
           <p:cNvSpPr/>
           <p:nvPr/>
         </p:nvSpPr>
@@ -8124,48 +8016,39 @@
           </a:ln>
         </p:spPr>
       </p:sp>
-      <p:sp>
-        <p:nvSpPr>
-          <p:cNvPr id="15" name="Text 12"/>
-          <p:cNvSpPr/>
-          <p:nvPr/>
-        </p:nvSpPr>
-        <p:spPr>
-          <a:xfrm>
-            <a:off x="7787488" y="3483864"/>
-            <a:ext cx="384048" cy="384048"/>
-          </a:xfrm>
-          <a:prstGeom prst="rect">
-            <a:avLst/>
-          </a:prstGeom>
-          <a:noFill/>
-          <a:ln/>
-        </p:spPr>
-        <p:txBody>
-          <a:bodyPr wrap="square" lIns="0" tIns="0" rIns="0" bIns="0" rtlCol="0" anchor="ctr"/>
-          <a:lstStyle/>
-          <a:p>
-            <a:pPr algn="ctr" indent="0" marL="0">
-              <a:buNone/>
-            </a:pPr>
-            <a:r>
-              <a:rPr lang="en-US" sz="1250" b="1" dirty="0">
-                <a:solidFill>
-                  <a:srgbClr val="2F4B7C"/>
-                </a:solidFill>
-                <a:latin typeface="Pretendard" pitchFamily="34" charset="0"/>
-                <a:ea typeface="Pretendard" pitchFamily="34" charset="-122"/>
-                <a:cs typeface="Pretendard" pitchFamily="34" charset="-120"/>
-              </a:rPr>
-              <a:t>⌗</a:t>
-            </a:r>
-            <a:endParaRPr lang="en-US" sz="1250" dirty="0"/>
-          </a:p>
-        </p:txBody>
-      </p:sp>
-      <p:sp>
-        <p:nvSpPr>
-          <p:cNvPr id="16" name="Text 13"/>
+      <p:pic>
+        <p:nvPicPr>
+          <p:cNvPr id="15" name="Image 2" descr="preencoded.png">    </p:cNvPr>
+          <p:cNvPicPr>
+            <a:picLocks noChangeAspect="1"/>
+          </p:cNvPicPr>
+          <p:nvPr/>
+        </p:nvPicPr>
+        <p:blipFill>
+          <a:blip r:embed="rId5">
+            <a:extLst>
+              <a:ext uri="{96DAC541-7B7A-43D3-8B79-37D633B846F1}">
+                <asvg:svgBlip xmlns:asvg="http://schemas.microsoft.com/office/drawing/2016/SVG/main" r:embed="rId6"/>
+              </a:ext>
+            </a:extLst>
+          </a:blip>
+          <a:stretch>
+            <a:fillRect/>
+          </a:stretch>
+        </p:blipFill>
+        <p:spPr>
+          <a:xfrm>
+            <a:off x="7879659" y="3576036"/>
+            <a:ext cx="199705" cy="199705"/>
+          </a:xfrm>
+          <a:prstGeom prst="rect">
+            <a:avLst/>
+          </a:prstGeom>
+        </p:spPr>
+      </p:pic>
+      <p:sp>
+        <p:nvSpPr>
+          <p:cNvPr id="16" name="Text 10"/>
           <p:cNvSpPr/>
           <p:nvPr/>
         </p:nvSpPr>
@@ -8204,7 +8087,7 @@
       </p:sp>
       <p:sp>
         <p:nvSpPr>
-          <p:cNvPr id="17" name="Text 14"/>
+          <p:cNvPr id="17" name="Text 11"/>
           <p:cNvSpPr/>
           <p:nvPr/>
         </p:nvSpPr>
